--- a/ai101/slides/week-15.pptx
+++ b/ai101/slides/week-15.pptx
@@ -12,6 +12,9 @@
     <p:sldId id="260" r:id="rId11"/>
     <p:sldId id="261" r:id="rId12"/>
     <p:sldId id="262" r:id="rId13"/>
+    <p:sldId id="263" r:id="rId14"/>
+    <p:sldId id="264" r:id="rId15"/>
+    <p:sldId id="265" r:id="rId16"/>
   </p:sldIdLst>
   <p:sldSz cx="12191695" cy="6858000" type="screen4x3"/>
   <p:notesSz cx="6858000" cy="9144000"/>
@@ -3166,6 +3169,118 @@
 </p:sld>
 </file>
 
+<file path=ppt/slides/slide10.xml><?xml version="1.0" encoding="utf-8"?>
+<p:sld xmlns:a="http://schemas.openxmlformats.org/drawingml/2006/main" xmlns:p="http://schemas.openxmlformats.org/presentationml/2006/main" xmlns:r="http://schemas.openxmlformats.org/officeDocument/2006/relationships">
+  <p:cSld>
+    <p:spTree>
+      <p:nvGrpSpPr>
+        <p:cNvPr id="1" name=""/>
+        <p:cNvGrpSpPr/>
+        <p:nvPr/>
+      </p:nvGrpSpPr>
+      <p:grpSpPr/>
+      <p:sp>
+        <p:nvSpPr>
+          <p:cNvPr id="2" name="Title 1"/>
+          <p:cNvSpPr>
+            <a:spLocks noGrp="1"/>
+          </p:cNvSpPr>
+          <p:nvPr>
+            <p:ph type="title"/>
+          </p:nvPr>
+        </p:nvSpPr>
+        <p:spPr/>
+        <p:txBody>
+          <a:bodyPr/>
+          <a:lstStyle/>
+          <a:p>
+            <a:r>
+              <a:rPr sz="3800" b="1">
+                <a:solidFill>
+                  <a:srgbClr val="1F2A37"/>
+                </a:solidFill>
+              </a:rPr>
+              <a:t>Next: AI102</a:t>
+            </a:r>
+          </a:p>
+        </p:txBody>
+      </p:sp>
+      <p:sp>
+        <p:nvSpPr>
+          <p:cNvPr id="3" name="TextBox 2"/>
+          <p:cNvSpPr txBox="1"/>
+          <p:nvPr/>
+        </p:nvSpPr>
+        <p:spPr>
+          <a:xfrm>
+            <a:off x="822960" y="1828800"/>
+            <a:ext cx="10515600" cy="4206240"/>
+          </a:xfrm>
+          <a:prstGeom prst="rect">
+            <a:avLst/>
+          </a:prstGeom>
+          <a:noFill/>
+        </p:spPr>
+        <p:txBody>
+          <a:bodyPr wrap="square">
+            <a:spAutoFit/>
+          </a:bodyPr>
+          <a:lstStyle/>
+          <a:p>
+            <a:pPr>
+              <a:spcAft>
+                <a:spcPts val="1400"/>
+              </a:spcAft>
+            </a:pPr>
+            <a:r>
+              <a:rPr sz="2800">
+                <a:solidFill>
+                  <a:srgbClr val="01AEFD"/>
+                </a:solidFill>
+              </a:rPr>
+              <a:t>Pictures, voices, video</a:t>
+            </a:r>
+          </a:p>
+          <a:p>
+            <a:pPr>
+              <a:spcAft>
+                <a:spcPts val="1400"/>
+              </a:spcAft>
+            </a:pPr>
+            <a:r>
+              <a:rPr sz="2400">
+                <a:solidFill>
+                  <a:srgbClr val="1F2A37"/>
+                </a:solidFill>
+              </a:rPr>
+              <a:t>• Same server, same skills</a:t>
+            </a:r>
+          </a:p>
+          <a:p>
+            <a:pPr>
+              <a:spcAft>
+                <a:spcPts val="1400"/>
+              </a:spcAft>
+            </a:pPr>
+            <a:r>
+              <a:rPr sz="2400">
+                <a:solidFill>
+                  <a:srgbClr val="1F2A37"/>
+                </a:solidFill>
+              </a:rPr>
+              <a:t>• Everything you wrote still applies</a:t>
+            </a:r>
+          </a:p>
+        </p:txBody>
+      </p:sp>
+    </p:spTree>
+  </p:cSld>
+  <p:clrMapOvr>
+    <a:masterClrMapping/>
+  </p:clrMapOvr>
+</p:sld>
+</file>
+
 <file path=ppt/slides/slide2.xml><?xml version="1.0" encoding="utf-8"?>
 <p:sld xmlns:a="http://schemas.openxmlformats.org/drawingml/2006/main" xmlns:p="http://schemas.openxmlformats.org/presentationml/2006/main" xmlns:r="http://schemas.openxmlformats.org/officeDocument/2006/relationships">
   <p:cSld>
@@ -3332,7 +3447,7 @@
                   <a:srgbClr val="1F2A37"/>
                 </a:solidFill>
               </a:rPr>
-              <a:t>• Sign the credits</a:t>
+              <a:t>• Sign the credits - put your own name in</a:t>
             </a:r>
           </a:p>
           <a:p>
@@ -3378,6 +3493,14 @@
 <file path=ppt/slides/slide4.xml><?xml version="1.0" encoding="utf-8"?>
 <p:sld xmlns:a="http://schemas.openxmlformats.org/drawingml/2006/main" xmlns:p="http://schemas.openxmlformats.org/presentationml/2006/main" xmlns:r="http://schemas.openxmlformats.org/officeDocument/2006/relationships">
   <p:cSld>
+    <p:bg>
+      <p:bgPr>
+        <a:solidFill>
+          <a:srgbClr val="102127"/>
+        </a:solidFill>
+        <a:effectLst/>
+      </p:bgPr>
+    </p:bg>
     <p:spTree>
       <p:nvGrpSpPr>
         <p:cNvPr id="1" name=""/>
@@ -3387,40 +3510,14 @@
       <p:grpSpPr/>
       <p:sp>
         <p:nvSpPr>
-          <p:cNvPr id="2" name="Title 1"/>
-          <p:cNvSpPr>
-            <a:spLocks noGrp="1"/>
-          </p:cNvSpPr>
-          <p:nvPr>
-            <p:ph type="title"/>
-          </p:nvPr>
-        </p:nvSpPr>
-        <p:spPr/>
-        <p:txBody>
-          <a:bodyPr/>
-          <a:lstStyle/>
-          <a:p>
-            <a:r>
-              <a:rPr sz="3800" b="1">
-                <a:solidFill>
-                  <a:srgbClr val="1F2A37"/>
-                </a:solidFill>
-              </a:rPr>
-              <a:t>Rehearse in pairs</a:t>
-            </a:r>
-          </a:p>
-        </p:txBody>
-      </p:sp>
-      <p:sp>
-        <p:nvSpPr>
-          <p:cNvPr id="3" name="TextBox 2"/>
+          <p:cNvPr id="2" name="TextBox 1"/>
           <p:cNvSpPr txBox="1"/>
           <p:nvPr/>
         </p:nvSpPr>
         <p:spPr>
           <a:xfrm>
-            <a:off x="822960" y="1828800"/>
-            <a:ext cx="10515600" cy="4206240"/>
+            <a:off x="502920" y="274320"/>
+            <a:ext cx="11155680" cy="731520"/>
           </a:xfrm>
           <a:prstGeom prst="rect">
             <a:avLst/>
@@ -3428,68 +3525,166 @@
           <a:noFill/>
         </p:spPr>
         <p:txBody>
-          <a:bodyPr wrap="square">
+          <a:bodyPr wrap="none">
             <a:spAutoFit/>
           </a:bodyPr>
           <a:lstStyle/>
           <a:p>
+            <a:r>
+              <a:rPr sz="2600" b="1">
+                <a:solidFill>
+                  <a:srgbClr val="01AEFD"/>
+                </a:solidFill>
+              </a:rPr>
+              <a:t>Type this into index.html  (1 of 3)</a:t>
+            </a:r>
+          </a:p>
+        </p:txBody>
+      </p:sp>
+      <p:sp>
+        <p:nvSpPr>
+          <p:cNvPr id="3" name="TextBox 2"/>
+          <p:cNvSpPr txBox="1"/>
+          <p:nvPr/>
+        </p:nvSpPr>
+        <p:spPr>
+          <a:xfrm>
+            <a:off x="502920" y="1051560"/>
+            <a:ext cx="11155680" cy="5394960"/>
+          </a:xfrm>
+          <a:prstGeom prst="rect">
+            <a:avLst/>
+          </a:prstGeom>
+          <a:noFill/>
+        </p:spPr>
+        <p:txBody>
+          <a:bodyPr wrap="none">
+            <a:spAutoFit/>
+          </a:bodyPr>
+          <a:lstStyle/>
+          <a:p>
             <a:pPr>
               <a:spcAft>
-                <a:spcPts val="1400"/>
+                <a:spcPts val="0"/>
               </a:spcAft>
             </a:pPr>
             <a:r>
-              <a:rPr sz="2800">
-                <a:solidFill>
-                  <a:srgbClr val="01AEFD"/>
-                </a:solidFill>
-              </a:rPr>
-              <a:t>Your partner is a stranger</a:t>
+              <a:rPr sz="1700">
+                <a:solidFill>
+                  <a:srgbClr val="6D8C97"/>
+                </a:solidFill>
+                <a:latin typeface="Consolas"/>
+              </a:rPr>
+              <a:t>  34  </a:t>
+            </a:r>
+            <a:r>
+              <a:rPr sz="1700">
+                <a:solidFill>
+                  <a:srgbClr val="7FE0A0"/>
+                </a:solidFill>
+                <a:latin typeface="Consolas"/>
+              </a:rPr>
+              <a:t>  &lt;footer class="credits"&gt;</a:t>
             </a:r>
           </a:p>
           <a:p>
             <a:pPr>
               <a:spcAft>
-                <a:spcPts val="1400"/>
+                <a:spcPts val="0"/>
               </a:spcAft>
             </a:pPr>
             <a:r>
-              <a:rPr sz="2400">
-                <a:solidFill>
-                  <a:srgbClr val="1F2A37"/>
-                </a:solidFill>
-              </a:rPr>
-              <a:t>• They use it. You say nothing.</a:t>
+              <a:rPr sz="1700">
+                <a:solidFill>
+                  <a:srgbClr val="6D8C97"/>
+                </a:solidFill>
+                <a:latin typeface="Consolas"/>
+              </a:rPr>
+              <a:t>  35  </a:t>
+            </a:r>
+            <a:r>
+              <a:rPr sz="1700">
+                <a:solidFill>
+                  <a:srgbClr val="7FE0A0"/>
+                </a:solidFill>
+                <a:latin typeface="Consolas"/>
+              </a:rPr>
+              <a:t>    &lt;p&gt;Built by &lt;strong&gt;your name here&lt;/strong&gt; in AI101 &amp;middot; UTG Academy&lt;/p&gt;</a:t>
             </a:r>
           </a:p>
           <a:p>
             <a:pPr>
               <a:spcAft>
-                <a:spcPts val="1400"/>
+                <a:spcPts val="0"/>
               </a:spcAft>
             </a:pPr>
             <a:r>
-              <a:rPr sz="2400">
-                <a:solidFill>
-                  <a:srgbClr val="1F2A37"/>
-                </a:solidFill>
-              </a:rPr>
-              <a:t>• Watch where they hesitate</a:t>
+              <a:rPr sz="1700">
+                <a:solidFill>
+                  <a:srgbClr val="6D8C97"/>
+                </a:solidFill>
+                <a:latin typeface="Consolas"/>
+              </a:rPr>
+              <a:t>  36  </a:t>
+            </a:r>
+            <a:r>
+              <a:rPr sz="1700">
+                <a:solidFill>
+                  <a:srgbClr val="7FE0A0"/>
+                </a:solidFill>
+                <a:latin typeface="Consolas"/>
+              </a:rPr>
+              <a:t>    &lt;p&gt;Runs on the school AI server. Written in plain HTML, CSS and JavaScript.&lt;/p&gt;</a:t>
             </a:r>
           </a:p>
           <a:p>
             <a:pPr>
               <a:spcAft>
-                <a:spcPts val="1400"/>
+                <a:spcPts val="0"/>
               </a:spcAft>
             </a:pPr>
             <a:r>
-              <a:rPr sz="2400">
-                <a:solidFill>
-                  <a:srgbClr val="1F2A37"/>
-                </a:solidFill>
-              </a:rPr>
-              <a:t>• Then swap</a:t>
+              <a:rPr sz="1700">
+                <a:solidFill>
+                  <a:srgbClr val="6D8C97"/>
+                </a:solidFill>
+                <a:latin typeface="Consolas"/>
+              </a:rPr>
+              <a:t>  37  </a:t>
+            </a:r>
+            <a:r>
+              <a:rPr sz="1700">
+                <a:solidFill>
+                  <a:srgbClr val="7FE0A0"/>
+                </a:solidFill>
+                <a:latin typeface="Consolas"/>
+              </a:rPr>
+              <a:t>  &lt;/footer&gt;</a:t>
+            </a:r>
+          </a:p>
+          <a:p>
+            <a:pPr>
+              <a:spcAft>
+                <a:spcPts val="0"/>
+              </a:spcAft>
+            </a:pPr>
+            <a:r>
+              <a:rPr sz="1700">
+                <a:solidFill>
+                  <a:srgbClr val="6D8C97"/>
+                </a:solidFill>
+                <a:latin typeface="Consolas"/>
+              </a:rPr>
+              <a:t>  38  </a:t>
+            </a:r>
+            <a:r>
+              <a:rPr sz="1700">
+                <a:solidFill>
+                  <a:srgbClr val="DCECEF"/>
+                </a:solidFill>
+                <a:latin typeface="Consolas"/>
+              </a:rPr>
+              <a:t>&lt;/main&gt;</a:t>
             </a:r>
           </a:p>
         </p:txBody>
@@ -3505,6 +3700,14 @@
 <file path=ppt/slides/slide5.xml><?xml version="1.0" encoding="utf-8"?>
 <p:sld xmlns:a="http://schemas.openxmlformats.org/drawingml/2006/main" xmlns:p="http://schemas.openxmlformats.org/presentationml/2006/main" xmlns:r="http://schemas.openxmlformats.org/officeDocument/2006/relationships">
   <p:cSld>
+    <p:bg>
+      <p:bgPr>
+        <a:solidFill>
+          <a:srgbClr val="102127"/>
+        </a:solidFill>
+        <a:effectLst/>
+      </p:bgPr>
+    </p:bg>
     <p:spTree>
       <p:nvGrpSpPr>
         <p:cNvPr id="1" name=""/>
@@ -3514,40 +3717,14 @@
       <p:grpSpPr/>
       <p:sp>
         <p:nvSpPr>
-          <p:cNvPr id="2" name="Title 1"/>
-          <p:cNvSpPr>
-            <a:spLocks noGrp="1"/>
-          </p:cNvSpPr>
-          <p:nvPr>
-            <p:ph type="title"/>
-          </p:nvPr>
-        </p:nvSpPr>
-        <p:spPr/>
-        <p:txBody>
-          <a:bodyPr/>
-          <a:lstStyle/>
-          <a:p>
-            <a:r>
-              <a:rPr sz="3800" b="1">
-                <a:solidFill>
-                  <a:srgbClr val="1F2A37"/>
-                </a:solidFill>
-              </a:rPr>
-              <a:t>Demo format</a:t>
-            </a:r>
-          </a:p>
-        </p:txBody>
-      </p:sp>
-      <p:sp>
-        <p:nvSpPr>
-          <p:cNvPr id="3" name="TextBox 2"/>
+          <p:cNvPr id="2" name="TextBox 1"/>
           <p:cNvSpPr txBox="1"/>
           <p:nvPr/>
         </p:nvSpPr>
         <p:spPr>
           <a:xfrm>
-            <a:off x="822960" y="1828800"/>
-            <a:ext cx="10515600" cy="4206240"/>
+            <a:off x="502920" y="274320"/>
+            <a:ext cx="11155680" cy="731520"/>
           </a:xfrm>
           <a:prstGeom prst="rect">
             <a:avLst/>
@@ -3555,68 +3732,416 @@
           <a:noFill/>
         </p:spPr>
         <p:txBody>
-          <a:bodyPr wrap="square">
+          <a:bodyPr wrap="none">
             <a:spAutoFit/>
           </a:bodyPr>
           <a:lstStyle/>
           <a:p>
+            <a:r>
+              <a:rPr sz="2600" b="1">
+                <a:solidFill>
+                  <a:srgbClr val="01AEFD"/>
+                </a:solidFill>
+              </a:rPr>
+              <a:t>Type this into style.css  (2 of 3)</a:t>
+            </a:r>
+          </a:p>
+        </p:txBody>
+      </p:sp>
+      <p:sp>
+        <p:nvSpPr>
+          <p:cNvPr id="3" name="TextBox 2"/>
+          <p:cNvSpPr txBox="1"/>
+          <p:nvPr/>
+        </p:nvSpPr>
+        <p:spPr>
+          <a:xfrm>
+            <a:off x="502920" y="1051560"/>
+            <a:ext cx="11155680" cy="5394960"/>
+          </a:xfrm>
+          <a:prstGeom prst="rect">
+            <a:avLst/>
+          </a:prstGeom>
+          <a:noFill/>
+        </p:spPr>
+        <p:txBody>
+          <a:bodyPr wrap="none">
+            <a:spAutoFit/>
+          </a:bodyPr>
+          <a:lstStyle/>
+          <a:p>
             <a:pPr>
               <a:spcAft>
-                <a:spcPts val="1400"/>
+                <a:spcPts val="0"/>
               </a:spcAft>
             </a:pPr>
             <a:r>
-              <a:rPr sz="2800">
-                <a:solidFill>
-                  <a:srgbClr val="01AEFD"/>
-                </a:solidFill>
-              </a:rPr>
-              <a:t>90 seconds</a:t>
+              <a:rPr sz="1400">
+                <a:solidFill>
+                  <a:srgbClr val="6D8C97"/>
+                </a:solidFill>
+                <a:latin typeface="Consolas"/>
+              </a:rPr>
+              <a:t>  32  </a:t>
+            </a:r>
+            <a:r>
+              <a:rPr sz="1400">
+                <a:solidFill>
+                  <a:srgbClr val="DCECEF"/>
+                </a:solidFill>
+                <a:latin typeface="Consolas"/>
+              </a:rPr>
+              <a:t>.setup { margin-bottom: 12px; font-size: 14px; }</a:t>
             </a:r>
           </a:p>
           <a:p>
             <a:pPr>
               <a:spcAft>
-                <a:spcPts val="1400"/>
+                <a:spcPts val="0"/>
               </a:spcAft>
             </a:pPr>
             <a:r>
-              <a:rPr sz="2400">
-                <a:solidFill>
-                  <a:srgbClr val="1F2A37"/>
-                </a:solidFill>
-              </a:rPr>
-              <a:t>• What it is</a:t>
+              <a:rPr sz="1400">
+                <a:solidFill>
+                  <a:srgbClr val="6D8C97"/>
+                </a:solidFill>
+                <a:latin typeface="Consolas"/>
+              </a:rPr>
+              <a:t>  33  </a:t>
+            </a:r>
+            <a:r>
+              <a:rPr sz="1400">
+                <a:solidFill>
+                  <a:srgbClr val="DCECEF"/>
+                </a:solidFill>
+                <a:latin typeface="Consolas"/>
+              </a:rPr>
+              <a:t>.setup summary { cursor: pointer; color: #0a6299; font-weight: bold; }</a:t>
             </a:r>
           </a:p>
           <a:p>
             <a:pPr>
               <a:spcAft>
-                <a:spcPts val="1400"/>
+                <a:spcPts val="0"/>
               </a:spcAft>
             </a:pPr>
             <a:r>
-              <a:rPr sz="2400">
-                <a:solidFill>
-                  <a:srgbClr val="1F2A37"/>
-                </a:solidFill>
-              </a:rPr>
-              <a:t>• One conversation</a:t>
+              <a:rPr sz="1400">
+                <a:solidFill>
+                  <a:srgbClr val="6D8C97"/>
+                </a:solidFill>
+                <a:latin typeface="Consolas"/>
+              </a:rPr>
+              <a:t>  34  </a:t>
+            </a:r>
+            <a:r>
+              <a:rPr sz="1400">
+                <a:solidFill>
+                  <a:srgbClr val="DCECEF"/>
+                </a:solidFill>
+                <a:latin typeface="Consolas"/>
+              </a:rPr>
+              <a:t>.setup textarea {</a:t>
             </a:r>
           </a:p>
           <a:p>
             <a:pPr>
               <a:spcAft>
-                <a:spcPts val="1400"/>
+                <a:spcPts val="0"/>
               </a:spcAft>
             </a:pPr>
             <a:r>
-              <a:rPr sz="2400">
-                <a:solidFill>
-                  <a:srgbClr val="1F2A37"/>
-                </a:solidFill>
-              </a:rPr>
-              <a:t>• One thing that was hard</a:t>
+              <a:rPr sz="1400">
+                <a:solidFill>
+                  <a:srgbClr val="6D8C97"/>
+                </a:solidFill>
+                <a:latin typeface="Consolas"/>
+              </a:rPr>
+              <a:t>  35  </a:t>
+            </a:r>
+            <a:r>
+              <a:rPr sz="1400">
+                <a:solidFill>
+                  <a:srgbClr val="DCECEF"/>
+                </a:solidFill>
+                <a:latin typeface="Consolas"/>
+              </a:rPr>
+              <a:t>  width: 100%;</a:t>
+            </a:r>
+          </a:p>
+          <a:p>
+            <a:pPr>
+              <a:spcAft>
+                <a:spcPts val="0"/>
+              </a:spcAft>
+            </a:pPr>
+            <a:r>
+              <a:rPr sz="1400">
+                <a:solidFill>
+                  <a:srgbClr val="6D8C97"/>
+                </a:solidFill>
+                <a:latin typeface="Consolas"/>
+              </a:rPr>
+              <a:t>  36  </a:t>
+            </a:r>
+            <a:r>
+              <a:rPr sz="1400">
+                <a:solidFill>
+                  <a:srgbClr val="DCECEF"/>
+                </a:solidFill>
+                <a:latin typeface="Consolas"/>
+              </a:rPr>
+              <a:t>  margin-top: 8px;</a:t>
+            </a:r>
+          </a:p>
+          <a:p>
+            <a:pPr>
+              <a:spcAft>
+                <a:spcPts val="0"/>
+              </a:spcAft>
+            </a:pPr>
+            <a:r>
+              <a:rPr sz="1400">
+                <a:solidFill>
+                  <a:srgbClr val="6D8C97"/>
+                </a:solidFill>
+                <a:latin typeface="Consolas"/>
+              </a:rPr>
+              <a:t>  37  </a:t>
+            </a:r>
+            <a:r>
+              <a:rPr sz="1400">
+                <a:solidFill>
+                  <a:srgbClr val="DCECEF"/>
+                </a:solidFill>
+                <a:latin typeface="Consolas"/>
+              </a:rPr>
+              <a:t>  padding: 9px;</a:t>
+            </a:r>
+          </a:p>
+          <a:p>
+            <a:pPr>
+              <a:spcAft>
+                <a:spcPts val="0"/>
+              </a:spcAft>
+            </a:pPr>
+            <a:r>
+              <a:rPr sz="1400">
+                <a:solidFill>
+                  <a:srgbClr val="6D8C97"/>
+                </a:solidFill>
+                <a:latin typeface="Consolas"/>
+              </a:rPr>
+              <a:t>  38  </a:t>
+            </a:r>
+            <a:r>
+              <a:rPr sz="1400">
+                <a:solidFill>
+                  <a:srgbClr val="DCECEF"/>
+                </a:solidFill>
+                <a:latin typeface="Consolas"/>
+              </a:rPr>
+              <a:t>  border: 1px solid #dbe3ec;</a:t>
+            </a:r>
+          </a:p>
+          <a:p>
+            <a:pPr>
+              <a:spcAft>
+                <a:spcPts val="0"/>
+              </a:spcAft>
+            </a:pPr>
+            <a:r>
+              <a:rPr sz="1400">
+                <a:solidFill>
+                  <a:srgbClr val="6D8C97"/>
+                </a:solidFill>
+                <a:latin typeface="Consolas"/>
+              </a:rPr>
+              <a:t>  39  </a:t>
+            </a:r>
+            <a:r>
+              <a:rPr sz="1400">
+                <a:solidFill>
+                  <a:srgbClr val="DCECEF"/>
+                </a:solidFill>
+                <a:latin typeface="Consolas"/>
+              </a:rPr>
+              <a:t>  border-radius: 6px;</a:t>
+            </a:r>
+          </a:p>
+          <a:p>
+            <a:pPr>
+              <a:spcAft>
+                <a:spcPts val="0"/>
+              </a:spcAft>
+            </a:pPr>
+            <a:r>
+              <a:rPr sz="1400">
+                <a:solidFill>
+                  <a:srgbClr val="6D8C97"/>
+                </a:solidFill>
+                <a:latin typeface="Consolas"/>
+              </a:rPr>
+              <a:t>  40  </a:t>
+            </a:r>
+            <a:r>
+              <a:rPr sz="1400">
+                <a:solidFill>
+                  <a:srgbClr val="DCECEF"/>
+                </a:solidFill>
+                <a:latin typeface="Consolas"/>
+              </a:rPr>
+              <a:t>  font-family: inherit;</a:t>
+            </a:r>
+          </a:p>
+          <a:p>
+            <a:pPr>
+              <a:spcAft>
+                <a:spcPts val="0"/>
+              </a:spcAft>
+            </a:pPr>
+            <a:r>
+              <a:rPr sz="1400">
+                <a:solidFill>
+                  <a:srgbClr val="6D8C97"/>
+                </a:solidFill>
+                <a:latin typeface="Consolas"/>
+              </a:rPr>
+              <a:t>  41  </a:t>
+            </a:r>
+            <a:r>
+              <a:rPr sz="1400">
+                <a:solidFill>
+                  <a:srgbClr val="DCECEF"/>
+                </a:solidFill>
+                <a:latin typeface="Consolas"/>
+              </a:rPr>
+              <a:t>  font-size: 14px;</a:t>
+            </a:r>
+          </a:p>
+          <a:p>
+            <a:pPr>
+              <a:spcAft>
+                <a:spcPts val="0"/>
+              </a:spcAft>
+            </a:pPr>
+            <a:r>
+              <a:rPr sz="1400">
+                <a:solidFill>
+                  <a:srgbClr val="6D8C97"/>
+                </a:solidFill>
+                <a:latin typeface="Consolas"/>
+              </a:rPr>
+              <a:t>  42  </a:t>
+            </a:r>
+            <a:r>
+              <a:rPr sz="1400">
+                <a:solidFill>
+                  <a:srgbClr val="DCECEF"/>
+                </a:solidFill>
+                <a:latin typeface="Consolas"/>
+              </a:rPr>
+              <a:t>}</a:t>
+            </a:r>
+          </a:p>
+          <a:p>
+            <a:pPr>
+              <a:spcAft>
+                <a:spcPts val="0"/>
+              </a:spcAft>
+            </a:pPr>
+            <a:r>
+              <a:rPr sz="1400">
+                <a:solidFill>
+                  <a:srgbClr val="6D8C97"/>
+                </a:solidFill>
+                <a:latin typeface="Consolas"/>
+              </a:rPr>
+              <a:t>  43  </a:t>
+            </a:r>
+            <a:r>
+              <a:rPr sz="1400">
+                <a:solidFill>
+                  <a:srgbClr val="7FE0A0"/>
+                </a:solidFill>
+                <a:latin typeface="Consolas"/>
+              </a:rPr>
+              <a:t>.credits {</a:t>
+            </a:r>
+          </a:p>
+          <a:p>
+            <a:pPr>
+              <a:spcAft>
+                <a:spcPts val="0"/>
+              </a:spcAft>
+            </a:pPr>
+            <a:r>
+              <a:rPr sz="1400">
+                <a:solidFill>
+                  <a:srgbClr val="6D8C97"/>
+                </a:solidFill>
+                <a:latin typeface="Consolas"/>
+              </a:rPr>
+              <a:t>  44  </a:t>
+            </a:r>
+            <a:r>
+              <a:rPr sz="1400">
+                <a:solidFill>
+                  <a:srgbClr val="7FE0A0"/>
+                </a:solidFill>
+                <a:latin typeface="Consolas"/>
+              </a:rPr>
+              <a:t>  margin-top: 22px;</a:t>
+            </a:r>
+          </a:p>
+          <a:p>
+            <a:pPr>
+              <a:spcAft>
+                <a:spcPts val="0"/>
+              </a:spcAft>
+            </a:pPr>
+            <a:r>
+              <a:rPr sz="1400">
+                <a:solidFill>
+                  <a:srgbClr val="6D8C97"/>
+                </a:solidFill>
+                <a:latin typeface="Consolas"/>
+              </a:rPr>
+              <a:t>  45  </a:t>
+            </a:r>
+            <a:r>
+              <a:rPr sz="1400">
+                <a:solidFill>
+                  <a:srgbClr val="7FE0A0"/>
+                </a:solidFill>
+                <a:latin typeface="Consolas"/>
+              </a:rPr>
+              <a:t>  padding-top: 14px;</a:t>
+            </a:r>
+          </a:p>
+          <a:p>
+            <a:pPr>
+              <a:spcAft>
+                <a:spcPts val="0"/>
+              </a:spcAft>
+            </a:pPr>
+            <a:r>
+              <a:rPr sz="1400">
+                <a:solidFill>
+                  <a:srgbClr val="6D8C97"/>
+                </a:solidFill>
+                <a:latin typeface="Consolas"/>
+              </a:rPr>
+              <a:t>  46  </a:t>
+            </a:r>
+            <a:r>
+              <a:rPr sz="1400">
+                <a:solidFill>
+                  <a:srgbClr val="7FE0A0"/>
+                </a:solidFill>
+                <a:latin typeface="Consolas"/>
+              </a:rPr>
+              <a:t>  border-top: 1px solid #dbe3ec;</a:t>
             </a:r>
           </a:p>
         </p:txBody>
@@ -3632,6 +4157,14 @@
 <file path=ppt/slides/slide6.xml><?xml version="1.0" encoding="utf-8"?>
 <p:sld xmlns:a="http://schemas.openxmlformats.org/drawingml/2006/main" xmlns:p="http://schemas.openxmlformats.org/presentationml/2006/main" xmlns:r="http://schemas.openxmlformats.org/officeDocument/2006/relationships">
   <p:cSld>
+    <p:bg>
+      <p:bgPr>
+        <a:solidFill>
+          <a:srgbClr val="102127"/>
+        </a:solidFill>
+        <a:effectLst/>
+      </p:bgPr>
+    </p:bg>
     <p:spTree>
       <p:nvGrpSpPr>
         <p:cNvPr id="1" name=""/>
@@ -3641,40 +4174,14 @@
       <p:grpSpPr/>
       <p:sp>
         <p:nvSpPr>
-          <p:cNvPr id="2" name="Title 1"/>
-          <p:cNvSpPr>
-            <a:spLocks noGrp="1"/>
-          </p:cNvSpPr>
-          <p:nvPr>
-            <p:ph type="title"/>
-          </p:nvPr>
-        </p:nvSpPr>
-        <p:spPr/>
-        <p:txBody>
-          <a:bodyPr/>
-          <a:lstStyle/>
-          <a:p>
-            <a:r>
-              <a:rPr sz="3800" b="1">
-                <a:solidFill>
-                  <a:srgbClr val="1F2A37"/>
-                </a:solidFill>
-              </a:rPr>
-              <a:t>What did the machine never do?</a:t>
-            </a:r>
-          </a:p>
-        </p:txBody>
-      </p:sp>
-      <p:sp>
-        <p:nvSpPr>
-          <p:cNvPr id="3" name="TextBox 2"/>
+          <p:cNvPr id="2" name="TextBox 1"/>
           <p:cNvSpPr txBox="1"/>
           <p:nvPr/>
         </p:nvSpPr>
         <p:spPr>
           <a:xfrm>
-            <a:off x="822960" y="1828800"/>
-            <a:ext cx="10515600" cy="4206240"/>
+            <a:off x="502920" y="274320"/>
+            <a:ext cx="11155680" cy="731520"/>
           </a:xfrm>
           <a:prstGeom prst="rect">
             <a:avLst/>
@@ -3682,68 +4189,141 @@
           <a:noFill/>
         </p:spPr>
         <p:txBody>
-          <a:bodyPr wrap="square">
+          <a:bodyPr wrap="none">
             <a:spAutoFit/>
           </a:bodyPr>
           <a:lstStyle/>
           <a:p>
+            <a:r>
+              <a:rPr sz="2600" b="1">
+                <a:solidFill>
+                  <a:srgbClr val="01AEFD"/>
+                </a:solidFill>
+              </a:rPr>
+              <a:t>Type this into style.css  (3 of 3)</a:t>
+            </a:r>
+          </a:p>
+        </p:txBody>
+      </p:sp>
+      <p:sp>
+        <p:nvSpPr>
+          <p:cNvPr id="3" name="TextBox 2"/>
+          <p:cNvSpPr txBox="1"/>
+          <p:nvPr/>
+        </p:nvSpPr>
+        <p:spPr>
+          <a:xfrm>
+            <a:off x="502920" y="1051560"/>
+            <a:ext cx="11155680" cy="5394960"/>
+          </a:xfrm>
+          <a:prstGeom prst="rect">
+            <a:avLst/>
+          </a:prstGeom>
+          <a:noFill/>
+        </p:spPr>
+        <p:txBody>
+          <a:bodyPr wrap="none">
+            <a:spAutoFit/>
+          </a:bodyPr>
+          <a:lstStyle/>
+          <a:p>
             <a:pPr>
               <a:spcAft>
-                <a:spcPts val="1400"/>
+                <a:spcPts val="0"/>
               </a:spcAft>
             </a:pPr>
             <a:r>
-              <a:rPr sz="2400">
-                <a:solidFill>
-                  <a:srgbClr val="1F2A37"/>
-                </a:solidFill>
-              </a:rPr>
-              <a:t>• It never knew anything was true</a:t>
+              <a:rPr sz="1700">
+                <a:solidFill>
+                  <a:srgbClr val="6D8C97"/>
+                </a:solidFill>
+                <a:latin typeface="Consolas"/>
+              </a:rPr>
+              <a:t>  47  </a:t>
+            </a:r>
+            <a:r>
+              <a:rPr sz="1700">
+                <a:solidFill>
+                  <a:srgbClr val="7FE0A0"/>
+                </a:solidFill>
+                <a:latin typeface="Consolas"/>
+              </a:rPr>
+              <a:t>  color: #6b7787;</a:t>
             </a:r>
           </a:p>
           <a:p>
             <a:pPr>
               <a:spcAft>
-                <a:spcPts val="1400"/>
+                <a:spcPts val="0"/>
               </a:spcAft>
             </a:pPr>
             <a:r>
-              <a:rPr sz="2400">
-                <a:solidFill>
-                  <a:srgbClr val="1F2A37"/>
-                </a:solidFill>
-              </a:rPr>
-              <a:t>• It never remembered you</a:t>
+              <a:rPr sz="1700">
+                <a:solidFill>
+                  <a:srgbClr val="6D8C97"/>
+                </a:solidFill>
+                <a:latin typeface="Consolas"/>
+              </a:rPr>
+              <a:t>  48  </a:t>
+            </a:r>
+            <a:r>
+              <a:rPr sz="1700">
+                <a:solidFill>
+                  <a:srgbClr val="7FE0A0"/>
+                </a:solidFill>
+                <a:latin typeface="Consolas"/>
+              </a:rPr>
+              <a:t>  font-size: 12px;</a:t>
             </a:r>
           </a:p>
           <a:p>
             <a:pPr>
               <a:spcAft>
-                <a:spcPts val="1400"/>
+                <a:spcPts val="0"/>
               </a:spcAft>
             </a:pPr>
             <a:r>
-              <a:rPr sz="2400">
-                <a:solidFill>
-                  <a:srgbClr val="1F2A37"/>
-                </a:solidFill>
-              </a:rPr>
-              <a:t>• It never decided anything</a:t>
+              <a:rPr sz="1700">
+                <a:solidFill>
+                  <a:srgbClr val="6D8C97"/>
+                </a:solidFill>
+                <a:latin typeface="Consolas"/>
+              </a:rPr>
+              <a:t>  49  </a:t>
+            </a:r>
+            <a:r>
+              <a:rPr sz="1700">
+                <a:solidFill>
+                  <a:srgbClr val="7FE0A0"/>
+                </a:solidFill>
+                <a:latin typeface="Consolas"/>
+              </a:rPr>
+              <a:t>}</a:t>
             </a:r>
           </a:p>
           <a:p>
             <a:pPr>
               <a:spcAft>
-                <a:spcPts val="1400"/>
+                <a:spcPts val="0"/>
               </a:spcAft>
             </a:pPr>
             <a:r>
-              <a:rPr sz="2400">
-                <a:solidFill>
-                  <a:srgbClr val="1F2A37"/>
-                </a:solidFill>
-              </a:rPr>
-              <a:t>• You built all of that</a:t>
+              <a:rPr sz="1700">
+                <a:solidFill>
+                  <a:srgbClr val="6D8C97"/>
+                </a:solidFill>
+                <a:latin typeface="Consolas"/>
+              </a:rPr>
+              <a:t>  50  </a:t>
+            </a:r>
+            <a:r>
+              <a:rPr sz="1700">
+                <a:solidFill>
+                  <a:srgbClr val="7FE0A0"/>
+                </a:solidFill>
+                <a:latin typeface="Consolas"/>
+              </a:rPr>
+              <a:t>.credits p { margin: 0 0 4px; }</a:t>
             </a:r>
           </a:p>
         </p:txBody>
@@ -3787,7 +4367,7 @@
                   <a:srgbClr val="1F2A37"/>
                 </a:solidFill>
               </a:rPr>
-              <a:t>Next: AI102</a:t>
+              <a:t>Rehearse in pairs</a:t>
             </a:r>
           </a:p>
         </p:txBody>
@@ -3825,7 +4405,7 @@
                   <a:srgbClr val="01AEFD"/>
                 </a:solidFill>
               </a:rPr>
-              <a:t>Pictures, voices, video</a:t>
+              <a:t>Your partner is a stranger</a:t>
             </a:r>
           </a:p>
           <a:p>
@@ -3840,7 +4420,7 @@
                   <a:srgbClr val="1F2A37"/>
                 </a:solidFill>
               </a:rPr>
-              <a:t>• Same server, same skills</a:t>
+              <a:t>• They use it. You say nothing.</a:t>
             </a:r>
           </a:p>
           <a:p>
@@ -3855,7 +4435,276 @@
                   <a:srgbClr val="1F2A37"/>
                 </a:solidFill>
               </a:rPr>
-              <a:t>• Everything you wrote still applies</a:t>
+              <a:t>• Watch where they hesitate</a:t>
+            </a:r>
+          </a:p>
+          <a:p>
+            <a:pPr>
+              <a:spcAft>
+                <a:spcPts val="1400"/>
+              </a:spcAft>
+            </a:pPr>
+            <a:r>
+              <a:rPr sz="2400">
+                <a:solidFill>
+                  <a:srgbClr val="1F2A37"/>
+                </a:solidFill>
+              </a:rPr>
+              <a:t>• Then swap</a:t>
+            </a:r>
+          </a:p>
+        </p:txBody>
+      </p:sp>
+    </p:spTree>
+  </p:cSld>
+  <p:clrMapOvr>
+    <a:masterClrMapping/>
+  </p:clrMapOvr>
+</p:sld>
+</file>
+
+<file path=ppt/slides/slide8.xml><?xml version="1.0" encoding="utf-8"?>
+<p:sld xmlns:a="http://schemas.openxmlformats.org/drawingml/2006/main" xmlns:p="http://schemas.openxmlformats.org/presentationml/2006/main" xmlns:r="http://schemas.openxmlformats.org/officeDocument/2006/relationships">
+  <p:cSld>
+    <p:spTree>
+      <p:nvGrpSpPr>
+        <p:cNvPr id="1" name=""/>
+        <p:cNvGrpSpPr/>
+        <p:nvPr/>
+      </p:nvGrpSpPr>
+      <p:grpSpPr/>
+      <p:sp>
+        <p:nvSpPr>
+          <p:cNvPr id="2" name="Title 1"/>
+          <p:cNvSpPr>
+            <a:spLocks noGrp="1"/>
+          </p:cNvSpPr>
+          <p:nvPr>
+            <p:ph type="title"/>
+          </p:nvPr>
+        </p:nvSpPr>
+        <p:spPr/>
+        <p:txBody>
+          <a:bodyPr/>
+          <a:lstStyle/>
+          <a:p>
+            <a:r>
+              <a:rPr sz="3800" b="1">
+                <a:solidFill>
+                  <a:srgbClr val="1F2A37"/>
+                </a:solidFill>
+              </a:rPr>
+              <a:t>Demo format</a:t>
+            </a:r>
+          </a:p>
+        </p:txBody>
+      </p:sp>
+      <p:sp>
+        <p:nvSpPr>
+          <p:cNvPr id="3" name="TextBox 2"/>
+          <p:cNvSpPr txBox="1"/>
+          <p:nvPr/>
+        </p:nvSpPr>
+        <p:spPr>
+          <a:xfrm>
+            <a:off x="822960" y="1828800"/>
+            <a:ext cx="10515600" cy="4206240"/>
+          </a:xfrm>
+          <a:prstGeom prst="rect">
+            <a:avLst/>
+          </a:prstGeom>
+          <a:noFill/>
+        </p:spPr>
+        <p:txBody>
+          <a:bodyPr wrap="square">
+            <a:spAutoFit/>
+          </a:bodyPr>
+          <a:lstStyle/>
+          <a:p>
+            <a:pPr>
+              <a:spcAft>
+                <a:spcPts val="1400"/>
+              </a:spcAft>
+            </a:pPr>
+            <a:r>
+              <a:rPr sz="2800">
+                <a:solidFill>
+                  <a:srgbClr val="01AEFD"/>
+                </a:solidFill>
+              </a:rPr>
+              <a:t>90 seconds</a:t>
+            </a:r>
+          </a:p>
+          <a:p>
+            <a:pPr>
+              <a:spcAft>
+                <a:spcPts val="1400"/>
+              </a:spcAft>
+            </a:pPr>
+            <a:r>
+              <a:rPr sz="2400">
+                <a:solidFill>
+                  <a:srgbClr val="1F2A37"/>
+                </a:solidFill>
+              </a:rPr>
+              <a:t>• What it is</a:t>
+            </a:r>
+          </a:p>
+          <a:p>
+            <a:pPr>
+              <a:spcAft>
+                <a:spcPts val="1400"/>
+              </a:spcAft>
+            </a:pPr>
+            <a:r>
+              <a:rPr sz="2400">
+                <a:solidFill>
+                  <a:srgbClr val="1F2A37"/>
+                </a:solidFill>
+              </a:rPr>
+              <a:t>• One conversation</a:t>
+            </a:r>
+          </a:p>
+          <a:p>
+            <a:pPr>
+              <a:spcAft>
+                <a:spcPts val="1400"/>
+              </a:spcAft>
+            </a:pPr>
+            <a:r>
+              <a:rPr sz="2400">
+                <a:solidFill>
+                  <a:srgbClr val="1F2A37"/>
+                </a:solidFill>
+              </a:rPr>
+              <a:t>• One thing that was hard</a:t>
+            </a:r>
+          </a:p>
+        </p:txBody>
+      </p:sp>
+    </p:spTree>
+  </p:cSld>
+  <p:clrMapOvr>
+    <a:masterClrMapping/>
+  </p:clrMapOvr>
+</p:sld>
+</file>
+
+<file path=ppt/slides/slide9.xml><?xml version="1.0" encoding="utf-8"?>
+<p:sld xmlns:a="http://schemas.openxmlformats.org/drawingml/2006/main" xmlns:p="http://schemas.openxmlformats.org/presentationml/2006/main" xmlns:r="http://schemas.openxmlformats.org/officeDocument/2006/relationships">
+  <p:cSld>
+    <p:spTree>
+      <p:nvGrpSpPr>
+        <p:cNvPr id="1" name=""/>
+        <p:cNvGrpSpPr/>
+        <p:nvPr/>
+      </p:nvGrpSpPr>
+      <p:grpSpPr/>
+      <p:sp>
+        <p:nvSpPr>
+          <p:cNvPr id="2" name="Title 1"/>
+          <p:cNvSpPr>
+            <a:spLocks noGrp="1"/>
+          </p:cNvSpPr>
+          <p:nvPr>
+            <p:ph type="title"/>
+          </p:nvPr>
+        </p:nvSpPr>
+        <p:spPr/>
+        <p:txBody>
+          <a:bodyPr/>
+          <a:lstStyle/>
+          <a:p>
+            <a:r>
+              <a:rPr sz="3800" b="1">
+                <a:solidFill>
+                  <a:srgbClr val="1F2A37"/>
+                </a:solidFill>
+              </a:rPr>
+              <a:t>What did the machine never do?</a:t>
+            </a:r>
+          </a:p>
+        </p:txBody>
+      </p:sp>
+      <p:sp>
+        <p:nvSpPr>
+          <p:cNvPr id="3" name="TextBox 2"/>
+          <p:cNvSpPr txBox="1"/>
+          <p:nvPr/>
+        </p:nvSpPr>
+        <p:spPr>
+          <a:xfrm>
+            <a:off x="822960" y="1828800"/>
+            <a:ext cx="10515600" cy="4206240"/>
+          </a:xfrm>
+          <a:prstGeom prst="rect">
+            <a:avLst/>
+          </a:prstGeom>
+          <a:noFill/>
+        </p:spPr>
+        <p:txBody>
+          <a:bodyPr wrap="square">
+            <a:spAutoFit/>
+          </a:bodyPr>
+          <a:lstStyle/>
+          <a:p>
+            <a:pPr>
+              <a:spcAft>
+                <a:spcPts val="1400"/>
+              </a:spcAft>
+            </a:pPr>
+            <a:r>
+              <a:rPr sz="2400">
+                <a:solidFill>
+                  <a:srgbClr val="1F2A37"/>
+                </a:solidFill>
+              </a:rPr>
+              <a:t>• It never knew anything was true</a:t>
+            </a:r>
+          </a:p>
+          <a:p>
+            <a:pPr>
+              <a:spcAft>
+                <a:spcPts val="1400"/>
+              </a:spcAft>
+            </a:pPr>
+            <a:r>
+              <a:rPr sz="2400">
+                <a:solidFill>
+                  <a:srgbClr val="1F2A37"/>
+                </a:solidFill>
+              </a:rPr>
+              <a:t>• It never remembered you</a:t>
+            </a:r>
+          </a:p>
+          <a:p>
+            <a:pPr>
+              <a:spcAft>
+                <a:spcPts val="1400"/>
+              </a:spcAft>
+            </a:pPr>
+            <a:r>
+              <a:rPr sz="2400">
+                <a:solidFill>
+                  <a:srgbClr val="1F2A37"/>
+                </a:solidFill>
+              </a:rPr>
+              <a:t>• It never decided anything</a:t>
+            </a:r>
+          </a:p>
+          <a:p>
+            <a:pPr>
+              <a:spcAft>
+                <a:spcPts val="1400"/>
+              </a:spcAft>
+            </a:pPr>
+            <a:r>
+              <a:rPr sz="2400">
+                <a:solidFill>
+                  <a:srgbClr val="1F2A37"/>
+                </a:solidFill>
+              </a:rPr>
+              <a:t>• You built all of that</a:t>
             </a:r>
           </a:p>
         </p:txBody>

--- a/ai101/slides/week-15.pptx
+++ b/ai101/slides/week-15.pptx
@@ -3575,7 +3575,7 @@
                 </a:solidFill>
                 <a:latin typeface="Consolas"/>
               </a:rPr>
-              <a:t>  34  </a:t>
+              <a:t>  37  </a:t>
             </a:r>
             <a:r>
               <a:rPr sz="1700">
@@ -3600,7 +3600,7 @@
                 </a:solidFill>
                 <a:latin typeface="Consolas"/>
               </a:rPr>
-              <a:t>  35  </a:t>
+              <a:t>  38  </a:t>
             </a:r>
             <a:r>
               <a:rPr sz="1700">
@@ -3625,7 +3625,7 @@
                 </a:solidFill>
                 <a:latin typeface="Consolas"/>
               </a:rPr>
-              <a:t>  36  </a:t>
+              <a:t>  39  </a:t>
             </a:r>
             <a:r>
               <a:rPr sz="1700">
@@ -3650,7 +3650,7 @@
                 </a:solidFill>
                 <a:latin typeface="Consolas"/>
               </a:rPr>
-              <a:t>  37  </a:t>
+              <a:t>  40  </a:t>
             </a:r>
             <a:r>
               <a:rPr sz="1700">
@@ -3675,7 +3675,7 @@
                 </a:solidFill>
                 <a:latin typeface="Consolas"/>
               </a:rPr>
-              <a:t>  38  </a:t>
+              <a:t>  41  </a:t>
             </a:r>
             <a:r>
               <a:rPr sz="1700">

--- a/ai101/slides/week-15.pptx
+++ b/ai101/slides/week-15.pptx
@@ -15,6 +15,32 @@
     <p:sldId id="263" r:id="rId14"/>
     <p:sldId id="264" r:id="rId15"/>
     <p:sldId id="265" r:id="rId16"/>
+    <p:sldId id="266" r:id="rId17"/>
+    <p:sldId id="267" r:id="rId18"/>
+    <p:sldId id="268" r:id="rId19"/>
+    <p:sldId id="269" r:id="rId20"/>
+    <p:sldId id="270" r:id="rId21"/>
+    <p:sldId id="271" r:id="rId22"/>
+    <p:sldId id="272" r:id="rId23"/>
+    <p:sldId id="273" r:id="rId24"/>
+    <p:sldId id="274" r:id="rId25"/>
+    <p:sldId id="275" r:id="rId26"/>
+    <p:sldId id="276" r:id="rId27"/>
+    <p:sldId id="277" r:id="rId28"/>
+    <p:sldId id="278" r:id="rId29"/>
+    <p:sldId id="279" r:id="rId30"/>
+    <p:sldId id="280" r:id="rId31"/>
+    <p:sldId id="281" r:id="rId32"/>
+    <p:sldId id="282" r:id="rId33"/>
+    <p:sldId id="283" r:id="rId34"/>
+    <p:sldId id="284" r:id="rId35"/>
+    <p:sldId id="285" r:id="rId36"/>
+    <p:sldId id="286" r:id="rId37"/>
+    <p:sldId id="287" r:id="rId38"/>
+    <p:sldId id="288" r:id="rId39"/>
+    <p:sldId id="289" r:id="rId40"/>
+    <p:sldId id="290" r:id="rId41"/>
+    <p:sldId id="291" r:id="rId42"/>
   </p:sldIdLst>
   <p:sldSz cx="12191695" cy="6858000" type="screen4x3"/>
   <p:notesSz cx="6858000" cy="9144000"/>
@@ -3172,6 +3198,14 @@
 <file path=ppt/slides/slide10.xml><?xml version="1.0" encoding="utf-8"?>
 <p:sld xmlns:a="http://schemas.openxmlformats.org/drawingml/2006/main" xmlns:p="http://schemas.openxmlformats.org/presentationml/2006/main" xmlns:r="http://schemas.openxmlformats.org/officeDocument/2006/relationships">
   <p:cSld>
+    <p:bg>
+      <p:bgPr>
+        <a:solidFill>
+          <a:srgbClr val="102127"/>
+        </a:solidFill>
+        <a:effectLst/>
+      </p:bgPr>
+    </p:bg>
     <p:spTree>
       <p:nvGrpSpPr>
         <p:cNvPr id="1" name=""/>
@@ -3181,6 +3215,1093 @@
       <p:grpSpPr/>
       <p:sp>
         <p:nvSpPr>
+          <p:cNvPr id="2" name="TextBox 1"/>
+          <p:cNvSpPr txBox="1"/>
+          <p:nvPr/>
+        </p:nvSpPr>
+        <p:spPr>
+          <a:xfrm>
+            <a:off x="502920" y="274320"/>
+            <a:ext cx="11155680" cy="548640"/>
+          </a:xfrm>
+          <a:prstGeom prst="rect">
+            <a:avLst/>
+          </a:prstGeom>
+          <a:noFill/>
+        </p:spPr>
+        <p:txBody>
+          <a:bodyPr wrap="none">
+            <a:spAutoFit/>
+          </a:bodyPr>
+          <a:lstStyle/>
+          <a:p>
+            <a:r>
+              <a:rPr sz="2200" b="1">
+                <a:solidFill>
+                  <a:srgbClr val="01AEFD"/>
+                </a:solidFill>
+              </a:rPr>
+              <a:t>All together in index.html</a:t>
+            </a:r>
+          </a:p>
+        </p:txBody>
+      </p:sp>
+      <p:sp>
+        <p:nvSpPr>
+          <p:cNvPr id="3" name="TextBox 2"/>
+          <p:cNvSpPr txBox="1"/>
+          <p:nvPr/>
+        </p:nvSpPr>
+        <p:spPr>
+          <a:xfrm>
+            <a:off x="502920" y="960120"/>
+            <a:ext cx="11155680" cy="4297680"/>
+          </a:xfrm>
+          <a:prstGeom prst="rect">
+            <a:avLst/>
+          </a:prstGeom>
+          <a:noFill/>
+        </p:spPr>
+        <p:txBody>
+          <a:bodyPr wrap="none">
+            <a:spAutoFit/>
+          </a:bodyPr>
+          <a:lstStyle/>
+          <a:p>
+            <a:pPr>
+              <a:spcAft>
+                <a:spcPts val="0"/>
+              </a:spcAft>
+            </a:pPr>
+            <a:r>
+              <a:rPr sz="1800">
+                <a:solidFill>
+                  <a:srgbClr val="6D8C97"/>
+                </a:solidFill>
+                <a:latin typeface="Consolas"/>
+              </a:rPr>
+              <a:t>  37  </a:t>
+            </a:r>
+            <a:r>
+              <a:rPr sz="1800">
+                <a:solidFill>
+                  <a:srgbClr val="7FE0A0"/>
+                </a:solidFill>
+                <a:latin typeface="Consolas"/>
+              </a:rPr>
+              <a:t>  &lt;footer class="credits"&gt;</a:t>
+            </a:r>
+          </a:p>
+          <a:p>
+            <a:pPr>
+              <a:spcAft>
+                <a:spcPts val="0"/>
+              </a:spcAft>
+            </a:pPr>
+            <a:r>
+              <a:rPr sz="1800">
+                <a:solidFill>
+                  <a:srgbClr val="6D8C97"/>
+                </a:solidFill>
+                <a:latin typeface="Consolas"/>
+              </a:rPr>
+              <a:t>  38  </a:t>
+            </a:r>
+            <a:r>
+              <a:rPr sz="1800">
+                <a:solidFill>
+                  <a:srgbClr val="7FE0A0"/>
+                </a:solidFill>
+                <a:latin typeface="Consolas"/>
+              </a:rPr>
+              <a:t>    &lt;p&gt;Built by &lt;strong&gt;your name here&lt;/strong&gt; in AI101 &amp;middot; UTG Academy&lt;/p&gt;</a:t>
+            </a:r>
+          </a:p>
+          <a:p>
+            <a:pPr>
+              <a:spcAft>
+                <a:spcPts val="0"/>
+              </a:spcAft>
+            </a:pPr>
+            <a:r>
+              <a:rPr sz="1800">
+                <a:solidFill>
+                  <a:srgbClr val="6D8C97"/>
+                </a:solidFill>
+                <a:latin typeface="Consolas"/>
+              </a:rPr>
+              <a:t>  39  </a:t>
+            </a:r>
+            <a:r>
+              <a:rPr sz="1800">
+                <a:solidFill>
+                  <a:srgbClr val="7FE0A0"/>
+                </a:solidFill>
+                <a:latin typeface="Consolas"/>
+              </a:rPr>
+              <a:t>    &lt;p&gt;Runs on the school AI server. Written in plain HTML, CSS and JavaScript.&lt;/p&gt;</a:t>
+            </a:r>
+          </a:p>
+          <a:p>
+            <a:pPr>
+              <a:spcAft>
+                <a:spcPts val="0"/>
+              </a:spcAft>
+            </a:pPr>
+            <a:r>
+              <a:rPr sz="1800">
+                <a:solidFill>
+                  <a:srgbClr val="6D8C97"/>
+                </a:solidFill>
+                <a:latin typeface="Consolas"/>
+              </a:rPr>
+              <a:t>  40  </a:t>
+            </a:r>
+            <a:r>
+              <a:rPr sz="1800">
+                <a:solidFill>
+                  <a:srgbClr val="7FE0A0"/>
+                </a:solidFill>
+                <a:latin typeface="Consolas"/>
+              </a:rPr>
+              <a:t>  &lt;/footer&gt;</a:t>
+            </a:r>
+          </a:p>
+          <a:p>
+            <a:pPr>
+              <a:spcAft>
+                <a:spcPts val="0"/>
+              </a:spcAft>
+            </a:pPr>
+            <a:r>
+              <a:rPr sz="1800">
+                <a:solidFill>
+                  <a:srgbClr val="6D8C97"/>
+                </a:solidFill>
+                <a:latin typeface="Consolas"/>
+              </a:rPr>
+              <a:t>  41  </a:t>
+            </a:r>
+            <a:r>
+              <a:rPr sz="1800">
+                <a:solidFill>
+                  <a:srgbClr val="7FE0A0"/>
+                </a:solidFill>
+                <a:latin typeface="Consolas"/>
+              </a:rPr>
+              <a:t>&lt;/main&gt;</a:t>
+            </a:r>
+          </a:p>
+        </p:txBody>
+      </p:sp>
+      <p:sp>
+        <p:nvSpPr>
+          <p:cNvPr id="4" name="TextBox 3"/>
+          <p:cNvSpPr txBox="1"/>
+          <p:nvPr/>
+        </p:nvSpPr>
+        <p:spPr>
+          <a:xfrm>
+            <a:off x="548640" y="5623560"/>
+            <a:ext cx="11064240" cy="1051560"/>
+          </a:xfrm>
+          <a:prstGeom prst="rect">
+            <a:avLst/>
+          </a:prstGeom>
+          <a:noFill/>
+        </p:spPr>
+        <p:txBody>
+          <a:bodyPr wrap="square">
+            <a:spAutoFit/>
+          </a:bodyPr>
+          <a:lstStyle/>
+          <a:p>
+            <a:r>
+              <a:rPr sz="2000">
+                <a:solidFill>
+                  <a:srgbClr val="DCECEF"/>
+                </a:solidFill>
+              </a:rPr>
+              <a:t>That is the whole piece. Check yours looks the same before moving on.</a:t>
+            </a:r>
+          </a:p>
+        </p:txBody>
+      </p:sp>
+    </p:spTree>
+  </p:cSld>
+  <p:clrMapOvr>
+    <a:masterClrMapping/>
+  </p:clrMapOvr>
+</p:sld>
+</file>
+
+<file path=ppt/slides/slide11.xml><?xml version="1.0" encoding="utf-8"?>
+<p:sld xmlns:a="http://schemas.openxmlformats.org/drawingml/2006/main" xmlns:p="http://schemas.openxmlformats.org/presentationml/2006/main" xmlns:r="http://schemas.openxmlformats.org/officeDocument/2006/relationships">
+  <p:cSld>
+    <p:bg>
+      <p:bgPr>
+        <a:solidFill>
+          <a:srgbClr val="102127"/>
+        </a:solidFill>
+        <a:effectLst/>
+      </p:bgPr>
+    </p:bg>
+    <p:spTree>
+      <p:nvGrpSpPr>
+        <p:cNvPr id="1" name=""/>
+        <p:cNvGrpSpPr/>
+        <p:nvPr/>
+      </p:nvGrpSpPr>
+      <p:grpSpPr/>
+      <p:sp>
+        <p:nvSpPr>
+          <p:cNvPr id="2" name="TextBox 1"/>
+          <p:cNvSpPr txBox="1"/>
+          <p:nvPr/>
+        </p:nvSpPr>
+        <p:spPr>
+          <a:xfrm>
+            <a:off x="502920" y="274320"/>
+            <a:ext cx="11155680" cy="548640"/>
+          </a:xfrm>
+          <a:prstGeom prst="rect">
+            <a:avLst/>
+          </a:prstGeom>
+          <a:noFill/>
+        </p:spPr>
+        <p:txBody>
+          <a:bodyPr wrap="none">
+            <a:spAutoFit/>
+          </a:bodyPr>
+          <a:lstStyle/>
+          <a:p>
+            <a:r>
+              <a:rPr sz="2200" b="1">
+                <a:solidFill>
+                  <a:srgbClr val="01AEFD"/>
+                </a:solidFill>
+              </a:rPr>
+              <a:t>Type this into style.css   -   line 43</a:t>
+            </a:r>
+          </a:p>
+        </p:txBody>
+      </p:sp>
+      <p:sp>
+        <p:nvSpPr>
+          <p:cNvPr id="3" name="TextBox 2"/>
+          <p:cNvSpPr txBox="1"/>
+          <p:nvPr/>
+        </p:nvSpPr>
+        <p:spPr>
+          <a:xfrm>
+            <a:off x="502920" y="960120"/>
+            <a:ext cx="11155680" cy="4297680"/>
+          </a:xfrm>
+          <a:prstGeom prst="rect">
+            <a:avLst/>
+          </a:prstGeom>
+          <a:noFill/>
+        </p:spPr>
+        <p:txBody>
+          <a:bodyPr wrap="none">
+            <a:spAutoFit/>
+          </a:bodyPr>
+          <a:lstStyle/>
+          <a:p>
+            <a:pPr>
+              <a:spcAft>
+                <a:spcPts val="0"/>
+              </a:spcAft>
+            </a:pPr>
+            <a:r>
+              <a:rPr sz="1300">
+                <a:solidFill>
+                  <a:srgbClr val="6D8C97"/>
+                </a:solidFill>
+                <a:latin typeface="Consolas"/>
+              </a:rPr>
+              <a:t>  32  </a:t>
+            </a:r>
+            <a:r>
+              <a:rPr sz="1300">
+                <a:solidFill>
+                  <a:srgbClr val="6D8C97"/>
+                </a:solidFill>
+                <a:latin typeface="Consolas"/>
+              </a:rPr>
+              <a:t>.setup { margin-bottom: 12px; font-size: 14px; }</a:t>
+            </a:r>
+          </a:p>
+          <a:p>
+            <a:pPr>
+              <a:spcAft>
+                <a:spcPts val="0"/>
+              </a:spcAft>
+            </a:pPr>
+            <a:r>
+              <a:rPr sz="1300">
+                <a:solidFill>
+                  <a:srgbClr val="6D8C97"/>
+                </a:solidFill>
+                <a:latin typeface="Consolas"/>
+              </a:rPr>
+              <a:t>  33  </a:t>
+            </a:r>
+            <a:r>
+              <a:rPr sz="1300">
+                <a:solidFill>
+                  <a:srgbClr val="6D8C97"/>
+                </a:solidFill>
+                <a:latin typeface="Consolas"/>
+              </a:rPr>
+              <a:t>.setup summary { cursor: pointer; color: #0a6299; font-weight: bold; }</a:t>
+            </a:r>
+          </a:p>
+          <a:p>
+            <a:pPr>
+              <a:spcAft>
+                <a:spcPts val="0"/>
+              </a:spcAft>
+            </a:pPr>
+            <a:r>
+              <a:rPr sz="1300">
+                <a:solidFill>
+                  <a:srgbClr val="6D8C97"/>
+                </a:solidFill>
+                <a:latin typeface="Consolas"/>
+              </a:rPr>
+              <a:t>  34  </a:t>
+            </a:r>
+            <a:r>
+              <a:rPr sz="1300">
+                <a:solidFill>
+                  <a:srgbClr val="6D8C97"/>
+                </a:solidFill>
+                <a:latin typeface="Consolas"/>
+              </a:rPr>
+              <a:t>.setup textarea {</a:t>
+            </a:r>
+          </a:p>
+          <a:p>
+            <a:pPr>
+              <a:spcAft>
+                <a:spcPts val="0"/>
+              </a:spcAft>
+            </a:pPr>
+            <a:r>
+              <a:rPr sz="1300">
+                <a:solidFill>
+                  <a:srgbClr val="6D8C97"/>
+                </a:solidFill>
+                <a:latin typeface="Consolas"/>
+              </a:rPr>
+              <a:t>  35  </a:t>
+            </a:r>
+            <a:r>
+              <a:rPr sz="1300">
+                <a:solidFill>
+                  <a:srgbClr val="6D8C97"/>
+                </a:solidFill>
+                <a:latin typeface="Consolas"/>
+              </a:rPr>
+              <a:t>  width: 100%;</a:t>
+            </a:r>
+          </a:p>
+          <a:p>
+            <a:pPr>
+              <a:spcAft>
+                <a:spcPts val="0"/>
+              </a:spcAft>
+            </a:pPr>
+            <a:r>
+              <a:rPr sz="1300">
+                <a:solidFill>
+                  <a:srgbClr val="6D8C97"/>
+                </a:solidFill>
+                <a:latin typeface="Consolas"/>
+              </a:rPr>
+              <a:t>  36  </a:t>
+            </a:r>
+            <a:r>
+              <a:rPr sz="1300">
+                <a:solidFill>
+                  <a:srgbClr val="6D8C97"/>
+                </a:solidFill>
+                <a:latin typeface="Consolas"/>
+              </a:rPr>
+              <a:t>  margin-top: 8px;</a:t>
+            </a:r>
+          </a:p>
+          <a:p>
+            <a:pPr>
+              <a:spcAft>
+                <a:spcPts val="0"/>
+              </a:spcAft>
+            </a:pPr>
+            <a:r>
+              <a:rPr sz="1300">
+                <a:solidFill>
+                  <a:srgbClr val="6D8C97"/>
+                </a:solidFill>
+                <a:latin typeface="Consolas"/>
+              </a:rPr>
+              <a:t>  37  </a:t>
+            </a:r>
+            <a:r>
+              <a:rPr sz="1300">
+                <a:solidFill>
+                  <a:srgbClr val="6D8C97"/>
+                </a:solidFill>
+                <a:latin typeface="Consolas"/>
+              </a:rPr>
+              <a:t>  padding: 9px;</a:t>
+            </a:r>
+          </a:p>
+          <a:p>
+            <a:pPr>
+              <a:spcAft>
+                <a:spcPts val="0"/>
+              </a:spcAft>
+            </a:pPr>
+            <a:r>
+              <a:rPr sz="1300">
+                <a:solidFill>
+                  <a:srgbClr val="6D8C97"/>
+                </a:solidFill>
+                <a:latin typeface="Consolas"/>
+              </a:rPr>
+              <a:t>  38  </a:t>
+            </a:r>
+            <a:r>
+              <a:rPr sz="1300">
+                <a:solidFill>
+                  <a:srgbClr val="6D8C97"/>
+                </a:solidFill>
+                <a:latin typeface="Consolas"/>
+              </a:rPr>
+              <a:t>  border: 1px solid #dbe3ec;</a:t>
+            </a:r>
+          </a:p>
+          <a:p>
+            <a:pPr>
+              <a:spcAft>
+                <a:spcPts val="0"/>
+              </a:spcAft>
+            </a:pPr>
+            <a:r>
+              <a:rPr sz="1300">
+                <a:solidFill>
+                  <a:srgbClr val="6D8C97"/>
+                </a:solidFill>
+                <a:latin typeface="Consolas"/>
+              </a:rPr>
+              <a:t>  39  </a:t>
+            </a:r>
+            <a:r>
+              <a:rPr sz="1300">
+                <a:solidFill>
+                  <a:srgbClr val="6D8C97"/>
+                </a:solidFill>
+                <a:latin typeface="Consolas"/>
+              </a:rPr>
+              <a:t>  border-radius: 6px;</a:t>
+            </a:r>
+          </a:p>
+          <a:p>
+            <a:pPr>
+              <a:spcAft>
+                <a:spcPts val="0"/>
+              </a:spcAft>
+            </a:pPr>
+            <a:r>
+              <a:rPr sz="1300">
+                <a:solidFill>
+                  <a:srgbClr val="6D8C97"/>
+                </a:solidFill>
+                <a:latin typeface="Consolas"/>
+              </a:rPr>
+              <a:t>  40  </a:t>
+            </a:r>
+            <a:r>
+              <a:rPr sz="1300">
+                <a:solidFill>
+                  <a:srgbClr val="6D8C97"/>
+                </a:solidFill>
+                <a:latin typeface="Consolas"/>
+              </a:rPr>
+              <a:t>  font-family: inherit;</a:t>
+            </a:r>
+          </a:p>
+          <a:p>
+            <a:pPr>
+              <a:spcAft>
+                <a:spcPts val="0"/>
+              </a:spcAft>
+            </a:pPr>
+            <a:r>
+              <a:rPr sz="1300">
+                <a:solidFill>
+                  <a:srgbClr val="6D8C97"/>
+                </a:solidFill>
+                <a:latin typeface="Consolas"/>
+              </a:rPr>
+              <a:t>  41  </a:t>
+            </a:r>
+            <a:r>
+              <a:rPr sz="1300">
+                <a:solidFill>
+                  <a:srgbClr val="6D8C97"/>
+                </a:solidFill>
+                <a:latin typeface="Consolas"/>
+              </a:rPr>
+              <a:t>  font-size: 14px;</a:t>
+            </a:r>
+          </a:p>
+          <a:p>
+            <a:pPr>
+              <a:spcAft>
+                <a:spcPts val="0"/>
+              </a:spcAft>
+            </a:pPr>
+            <a:r>
+              <a:rPr sz="1300">
+                <a:solidFill>
+                  <a:srgbClr val="6D8C97"/>
+                </a:solidFill>
+                <a:latin typeface="Consolas"/>
+              </a:rPr>
+              <a:t>  42  </a:t>
+            </a:r>
+            <a:r>
+              <a:rPr sz="1300">
+                <a:solidFill>
+                  <a:srgbClr val="6D8C97"/>
+                </a:solidFill>
+                <a:latin typeface="Consolas"/>
+              </a:rPr>
+              <a:t>}</a:t>
+            </a:r>
+          </a:p>
+          <a:p>
+            <a:pPr>
+              <a:spcAft>
+                <a:spcPts val="0"/>
+              </a:spcAft>
+            </a:pPr>
+            <a:r>
+              <a:rPr sz="1300">
+                <a:solidFill>
+                  <a:srgbClr val="6D8C97"/>
+                </a:solidFill>
+                <a:latin typeface="Consolas"/>
+              </a:rPr>
+              <a:t>  43  </a:t>
+            </a:r>
+            <a:r>
+              <a:rPr sz="1300">
+                <a:solidFill>
+                  <a:srgbClr val="7FE0A0"/>
+                </a:solidFill>
+                <a:latin typeface="Consolas"/>
+              </a:rPr>
+              <a:t>.credits {</a:t>
+            </a:r>
+          </a:p>
+        </p:txBody>
+      </p:sp>
+      <p:sp>
+        <p:nvSpPr>
+          <p:cNvPr id="4" name="TextBox 3"/>
+          <p:cNvSpPr txBox="1"/>
+          <p:nvPr/>
+        </p:nvSpPr>
+        <p:spPr>
+          <a:xfrm>
+            <a:off x="548640" y="5623560"/>
+            <a:ext cx="11064240" cy="1051560"/>
+          </a:xfrm>
+          <a:prstGeom prst="rect">
+            <a:avLst/>
+          </a:prstGeom>
+          <a:noFill/>
+        </p:spPr>
+        <p:txBody>
+          <a:bodyPr wrap="square">
+            <a:spAutoFit/>
+          </a:bodyPr>
+          <a:lstStyle/>
+          <a:p>
+            <a:r>
+              <a:rPr sz="2000">
+                <a:solidFill>
+                  <a:srgbClr val="DCECEF"/>
+                </a:solidFill>
+              </a:rPr>
+              <a:t>Style the footer.</a:t>
+            </a:r>
+          </a:p>
+        </p:txBody>
+      </p:sp>
+    </p:spTree>
+  </p:cSld>
+  <p:clrMapOvr>
+    <a:masterClrMapping/>
+  </p:clrMapOvr>
+</p:sld>
+</file>
+
+<file path=ppt/slides/slide12.xml><?xml version="1.0" encoding="utf-8"?>
+<p:sld xmlns:a="http://schemas.openxmlformats.org/drawingml/2006/main" xmlns:p="http://schemas.openxmlformats.org/presentationml/2006/main" xmlns:r="http://schemas.openxmlformats.org/officeDocument/2006/relationships">
+  <p:cSld>
+    <p:bg>
+      <p:bgPr>
+        <a:solidFill>
+          <a:srgbClr val="102127"/>
+        </a:solidFill>
+        <a:effectLst/>
+      </p:bgPr>
+    </p:bg>
+    <p:spTree>
+      <p:nvGrpSpPr>
+        <p:cNvPr id="1" name=""/>
+        <p:cNvGrpSpPr/>
+        <p:nvPr/>
+      </p:nvGrpSpPr>
+      <p:grpSpPr/>
+      <p:sp>
+        <p:nvSpPr>
+          <p:cNvPr id="2" name="TextBox 1"/>
+          <p:cNvSpPr txBox="1"/>
+          <p:nvPr/>
+        </p:nvSpPr>
+        <p:spPr>
+          <a:xfrm>
+            <a:off x="502920" y="274320"/>
+            <a:ext cx="11155680" cy="548640"/>
+          </a:xfrm>
+          <a:prstGeom prst="rect">
+            <a:avLst/>
+          </a:prstGeom>
+          <a:noFill/>
+        </p:spPr>
+        <p:txBody>
+          <a:bodyPr wrap="none">
+            <a:spAutoFit/>
+          </a:bodyPr>
+          <a:lstStyle/>
+          <a:p>
+            <a:r>
+              <a:rPr sz="2200" b="1">
+                <a:solidFill>
+                  <a:srgbClr val="01AEFD"/>
+                </a:solidFill>
+              </a:rPr>
+              <a:t>Type this into style.css   -   line 44</a:t>
+            </a:r>
+          </a:p>
+        </p:txBody>
+      </p:sp>
+      <p:sp>
+        <p:nvSpPr>
+          <p:cNvPr id="3" name="TextBox 2"/>
+          <p:cNvSpPr txBox="1"/>
+          <p:nvPr/>
+        </p:nvSpPr>
+        <p:spPr>
+          <a:xfrm>
+            <a:off x="502920" y="960120"/>
+            <a:ext cx="11155680" cy="4297680"/>
+          </a:xfrm>
+          <a:prstGeom prst="rect">
+            <a:avLst/>
+          </a:prstGeom>
+          <a:noFill/>
+        </p:spPr>
+        <p:txBody>
+          <a:bodyPr wrap="none">
+            <a:spAutoFit/>
+          </a:bodyPr>
+          <a:lstStyle/>
+          <a:p>
+            <a:pPr>
+              <a:spcAft>
+                <a:spcPts val="0"/>
+              </a:spcAft>
+            </a:pPr>
+            <a:r>
+              <a:rPr sz="1300">
+                <a:solidFill>
+                  <a:srgbClr val="6D8C97"/>
+                </a:solidFill>
+                <a:latin typeface="Consolas"/>
+              </a:rPr>
+              <a:t>  32  </a:t>
+            </a:r>
+            <a:r>
+              <a:rPr sz="1300">
+                <a:solidFill>
+                  <a:srgbClr val="6D8C97"/>
+                </a:solidFill>
+                <a:latin typeface="Consolas"/>
+              </a:rPr>
+              <a:t>.setup { margin-bottom: 12px; font-size: 14px; }</a:t>
+            </a:r>
+          </a:p>
+          <a:p>
+            <a:pPr>
+              <a:spcAft>
+                <a:spcPts val="0"/>
+              </a:spcAft>
+            </a:pPr>
+            <a:r>
+              <a:rPr sz="1300">
+                <a:solidFill>
+                  <a:srgbClr val="6D8C97"/>
+                </a:solidFill>
+                <a:latin typeface="Consolas"/>
+              </a:rPr>
+              <a:t>  33  </a:t>
+            </a:r>
+            <a:r>
+              <a:rPr sz="1300">
+                <a:solidFill>
+                  <a:srgbClr val="6D8C97"/>
+                </a:solidFill>
+                <a:latin typeface="Consolas"/>
+              </a:rPr>
+              <a:t>.setup summary { cursor: pointer; color: #0a6299; font-weight: bold; }</a:t>
+            </a:r>
+          </a:p>
+          <a:p>
+            <a:pPr>
+              <a:spcAft>
+                <a:spcPts val="0"/>
+              </a:spcAft>
+            </a:pPr>
+            <a:r>
+              <a:rPr sz="1300">
+                <a:solidFill>
+                  <a:srgbClr val="6D8C97"/>
+                </a:solidFill>
+                <a:latin typeface="Consolas"/>
+              </a:rPr>
+              <a:t>  34  </a:t>
+            </a:r>
+            <a:r>
+              <a:rPr sz="1300">
+                <a:solidFill>
+                  <a:srgbClr val="6D8C97"/>
+                </a:solidFill>
+                <a:latin typeface="Consolas"/>
+              </a:rPr>
+              <a:t>.setup textarea {</a:t>
+            </a:r>
+          </a:p>
+          <a:p>
+            <a:pPr>
+              <a:spcAft>
+                <a:spcPts val="0"/>
+              </a:spcAft>
+            </a:pPr>
+            <a:r>
+              <a:rPr sz="1300">
+                <a:solidFill>
+                  <a:srgbClr val="6D8C97"/>
+                </a:solidFill>
+                <a:latin typeface="Consolas"/>
+              </a:rPr>
+              <a:t>  35  </a:t>
+            </a:r>
+            <a:r>
+              <a:rPr sz="1300">
+                <a:solidFill>
+                  <a:srgbClr val="6D8C97"/>
+                </a:solidFill>
+                <a:latin typeface="Consolas"/>
+              </a:rPr>
+              <a:t>  width: 100%;</a:t>
+            </a:r>
+          </a:p>
+          <a:p>
+            <a:pPr>
+              <a:spcAft>
+                <a:spcPts val="0"/>
+              </a:spcAft>
+            </a:pPr>
+            <a:r>
+              <a:rPr sz="1300">
+                <a:solidFill>
+                  <a:srgbClr val="6D8C97"/>
+                </a:solidFill>
+                <a:latin typeface="Consolas"/>
+              </a:rPr>
+              <a:t>  36  </a:t>
+            </a:r>
+            <a:r>
+              <a:rPr sz="1300">
+                <a:solidFill>
+                  <a:srgbClr val="6D8C97"/>
+                </a:solidFill>
+                <a:latin typeface="Consolas"/>
+              </a:rPr>
+              <a:t>  margin-top: 8px;</a:t>
+            </a:r>
+          </a:p>
+          <a:p>
+            <a:pPr>
+              <a:spcAft>
+                <a:spcPts val="0"/>
+              </a:spcAft>
+            </a:pPr>
+            <a:r>
+              <a:rPr sz="1300">
+                <a:solidFill>
+                  <a:srgbClr val="6D8C97"/>
+                </a:solidFill>
+                <a:latin typeface="Consolas"/>
+              </a:rPr>
+              <a:t>  37  </a:t>
+            </a:r>
+            <a:r>
+              <a:rPr sz="1300">
+                <a:solidFill>
+                  <a:srgbClr val="6D8C97"/>
+                </a:solidFill>
+                <a:latin typeface="Consolas"/>
+              </a:rPr>
+              <a:t>  padding: 9px;</a:t>
+            </a:r>
+          </a:p>
+          <a:p>
+            <a:pPr>
+              <a:spcAft>
+                <a:spcPts val="0"/>
+              </a:spcAft>
+            </a:pPr>
+            <a:r>
+              <a:rPr sz="1300">
+                <a:solidFill>
+                  <a:srgbClr val="6D8C97"/>
+                </a:solidFill>
+                <a:latin typeface="Consolas"/>
+              </a:rPr>
+              <a:t>  38  </a:t>
+            </a:r>
+            <a:r>
+              <a:rPr sz="1300">
+                <a:solidFill>
+                  <a:srgbClr val="6D8C97"/>
+                </a:solidFill>
+                <a:latin typeface="Consolas"/>
+              </a:rPr>
+              <a:t>  border: 1px solid #dbe3ec;</a:t>
+            </a:r>
+          </a:p>
+          <a:p>
+            <a:pPr>
+              <a:spcAft>
+                <a:spcPts val="0"/>
+              </a:spcAft>
+            </a:pPr>
+            <a:r>
+              <a:rPr sz="1300">
+                <a:solidFill>
+                  <a:srgbClr val="6D8C97"/>
+                </a:solidFill>
+                <a:latin typeface="Consolas"/>
+              </a:rPr>
+              <a:t>  39  </a:t>
+            </a:r>
+            <a:r>
+              <a:rPr sz="1300">
+                <a:solidFill>
+                  <a:srgbClr val="6D8C97"/>
+                </a:solidFill>
+                <a:latin typeface="Consolas"/>
+              </a:rPr>
+              <a:t>  border-radius: 6px;</a:t>
+            </a:r>
+          </a:p>
+          <a:p>
+            <a:pPr>
+              <a:spcAft>
+                <a:spcPts val="0"/>
+              </a:spcAft>
+            </a:pPr>
+            <a:r>
+              <a:rPr sz="1300">
+                <a:solidFill>
+                  <a:srgbClr val="6D8C97"/>
+                </a:solidFill>
+                <a:latin typeface="Consolas"/>
+              </a:rPr>
+              <a:t>  40  </a:t>
+            </a:r>
+            <a:r>
+              <a:rPr sz="1300">
+                <a:solidFill>
+                  <a:srgbClr val="6D8C97"/>
+                </a:solidFill>
+                <a:latin typeface="Consolas"/>
+              </a:rPr>
+              <a:t>  font-family: inherit;</a:t>
+            </a:r>
+          </a:p>
+          <a:p>
+            <a:pPr>
+              <a:spcAft>
+                <a:spcPts val="0"/>
+              </a:spcAft>
+            </a:pPr>
+            <a:r>
+              <a:rPr sz="1300">
+                <a:solidFill>
+                  <a:srgbClr val="6D8C97"/>
+                </a:solidFill>
+                <a:latin typeface="Consolas"/>
+              </a:rPr>
+              <a:t>  41  </a:t>
+            </a:r>
+            <a:r>
+              <a:rPr sz="1300">
+                <a:solidFill>
+                  <a:srgbClr val="6D8C97"/>
+                </a:solidFill>
+                <a:latin typeface="Consolas"/>
+              </a:rPr>
+              <a:t>  font-size: 14px;</a:t>
+            </a:r>
+          </a:p>
+          <a:p>
+            <a:pPr>
+              <a:spcAft>
+                <a:spcPts val="0"/>
+              </a:spcAft>
+            </a:pPr>
+            <a:r>
+              <a:rPr sz="1300">
+                <a:solidFill>
+                  <a:srgbClr val="6D8C97"/>
+                </a:solidFill>
+                <a:latin typeface="Consolas"/>
+              </a:rPr>
+              <a:t>  42  </a:t>
+            </a:r>
+            <a:r>
+              <a:rPr sz="1300">
+                <a:solidFill>
+                  <a:srgbClr val="6D8C97"/>
+                </a:solidFill>
+                <a:latin typeface="Consolas"/>
+              </a:rPr>
+              <a:t>}</a:t>
+            </a:r>
+          </a:p>
+          <a:p>
+            <a:pPr>
+              <a:spcAft>
+                <a:spcPts val="0"/>
+              </a:spcAft>
+            </a:pPr>
+            <a:r>
+              <a:rPr sz="1300">
+                <a:solidFill>
+                  <a:srgbClr val="6D8C97"/>
+                </a:solidFill>
+                <a:latin typeface="Consolas"/>
+              </a:rPr>
+              <a:t>  43  </a:t>
+            </a:r>
+            <a:r>
+              <a:rPr sz="1300">
+                <a:solidFill>
+                  <a:srgbClr val="6D8C97"/>
+                </a:solidFill>
+                <a:latin typeface="Consolas"/>
+              </a:rPr>
+              <a:t>.credits {</a:t>
+            </a:r>
+          </a:p>
+          <a:p>
+            <a:pPr>
+              <a:spcAft>
+                <a:spcPts val="0"/>
+              </a:spcAft>
+            </a:pPr>
+            <a:r>
+              <a:rPr sz="1300">
+                <a:solidFill>
+                  <a:srgbClr val="6D8C97"/>
+                </a:solidFill>
+                <a:latin typeface="Consolas"/>
+              </a:rPr>
+              <a:t>  44  </a:t>
+            </a:r>
+            <a:r>
+              <a:rPr sz="1300">
+                <a:solidFill>
+                  <a:srgbClr val="7FE0A0"/>
+                </a:solidFill>
+                <a:latin typeface="Consolas"/>
+              </a:rPr>
+              <a:t>  margin-top: 22px;</a:t>
+            </a:r>
+          </a:p>
+        </p:txBody>
+      </p:sp>
+      <p:sp>
+        <p:nvSpPr>
+          <p:cNvPr id="4" name="TextBox 3"/>
+          <p:cNvSpPr txBox="1"/>
+          <p:nvPr/>
+        </p:nvSpPr>
+        <p:spPr>
+          <a:xfrm>
+            <a:off x="548640" y="5623560"/>
+            <a:ext cx="11064240" cy="1051560"/>
+          </a:xfrm>
+          <a:prstGeom prst="rect">
+            <a:avLst/>
+          </a:prstGeom>
+          <a:noFill/>
+        </p:spPr>
+        <p:txBody>
+          <a:bodyPr wrap="square">
+            <a:spAutoFit/>
+          </a:bodyPr>
+          <a:lstStyle/>
+          <a:p>
+            <a:r>
+              <a:rPr sz="2000">
+                <a:solidFill>
+                  <a:srgbClr val="DCECEF"/>
+                </a:solidFill>
+              </a:rPr>
+              <a:t>Push it down, away from the chat.</a:t>
+            </a:r>
+          </a:p>
+        </p:txBody>
+      </p:sp>
+    </p:spTree>
+  </p:cSld>
+  <p:clrMapOvr>
+    <a:masterClrMapping/>
+  </p:clrMapOvr>
+</p:sld>
+</file>
+
+<file path=ppt/slides/slide13.xml><?xml version="1.0" encoding="utf-8"?>
+<p:sld xmlns:a="http://schemas.openxmlformats.org/drawingml/2006/main" xmlns:p="http://schemas.openxmlformats.org/presentationml/2006/main" xmlns:r="http://schemas.openxmlformats.org/officeDocument/2006/relationships">
+  <p:cSld>
+    <p:spTree>
+      <p:nvGrpSpPr>
+        <p:cNvPr id="1" name=""/>
+        <p:cNvGrpSpPr/>
+        <p:nvPr/>
+      </p:nvGrpSpPr>
+      <p:grpSpPr/>
+      <p:sp>
+        <p:nvSpPr>
           <p:cNvPr id="2" name="Title 1"/>
           <p:cNvSpPr>
             <a:spLocks noGrp="1"/>
@@ -3200,7 +4321,7 @@
                   <a:srgbClr val="1F2A37"/>
                 </a:solidFill>
               </a:rPr>
-              <a:t>Next: AI102</a:t>
+              <a:t>padding-top</a:t>
             </a:r>
           </a:p>
         </p:txBody>
@@ -3208,6 +4329,39 @@
       <p:sp>
         <p:nvSpPr>
           <p:cNvPr id="3" name="TextBox 2"/>
+          <p:cNvSpPr txBox="1"/>
+          <p:nvPr/>
+        </p:nvSpPr>
+        <p:spPr>
+          <a:xfrm>
+            <a:off x="868680" y="502920"/>
+            <a:ext cx="5486400" cy="457200"/>
+          </a:xfrm>
+          <a:prstGeom prst="rect">
+            <a:avLst/>
+          </a:prstGeom>
+          <a:noFill/>
+        </p:spPr>
+        <p:txBody>
+          <a:bodyPr wrap="none">
+            <a:spAutoFit/>
+          </a:bodyPr>
+          <a:lstStyle/>
+          <a:p>
+            <a:r>
+              <a:rPr sz="1500" b="1">
+                <a:solidFill>
+                  <a:srgbClr val="01AEFD"/>
+                </a:solidFill>
+              </a:rPr>
+              <a:t>CSS</a:t>
+            </a:r>
+          </a:p>
+        </p:txBody>
+      </p:sp>
+      <p:sp>
+        <p:nvSpPr>
+          <p:cNvPr id="4" name="TextBox 3"/>
           <p:cNvSpPr txBox="1"/>
           <p:nvPr/>
         </p:nvSpPr>
@@ -3233,14 +4387,579 @@
               </a:spcAft>
             </a:pPr>
             <a:r>
-              <a:rPr sz="2800">
+              <a:rPr sz="2400">
+                <a:solidFill>
+                  <a:srgbClr val="1F2A37"/>
+                </a:solidFill>
+              </a:rPr>
+              <a:t>• Space inside the box, at the top only.</a:t>
+            </a:r>
+          </a:p>
+        </p:txBody>
+      </p:sp>
+    </p:spTree>
+  </p:cSld>
+  <p:clrMapOvr>
+    <a:masterClrMapping/>
+  </p:clrMapOvr>
+</p:sld>
+</file>
+
+<file path=ppt/slides/slide14.xml><?xml version="1.0" encoding="utf-8"?>
+<p:sld xmlns:a="http://schemas.openxmlformats.org/drawingml/2006/main" xmlns:p="http://schemas.openxmlformats.org/presentationml/2006/main" xmlns:r="http://schemas.openxmlformats.org/officeDocument/2006/relationships">
+  <p:cSld>
+    <p:bg>
+      <p:bgPr>
+        <a:solidFill>
+          <a:srgbClr val="102127"/>
+        </a:solidFill>
+        <a:effectLst/>
+      </p:bgPr>
+    </p:bg>
+    <p:spTree>
+      <p:nvGrpSpPr>
+        <p:cNvPr id="1" name=""/>
+        <p:cNvGrpSpPr/>
+        <p:nvPr/>
+      </p:nvGrpSpPr>
+      <p:grpSpPr/>
+      <p:sp>
+        <p:nvSpPr>
+          <p:cNvPr id="2" name="TextBox 1"/>
+          <p:cNvSpPr txBox="1"/>
+          <p:nvPr/>
+        </p:nvSpPr>
+        <p:spPr>
+          <a:xfrm>
+            <a:off x="502920" y="274320"/>
+            <a:ext cx="11155680" cy="548640"/>
+          </a:xfrm>
+          <a:prstGeom prst="rect">
+            <a:avLst/>
+          </a:prstGeom>
+          <a:noFill/>
+        </p:spPr>
+        <p:txBody>
+          <a:bodyPr wrap="none">
+            <a:spAutoFit/>
+          </a:bodyPr>
+          <a:lstStyle/>
+          <a:p>
+            <a:r>
+              <a:rPr sz="2200" b="1">
                 <a:solidFill>
                   <a:srgbClr val="01AEFD"/>
                 </a:solidFill>
               </a:rPr>
-              <a:t>Pictures, voices, video</a:t>
-            </a:r>
-          </a:p>
+              <a:t>Type this into style.css   -   line 45</a:t>
+            </a:r>
+          </a:p>
+        </p:txBody>
+      </p:sp>
+      <p:sp>
+        <p:nvSpPr>
+          <p:cNvPr id="3" name="TextBox 2"/>
+          <p:cNvSpPr txBox="1"/>
+          <p:nvPr/>
+        </p:nvSpPr>
+        <p:spPr>
+          <a:xfrm>
+            <a:off x="502920" y="960120"/>
+            <a:ext cx="11155680" cy="4297680"/>
+          </a:xfrm>
+          <a:prstGeom prst="rect">
+            <a:avLst/>
+          </a:prstGeom>
+          <a:noFill/>
+        </p:spPr>
+        <p:txBody>
+          <a:bodyPr wrap="none">
+            <a:spAutoFit/>
+          </a:bodyPr>
+          <a:lstStyle/>
+          <a:p>
+            <a:pPr>
+              <a:spcAft>
+                <a:spcPts val="0"/>
+              </a:spcAft>
+            </a:pPr>
+            <a:r>
+              <a:rPr sz="1300">
+                <a:solidFill>
+                  <a:srgbClr val="6D8C97"/>
+                </a:solidFill>
+                <a:latin typeface="Consolas"/>
+              </a:rPr>
+              <a:t>  32  </a:t>
+            </a:r>
+            <a:r>
+              <a:rPr sz="1300">
+                <a:solidFill>
+                  <a:srgbClr val="6D8C97"/>
+                </a:solidFill>
+                <a:latin typeface="Consolas"/>
+              </a:rPr>
+              <a:t>.setup { margin-bottom: 12px; font-size: 14px; }</a:t>
+            </a:r>
+          </a:p>
+          <a:p>
+            <a:pPr>
+              <a:spcAft>
+                <a:spcPts val="0"/>
+              </a:spcAft>
+            </a:pPr>
+            <a:r>
+              <a:rPr sz="1300">
+                <a:solidFill>
+                  <a:srgbClr val="6D8C97"/>
+                </a:solidFill>
+                <a:latin typeface="Consolas"/>
+              </a:rPr>
+              <a:t>  33  </a:t>
+            </a:r>
+            <a:r>
+              <a:rPr sz="1300">
+                <a:solidFill>
+                  <a:srgbClr val="6D8C97"/>
+                </a:solidFill>
+                <a:latin typeface="Consolas"/>
+              </a:rPr>
+              <a:t>.setup summary { cursor: pointer; color: #0a6299; font-weight: bold; }</a:t>
+            </a:r>
+          </a:p>
+          <a:p>
+            <a:pPr>
+              <a:spcAft>
+                <a:spcPts val="0"/>
+              </a:spcAft>
+            </a:pPr>
+            <a:r>
+              <a:rPr sz="1300">
+                <a:solidFill>
+                  <a:srgbClr val="6D8C97"/>
+                </a:solidFill>
+                <a:latin typeface="Consolas"/>
+              </a:rPr>
+              <a:t>  34  </a:t>
+            </a:r>
+            <a:r>
+              <a:rPr sz="1300">
+                <a:solidFill>
+                  <a:srgbClr val="6D8C97"/>
+                </a:solidFill>
+                <a:latin typeface="Consolas"/>
+              </a:rPr>
+              <a:t>.setup textarea {</a:t>
+            </a:r>
+          </a:p>
+          <a:p>
+            <a:pPr>
+              <a:spcAft>
+                <a:spcPts val="0"/>
+              </a:spcAft>
+            </a:pPr>
+            <a:r>
+              <a:rPr sz="1300">
+                <a:solidFill>
+                  <a:srgbClr val="6D8C97"/>
+                </a:solidFill>
+                <a:latin typeface="Consolas"/>
+              </a:rPr>
+              <a:t>  35  </a:t>
+            </a:r>
+            <a:r>
+              <a:rPr sz="1300">
+                <a:solidFill>
+                  <a:srgbClr val="6D8C97"/>
+                </a:solidFill>
+                <a:latin typeface="Consolas"/>
+              </a:rPr>
+              <a:t>  width: 100%;</a:t>
+            </a:r>
+          </a:p>
+          <a:p>
+            <a:pPr>
+              <a:spcAft>
+                <a:spcPts val="0"/>
+              </a:spcAft>
+            </a:pPr>
+            <a:r>
+              <a:rPr sz="1300">
+                <a:solidFill>
+                  <a:srgbClr val="6D8C97"/>
+                </a:solidFill>
+                <a:latin typeface="Consolas"/>
+              </a:rPr>
+              <a:t>  36  </a:t>
+            </a:r>
+            <a:r>
+              <a:rPr sz="1300">
+                <a:solidFill>
+                  <a:srgbClr val="6D8C97"/>
+                </a:solidFill>
+                <a:latin typeface="Consolas"/>
+              </a:rPr>
+              <a:t>  margin-top: 8px;</a:t>
+            </a:r>
+          </a:p>
+          <a:p>
+            <a:pPr>
+              <a:spcAft>
+                <a:spcPts val="0"/>
+              </a:spcAft>
+            </a:pPr>
+            <a:r>
+              <a:rPr sz="1300">
+                <a:solidFill>
+                  <a:srgbClr val="6D8C97"/>
+                </a:solidFill>
+                <a:latin typeface="Consolas"/>
+              </a:rPr>
+              <a:t>  37  </a:t>
+            </a:r>
+            <a:r>
+              <a:rPr sz="1300">
+                <a:solidFill>
+                  <a:srgbClr val="6D8C97"/>
+                </a:solidFill>
+                <a:latin typeface="Consolas"/>
+              </a:rPr>
+              <a:t>  padding: 9px;</a:t>
+            </a:r>
+          </a:p>
+          <a:p>
+            <a:pPr>
+              <a:spcAft>
+                <a:spcPts val="0"/>
+              </a:spcAft>
+            </a:pPr>
+            <a:r>
+              <a:rPr sz="1300">
+                <a:solidFill>
+                  <a:srgbClr val="6D8C97"/>
+                </a:solidFill>
+                <a:latin typeface="Consolas"/>
+              </a:rPr>
+              <a:t>  38  </a:t>
+            </a:r>
+            <a:r>
+              <a:rPr sz="1300">
+                <a:solidFill>
+                  <a:srgbClr val="6D8C97"/>
+                </a:solidFill>
+                <a:latin typeface="Consolas"/>
+              </a:rPr>
+              <a:t>  border: 1px solid #dbe3ec;</a:t>
+            </a:r>
+          </a:p>
+          <a:p>
+            <a:pPr>
+              <a:spcAft>
+                <a:spcPts val="0"/>
+              </a:spcAft>
+            </a:pPr>
+            <a:r>
+              <a:rPr sz="1300">
+                <a:solidFill>
+                  <a:srgbClr val="6D8C97"/>
+                </a:solidFill>
+                <a:latin typeface="Consolas"/>
+              </a:rPr>
+              <a:t>  39  </a:t>
+            </a:r>
+            <a:r>
+              <a:rPr sz="1300">
+                <a:solidFill>
+                  <a:srgbClr val="6D8C97"/>
+                </a:solidFill>
+                <a:latin typeface="Consolas"/>
+              </a:rPr>
+              <a:t>  border-radius: 6px;</a:t>
+            </a:r>
+          </a:p>
+          <a:p>
+            <a:pPr>
+              <a:spcAft>
+                <a:spcPts val="0"/>
+              </a:spcAft>
+            </a:pPr>
+            <a:r>
+              <a:rPr sz="1300">
+                <a:solidFill>
+                  <a:srgbClr val="6D8C97"/>
+                </a:solidFill>
+                <a:latin typeface="Consolas"/>
+              </a:rPr>
+              <a:t>  40  </a:t>
+            </a:r>
+            <a:r>
+              <a:rPr sz="1300">
+                <a:solidFill>
+                  <a:srgbClr val="6D8C97"/>
+                </a:solidFill>
+                <a:latin typeface="Consolas"/>
+              </a:rPr>
+              <a:t>  font-family: inherit;</a:t>
+            </a:r>
+          </a:p>
+          <a:p>
+            <a:pPr>
+              <a:spcAft>
+                <a:spcPts val="0"/>
+              </a:spcAft>
+            </a:pPr>
+            <a:r>
+              <a:rPr sz="1300">
+                <a:solidFill>
+                  <a:srgbClr val="6D8C97"/>
+                </a:solidFill>
+                <a:latin typeface="Consolas"/>
+              </a:rPr>
+              <a:t>  41  </a:t>
+            </a:r>
+            <a:r>
+              <a:rPr sz="1300">
+                <a:solidFill>
+                  <a:srgbClr val="6D8C97"/>
+                </a:solidFill>
+                <a:latin typeface="Consolas"/>
+              </a:rPr>
+              <a:t>  font-size: 14px;</a:t>
+            </a:r>
+          </a:p>
+          <a:p>
+            <a:pPr>
+              <a:spcAft>
+                <a:spcPts val="0"/>
+              </a:spcAft>
+            </a:pPr>
+            <a:r>
+              <a:rPr sz="1300">
+                <a:solidFill>
+                  <a:srgbClr val="6D8C97"/>
+                </a:solidFill>
+                <a:latin typeface="Consolas"/>
+              </a:rPr>
+              <a:t>  42  </a:t>
+            </a:r>
+            <a:r>
+              <a:rPr sz="1300">
+                <a:solidFill>
+                  <a:srgbClr val="6D8C97"/>
+                </a:solidFill>
+                <a:latin typeface="Consolas"/>
+              </a:rPr>
+              <a:t>}</a:t>
+            </a:r>
+          </a:p>
+          <a:p>
+            <a:pPr>
+              <a:spcAft>
+                <a:spcPts val="0"/>
+              </a:spcAft>
+            </a:pPr>
+            <a:r>
+              <a:rPr sz="1300">
+                <a:solidFill>
+                  <a:srgbClr val="6D8C97"/>
+                </a:solidFill>
+                <a:latin typeface="Consolas"/>
+              </a:rPr>
+              <a:t>  43  </a:t>
+            </a:r>
+            <a:r>
+              <a:rPr sz="1300">
+                <a:solidFill>
+                  <a:srgbClr val="6D8C97"/>
+                </a:solidFill>
+                <a:latin typeface="Consolas"/>
+              </a:rPr>
+              <a:t>.credits {</a:t>
+            </a:r>
+          </a:p>
+          <a:p>
+            <a:pPr>
+              <a:spcAft>
+                <a:spcPts val="0"/>
+              </a:spcAft>
+            </a:pPr>
+            <a:r>
+              <a:rPr sz="1300">
+                <a:solidFill>
+                  <a:srgbClr val="6D8C97"/>
+                </a:solidFill>
+                <a:latin typeface="Consolas"/>
+              </a:rPr>
+              <a:t>  44  </a:t>
+            </a:r>
+            <a:r>
+              <a:rPr sz="1300">
+                <a:solidFill>
+                  <a:srgbClr val="6D8C97"/>
+                </a:solidFill>
+                <a:latin typeface="Consolas"/>
+              </a:rPr>
+              <a:t>  margin-top: 22px;</a:t>
+            </a:r>
+          </a:p>
+          <a:p>
+            <a:pPr>
+              <a:spcAft>
+                <a:spcPts val="0"/>
+              </a:spcAft>
+            </a:pPr>
+            <a:r>
+              <a:rPr sz="1300">
+                <a:solidFill>
+                  <a:srgbClr val="6D8C97"/>
+                </a:solidFill>
+                <a:latin typeface="Consolas"/>
+              </a:rPr>
+              <a:t>  45  </a:t>
+            </a:r>
+            <a:r>
+              <a:rPr sz="1300">
+                <a:solidFill>
+                  <a:srgbClr val="7FE0A0"/>
+                </a:solidFill>
+                <a:latin typeface="Consolas"/>
+              </a:rPr>
+              <a:t>  padding-top: 14px;</a:t>
+            </a:r>
+          </a:p>
+        </p:txBody>
+      </p:sp>
+      <p:sp>
+        <p:nvSpPr>
+          <p:cNvPr id="4" name="TextBox 3"/>
+          <p:cNvSpPr txBox="1"/>
+          <p:nvPr/>
+        </p:nvSpPr>
+        <p:spPr>
+          <a:xfrm>
+            <a:off x="548640" y="5623560"/>
+            <a:ext cx="11064240" cy="1051560"/>
+          </a:xfrm>
+          <a:prstGeom prst="rect">
+            <a:avLst/>
+          </a:prstGeom>
+          <a:noFill/>
+        </p:spPr>
+        <p:txBody>
+          <a:bodyPr wrap="square">
+            <a:spAutoFit/>
+          </a:bodyPr>
+          <a:lstStyle/>
+          <a:p>
+            <a:r>
+              <a:rPr sz="2000">
+                <a:solidFill>
+                  <a:srgbClr val="DCECEF"/>
+                </a:solidFill>
+              </a:rPr>
+              <a:t>Space above the text, inside the footer.</a:t>
+            </a:r>
+          </a:p>
+        </p:txBody>
+      </p:sp>
+    </p:spTree>
+  </p:cSld>
+  <p:clrMapOvr>
+    <a:masterClrMapping/>
+  </p:clrMapOvr>
+</p:sld>
+</file>
+
+<file path=ppt/slides/slide15.xml><?xml version="1.0" encoding="utf-8"?>
+<p:sld xmlns:a="http://schemas.openxmlformats.org/drawingml/2006/main" xmlns:p="http://schemas.openxmlformats.org/presentationml/2006/main" xmlns:r="http://schemas.openxmlformats.org/officeDocument/2006/relationships">
+  <p:cSld>
+    <p:spTree>
+      <p:nvGrpSpPr>
+        <p:cNvPr id="1" name=""/>
+        <p:cNvGrpSpPr/>
+        <p:nvPr/>
+      </p:nvGrpSpPr>
+      <p:grpSpPr/>
+      <p:sp>
+        <p:nvSpPr>
+          <p:cNvPr id="2" name="Title 1"/>
+          <p:cNvSpPr>
+            <a:spLocks noGrp="1"/>
+          </p:cNvSpPr>
+          <p:nvPr>
+            <p:ph type="title"/>
+          </p:nvPr>
+        </p:nvSpPr>
+        <p:spPr/>
+        <p:txBody>
+          <a:bodyPr/>
+          <a:lstStyle/>
+          <a:p>
+            <a:r>
+              <a:rPr sz="3800" b="1">
+                <a:solidFill>
+                  <a:srgbClr val="1F2A37"/>
+                </a:solidFill>
+              </a:rPr>
+              <a:t>border-top</a:t>
+            </a:r>
+          </a:p>
+        </p:txBody>
+      </p:sp>
+      <p:sp>
+        <p:nvSpPr>
+          <p:cNvPr id="3" name="TextBox 2"/>
+          <p:cNvSpPr txBox="1"/>
+          <p:nvPr/>
+        </p:nvSpPr>
+        <p:spPr>
+          <a:xfrm>
+            <a:off x="868680" y="502920"/>
+            <a:ext cx="5486400" cy="457200"/>
+          </a:xfrm>
+          <a:prstGeom prst="rect">
+            <a:avLst/>
+          </a:prstGeom>
+          <a:noFill/>
+        </p:spPr>
+        <p:txBody>
+          <a:bodyPr wrap="none">
+            <a:spAutoFit/>
+          </a:bodyPr>
+          <a:lstStyle/>
+          <a:p>
+            <a:r>
+              <a:rPr sz="1500" b="1">
+                <a:solidFill>
+                  <a:srgbClr val="01AEFD"/>
+                </a:solidFill>
+              </a:rPr>
+              <a:t>CSS</a:t>
+            </a:r>
+          </a:p>
+        </p:txBody>
+      </p:sp>
+      <p:sp>
+        <p:nvSpPr>
+          <p:cNvPr id="4" name="TextBox 3"/>
+          <p:cNvSpPr txBox="1"/>
+          <p:nvPr/>
+        </p:nvSpPr>
+        <p:spPr>
+          <a:xfrm>
+            <a:off x="822960" y="1828800"/>
+            <a:ext cx="10515600" cy="4206240"/>
+          </a:xfrm>
+          <a:prstGeom prst="rect">
+            <a:avLst/>
+          </a:prstGeom>
+          <a:noFill/>
+        </p:spPr>
+        <p:txBody>
+          <a:bodyPr wrap="square">
+            <a:spAutoFit/>
+          </a:bodyPr>
+          <a:lstStyle/>
           <a:p>
             <a:pPr>
               <a:spcAft>
@@ -3253,22 +4972,2117 @@
                   <a:srgbClr val="1F2A37"/>
                 </a:solidFill>
               </a:rPr>
-              <a:t>• Same server, same skills</a:t>
-            </a:r>
-          </a:p>
-          <a:p>
-            <a:pPr>
-              <a:spcAft>
-                <a:spcPts val="1400"/>
-              </a:spcAft>
-            </a:pPr>
-            <a:r>
-              <a:rPr sz="2400">
-                <a:solidFill>
-                  <a:srgbClr val="1F2A37"/>
-                </a:solidFill>
-              </a:rPr>
-              <a:t>• Everything you wrote still applies</a:t>
+              <a:t>• A line along just the top edge - a divider above the footer.</a:t>
+            </a:r>
+          </a:p>
+        </p:txBody>
+      </p:sp>
+    </p:spTree>
+  </p:cSld>
+  <p:clrMapOvr>
+    <a:masterClrMapping/>
+  </p:clrMapOvr>
+</p:sld>
+</file>
+
+<file path=ppt/slides/slide16.xml><?xml version="1.0" encoding="utf-8"?>
+<p:sld xmlns:a="http://schemas.openxmlformats.org/drawingml/2006/main" xmlns:p="http://schemas.openxmlformats.org/presentationml/2006/main" xmlns:r="http://schemas.openxmlformats.org/officeDocument/2006/relationships">
+  <p:cSld>
+    <p:bg>
+      <p:bgPr>
+        <a:solidFill>
+          <a:srgbClr val="102127"/>
+        </a:solidFill>
+        <a:effectLst/>
+      </p:bgPr>
+    </p:bg>
+    <p:spTree>
+      <p:nvGrpSpPr>
+        <p:cNvPr id="1" name=""/>
+        <p:cNvGrpSpPr/>
+        <p:nvPr/>
+      </p:nvGrpSpPr>
+      <p:grpSpPr/>
+      <p:sp>
+        <p:nvSpPr>
+          <p:cNvPr id="2" name="TextBox 1"/>
+          <p:cNvSpPr txBox="1"/>
+          <p:nvPr/>
+        </p:nvSpPr>
+        <p:spPr>
+          <a:xfrm>
+            <a:off x="502920" y="274320"/>
+            <a:ext cx="11155680" cy="548640"/>
+          </a:xfrm>
+          <a:prstGeom prst="rect">
+            <a:avLst/>
+          </a:prstGeom>
+          <a:noFill/>
+        </p:spPr>
+        <p:txBody>
+          <a:bodyPr wrap="none">
+            <a:spAutoFit/>
+          </a:bodyPr>
+          <a:lstStyle/>
+          <a:p>
+            <a:r>
+              <a:rPr sz="2200" b="1">
+                <a:solidFill>
+                  <a:srgbClr val="01AEFD"/>
+                </a:solidFill>
+              </a:rPr>
+              <a:t>Type this into style.css   -   line 46</a:t>
+            </a:r>
+          </a:p>
+        </p:txBody>
+      </p:sp>
+      <p:sp>
+        <p:nvSpPr>
+          <p:cNvPr id="3" name="TextBox 2"/>
+          <p:cNvSpPr txBox="1"/>
+          <p:nvPr/>
+        </p:nvSpPr>
+        <p:spPr>
+          <a:xfrm>
+            <a:off x="502920" y="960120"/>
+            <a:ext cx="11155680" cy="4297680"/>
+          </a:xfrm>
+          <a:prstGeom prst="rect">
+            <a:avLst/>
+          </a:prstGeom>
+          <a:noFill/>
+        </p:spPr>
+        <p:txBody>
+          <a:bodyPr wrap="none">
+            <a:spAutoFit/>
+          </a:bodyPr>
+          <a:lstStyle/>
+          <a:p>
+            <a:pPr>
+              <a:spcAft>
+                <a:spcPts val="0"/>
+              </a:spcAft>
+            </a:pPr>
+            <a:r>
+              <a:rPr sz="1300">
+                <a:solidFill>
+                  <a:srgbClr val="6D8C97"/>
+                </a:solidFill>
+                <a:latin typeface="Consolas"/>
+              </a:rPr>
+              <a:t>  32  </a:t>
+            </a:r>
+            <a:r>
+              <a:rPr sz="1300">
+                <a:solidFill>
+                  <a:srgbClr val="6D8C97"/>
+                </a:solidFill>
+                <a:latin typeface="Consolas"/>
+              </a:rPr>
+              <a:t>.setup { margin-bottom: 12px; font-size: 14px; }</a:t>
+            </a:r>
+          </a:p>
+          <a:p>
+            <a:pPr>
+              <a:spcAft>
+                <a:spcPts val="0"/>
+              </a:spcAft>
+            </a:pPr>
+            <a:r>
+              <a:rPr sz="1300">
+                <a:solidFill>
+                  <a:srgbClr val="6D8C97"/>
+                </a:solidFill>
+                <a:latin typeface="Consolas"/>
+              </a:rPr>
+              <a:t>  33  </a:t>
+            </a:r>
+            <a:r>
+              <a:rPr sz="1300">
+                <a:solidFill>
+                  <a:srgbClr val="6D8C97"/>
+                </a:solidFill>
+                <a:latin typeface="Consolas"/>
+              </a:rPr>
+              <a:t>.setup summary { cursor: pointer; color: #0a6299; font-weight: bold; }</a:t>
+            </a:r>
+          </a:p>
+          <a:p>
+            <a:pPr>
+              <a:spcAft>
+                <a:spcPts val="0"/>
+              </a:spcAft>
+            </a:pPr>
+            <a:r>
+              <a:rPr sz="1300">
+                <a:solidFill>
+                  <a:srgbClr val="6D8C97"/>
+                </a:solidFill>
+                <a:latin typeface="Consolas"/>
+              </a:rPr>
+              <a:t>  34  </a:t>
+            </a:r>
+            <a:r>
+              <a:rPr sz="1300">
+                <a:solidFill>
+                  <a:srgbClr val="6D8C97"/>
+                </a:solidFill>
+                <a:latin typeface="Consolas"/>
+              </a:rPr>
+              <a:t>.setup textarea {</a:t>
+            </a:r>
+          </a:p>
+          <a:p>
+            <a:pPr>
+              <a:spcAft>
+                <a:spcPts val="0"/>
+              </a:spcAft>
+            </a:pPr>
+            <a:r>
+              <a:rPr sz="1300">
+                <a:solidFill>
+                  <a:srgbClr val="6D8C97"/>
+                </a:solidFill>
+                <a:latin typeface="Consolas"/>
+              </a:rPr>
+              <a:t>  35  </a:t>
+            </a:r>
+            <a:r>
+              <a:rPr sz="1300">
+                <a:solidFill>
+                  <a:srgbClr val="6D8C97"/>
+                </a:solidFill>
+                <a:latin typeface="Consolas"/>
+              </a:rPr>
+              <a:t>  width: 100%;</a:t>
+            </a:r>
+          </a:p>
+          <a:p>
+            <a:pPr>
+              <a:spcAft>
+                <a:spcPts val="0"/>
+              </a:spcAft>
+            </a:pPr>
+            <a:r>
+              <a:rPr sz="1300">
+                <a:solidFill>
+                  <a:srgbClr val="6D8C97"/>
+                </a:solidFill>
+                <a:latin typeface="Consolas"/>
+              </a:rPr>
+              <a:t>  36  </a:t>
+            </a:r>
+            <a:r>
+              <a:rPr sz="1300">
+                <a:solidFill>
+                  <a:srgbClr val="6D8C97"/>
+                </a:solidFill>
+                <a:latin typeface="Consolas"/>
+              </a:rPr>
+              <a:t>  margin-top: 8px;</a:t>
+            </a:r>
+          </a:p>
+          <a:p>
+            <a:pPr>
+              <a:spcAft>
+                <a:spcPts val="0"/>
+              </a:spcAft>
+            </a:pPr>
+            <a:r>
+              <a:rPr sz="1300">
+                <a:solidFill>
+                  <a:srgbClr val="6D8C97"/>
+                </a:solidFill>
+                <a:latin typeface="Consolas"/>
+              </a:rPr>
+              <a:t>  37  </a:t>
+            </a:r>
+            <a:r>
+              <a:rPr sz="1300">
+                <a:solidFill>
+                  <a:srgbClr val="6D8C97"/>
+                </a:solidFill>
+                <a:latin typeface="Consolas"/>
+              </a:rPr>
+              <a:t>  padding: 9px;</a:t>
+            </a:r>
+          </a:p>
+          <a:p>
+            <a:pPr>
+              <a:spcAft>
+                <a:spcPts val="0"/>
+              </a:spcAft>
+            </a:pPr>
+            <a:r>
+              <a:rPr sz="1300">
+                <a:solidFill>
+                  <a:srgbClr val="6D8C97"/>
+                </a:solidFill>
+                <a:latin typeface="Consolas"/>
+              </a:rPr>
+              <a:t>  38  </a:t>
+            </a:r>
+            <a:r>
+              <a:rPr sz="1300">
+                <a:solidFill>
+                  <a:srgbClr val="6D8C97"/>
+                </a:solidFill>
+                <a:latin typeface="Consolas"/>
+              </a:rPr>
+              <a:t>  border: 1px solid #dbe3ec;</a:t>
+            </a:r>
+          </a:p>
+          <a:p>
+            <a:pPr>
+              <a:spcAft>
+                <a:spcPts val="0"/>
+              </a:spcAft>
+            </a:pPr>
+            <a:r>
+              <a:rPr sz="1300">
+                <a:solidFill>
+                  <a:srgbClr val="6D8C97"/>
+                </a:solidFill>
+                <a:latin typeface="Consolas"/>
+              </a:rPr>
+              <a:t>  39  </a:t>
+            </a:r>
+            <a:r>
+              <a:rPr sz="1300">
+                <a:solidFill>
+                  <a:srgbClr val="6D8C97"/>
+                </a:solidFill>
+                <a:latin typeface="Consolas"/>
+              </a:rPr>
+              <a:t>  border-radius: 6px;</a:t>
+            </a:r>
+          </a:p>
+          <a:p>
+            <a:pPr>
+              <a:spcAft>
+                <a:spcPts val="0"/>
+              </a:spcAft>
+            </a:pPr>
+            <a:r>
+              <a:rPr sz="1300">
+                <a:solidFill>
+                  <a:srgbClr val="6D8C97"/>
+                </a:solidFill>
+                <a:latin typeface="Consolas"/>
+              </a:rPr>
+              <a:t>  40  </a:t>
+            </a:r>
+            <a:r>
+              <a:rPr sz="1300">
+                <a:solidFill>
+                  <a:srgbClr val="6D8C97"/>
+                </a:solidFill>
+                <a:latin typeface="Consolas"/>
+              </a:rPr>
+              <a:t>  font-family: inherit;</a:t>
+            </a:r>
+          </a:p>
+          <a:p>
+            <a:pPr>
+              <a:spcAft>
+                <a:spcPts val="0"/>
+              </a:spcAft>
+            </a:pPr>
+            <a:r>
+              <a:rPr sz="1300">
+                <a:solidFill>
+                  <a:srgbClr val="6D8C97"/>
+                </a:solidFill>
+                <a:latin typeface="Consolas"/>
+              </a:rPr>
+              <a:t>  41  </a:t>
+            </a:r>
+            <a:r>
+              <a:rPr sz="1300">
+                <a:solidFill>
+                  <a:srgbClr val="6D8C97"/>
+                </a:solidFill>
+                <a:latin typeface="Consolas"/>
+              </a:rPr>
+              <a:t>  font-size: 14px;</a:t>
+            </a:r>
+          </a:p>
+          <a:p>
+            <a:pPr>
+              <a:spcAft>
+                <a:spcPts val="0"/>
+              </a:spcAft>
+            </a:pPr>
+            <a:r>
+              <a:rPr sz="1300">
+                <a:solidFill>
+                  <a:srgbClr val="6D8C97"/>
+                </a:solidFill>
+                <a:latin typeface="Consolas"/>
+              </a:rPr>
+              <a:t>  42  </a:t>
+            </a:r>
+            <a:r>
+              <a:rPr sz="1300">
+                <a:solidFill>
+                  <a:srgbClr val="6D8C97"/>
+                </a:solidFill>
+                <a:latin typeface="Consolas"/>
+              </a:rPr>
+              <a:t>}</a:t>
+            </a:r>
+          </a:p>
+          <a:p>
+            <a:pPr>
+              <a:spcAft>
+                <a:spcPts val="0"/>
+              </a:spcAft>
+            </a:pPr>
+            <a:r>
+              <a:rPr sz="1300">
+                <a:solidFill>
+                  <a:srgbClr val="6D8C97"/>
+                </a:solidFill>
+                <a:latin typeface="Consolas"/>
+              </a:rPr>
+              <a:t>  43  </a:t>
+            </a:r>
+            <a:r>
+              <a:rPr sz="1300">
+                <a:solidFill>
+                  <a:srgbClr val="6D8C97"/>
+                </a:solidFill>
+                <a:latin typeface="Consolas"/>
+              </a:rPr>
+              <a:t>.credits {</a:t>
+            </a:r>
+          </a:p>
+          <a:p>
+            <a:pPr>
+              <a:spcAft>
+                <a:spcPts val="0"/>
+              </a:spcAft>
+            </a:pPr>
+            <a:r>
+              <a:rPr sz="1300">
+                <a:solidFill>
+                  <a:srgbClr val="6D8C97"/>
+                </a:solidFill>
+                <a:latin typeface="Consolas"/>
+              </a:rPr>
+              <a:t>  44  </a:t>
+            </a:r>
+            <a:r>
+              <a:rPr sz="1300">
+                <a:solidFill>
+                  <a:srgbClr val="6D8C97"/>
+                </a:solidFill>
+                <a:latin typeface="Consolas"/>
+              </a:rPr>
+              <a:t>  margin-top: 22px;</a:t>
+            </a:r>
+          </a:p>
+          <a:p>
+            <a:pPr>
+              <a:spcAft>
+                <a:spcPts val="0"/>
+              </a:spcAft>
+            </a:pPr>
+            <a:r>
+              <a:rPr sz="1300">
+                <a:solidFill>
+                  <a:srgbClr val="6D8C97"/>
+                </a:solidFill>
+                <a:latin typeface="Consolas"/>
+              </a:rPr>
+              <a:t>  45  </a:t>
+            </a:r>
+            <a:r>
+              <a:rPr sz="1300">
+                <a:solidFill>
+                  <a:srgbClr val="6D8C97"/>
+                </a:solidFill>
+                <a:latin typeface="Consolas"/>
+              </a:rPr>
+              <a:t>  padding-top: 14px;</a:t>
+            </a:r>
+          </a:p>
+          <a:p>
+            <a:pPr>
+              <a:spcAft>
+                <a:spcPts val="0"/>
+              </a:spcAft>
+            </a:pPr>
+            <a:r>
+              <a:rPr sz="1300">
+                <a:solidFill>
+                  <a:srgbClr val="6D8C97"/>
+                </a:solidFill>
+                <a:latin typeface="Consolas"/>
+              </a:rPr>
+              <a:t>  46  </a:t>
+            </a:r>
+            <a:r>
+              <a:rPr sz="1300">
+                <a:solidFill>
+                  <a:srgbClr val="7FE0A0"/>
+                </a:solidFill>
+                <a:latin typeface="Consolas"/>
+              </a:rPr>
+              <a:t>  border-top: 1px solid #dbe3ec;</a:t>
+            </a:r>
+          </a:p>
+        </p:txBody>
+      </p:sp>
+      <p:sp>
+        <p:nvSpPr>
+          <p:cNvPr id="4" name="TextBox 3"/>
+          <p:cNvSpPr txBox="1"/>
+          <p:nvPr/>
+        </p:nvSpPr>
+        <p:spPr>
+          <a:xfrm>
+            <a:off x="548640" y="5623560"/>
+            <a:ext cx="11064240" cy="1051560"/>
+          </a:xfrm>
+          <a:prstGeom prst="rect">
+            <a:avLst/>
+          </a:prstGeom>
+          <a:noFill/>
+        </p:spPr>
+        <p:txBody>
+          <a:bodyPr wrap="square">
+            <a:spAutoFit/>
+          </a:bodyPr>
+          <a:lstStyle/>
+          <a:p>
+            <a:r>
+              <a:rPr sz="2000">
+                <a:solidFill>
+                  <a:srgbClr val="DCECEF"/>
+                </a:solidFill>
+              </a:rPr>
+              <a:t>A thin line along the TOP - a divider above the credits.</a:t>
+            </a:r>
+          </a:p>
+        </p:txBody>
+      </p:sp>
+    </p:spTree>
+  </p:cSld>
+  <p:clrMapOvr>
+    <a:masterClrMapping/>
+  </p:clrMapOvr>
+</p:sld>
+</file>
+
+<file path=ppt/slides/slide17.xml><?xml version="1.0" encoding="utf-8"?>
+<p:sld xmlns:a="http://schemas.openxmlformats.org/drawingml/2006/main" xmlns:p="http://schemas.openxmlformats.org/presentationml/2006/main" xmlns:r="http://schemas.openxmlformats.org/officeDocument/2006/relationships">
+  <p:cSld>
+    <p:bg>
+      <p:bgPr>
+        <a:solidFill>
+          <a:srgbClr val="102127"/>
+        </a:solidFill>
+        <a:effectLst/>
+      </p:bgPr>
+    </p:bg>
+    <p:spTree>
+      <p:nvGrpSpPr>
+        <p:cNvPr id="1" name=""/>
+        <p:cNvGrpSpPr/>
+        <p:nvPr/>
+      </p:nvGrpSpPr>
+      <p:grpSpPr/>
+      <p:sp>
+        <p:nvSpPr>
+          <p:cNvPr id="2" name="TextBox 1"/>
+          <p:cNvSpPr txBox="1"/>
+          <p:nvPr/>
+        </p:nvSpPr>
+        <p:spPr>
+          <a:xfrm>
+            <a:off x="502920" y="274320"/>
+            <a:ext cx="11155680" cy="548640"/>
+          </a:xfrm>
+          <a:prstGeom prst="rect">
+            <a:avLst/>
+          </a:prstGeom>
+          <a:noFill/>
+        </p:spPr>
+        <p:txBody>
+          <a:bodyPr wrap="none">
+            <a:spAutoFit/>
+          </a:bodyPr>
+          <a:lstStyle/>
+          <a:p>
+            <a:r>
+              <a:rPr sz="2200" b="1">
+                <a:solidFill>
+                  <a:srgbClr val="01AEFD"/>
+                </a:solidFill>
+              </a:rPr>
+              <a:t>Type this into style.css   -   line 47</a:t>
+            </a:r>
+          </a:p>
+        </p:txBody>
+      </p:sp>
+      <p:sp>
+        <p:nvSpPr>
+          <p:cNvPr id="3" name="TextBox 2"/>
+          <p:cNvSpPr txBox="1"/>
+          <p:nvPr/>
+        </p:nvSpPr>
+        <p:spPr>
+          <a:xfrm>
+            <a:off x="502920" y="960120"/>
+            <a:ext cx="11155680" cy="4297680"/>
+          </a:xfrm>
+          <a:prstGeom prst="rect">
+            <a:avLst/>
+          </a:prstGeom>
+          <a:noFill/>
+        </p:spPr>
+        <p:txBody>
+          <a:bodyPr wrap="none">
+            <a:spAutoFit/>
+          </a:bodyPr>
+          <a:lstStyle/>
+          <a:p>
+            <a:pPr>
+              <a:spcAft>
+                <a:spcPts val="0"/>
+              </a:spcAft>
+            </a:pPr>
+            <a:r>
+              <a:rPr sz="1300">
+                <a:solidFill>
+                  <a:srgbClr val="6D8C97"/>
+                </a:solidFill>
+                <a:latin typeface="Consolas"/>
+              </a:rPr>
+              <a:t>  32  </a:t>
+            </a:r>
+            <a:r>
+              <a:rPr sz="1300">
+                <a:solidFill>
+                  <a:srgbClr val="6D8C97"/>
+                </a:solidFill>
+                <a:latin typeface="Consolas"/>
+              </a:rPr>
+              <a:t>.setup { margin-bottom: 12px; font-size: 14px; }</a:t>
+            </a:r>
+          </a:p>
+          <a:p>
+            <a:pPr>
+              <a:spcAft>
+                <a:spcPts val="0"/>
+              </a:spcAft>
+            </a:pPr>
+            <a:r>
+              <a:rPr sz="1300">
+                <a:solidFill>
+                  <a:srgbClr val="6D8C97"/>
+                </a:solidFill>
+                <a:latin typeface="Consolas"/>
+              </a:rPr>
+              <a:t>  33  </a:t>
+            </a:r>
+            <a:r>
+              <a:rPr sz="1300">
+                <a:solidFill>
+                  <a:srgbClr val="6D8C97"/>
+                </a:solidFill>
+                <a:latin typeface="Consolas"/>
+              </a:rPr>
+              <a:t>.setup summary { cursor: pointer; color: #0a6299; font-weight: bold; }</a:t>
+            </a:r>
+          </a:p>
+          <a:p>
+            <a:pPr>
+              <a:spcAft>
+                <a:spcPts val="0"/>
+              </a:spcAft>
+            </a:pPr>
+            <a:r>
+              <a:rPr sz="1300">
+                <a:solidFill>
+                  <a:srgbClr val="6D8C97"/>
+                </a:solidFill>
+                <a:latin typeface="Consolas"/>
+              </a:rPr>
+              <a:t>  34  </a:t>
+            </a:r>
+            <a:r>
+              <a:rPr sz="1300">
+                <a:solidFill>
+                  <a:srgbClr val="6D8C97"/>
+                </a:solidFill>
+                <a:latin typeface="Consolas"/>
+              </a:rPr>
+              <a:t>.setup textarea {</a:t>
+            </a:r>
+          </a:p>
+          <a:p>
+            <a:pPr>
+              <a:spcAft>
+                <a:spcPts val="0"/>
+              </a:spcAft>
+            </a:pPr>
+            <a:r>
+              <a:rPr sz="1300">
+                <a:solidFill>
+                  <a:srgbClr val="6D8C97"/>
+                </a:solidFill>
+                <a:latin typeface="Consolas"/>
+              </a:rPr>
+              <a:t>  35  </a:t>
+            </a:r>
+            <a:r>
+              <a:rPr sz="1300">
+                <a:solidFill>
+                  <a:srgbClr val="6D8C97"/>
+                </a:solidFill>
+                <a:latin typeface="Consolas"/>
+              </a:rPr>
+              <a:t>  width: 100%;</a:t>
+            </a:r>
+          </a:p>
+          <a:p>
+            <a:pPr>
+              <a:spcAft>
+                <a:spcPts val="0"/>
+              </a:spcAft>
+            </a:pPr>
+            <a:r>
+              <a:rPr sz="1300">
+                <a:solidFill>
+                  <a:srgbClr val="6D8C97"/>
+                </a:solidFill>
+                <a:latin typeface="Consolas"/>
+              </a:rPr>
+              <a:t>  36  </a:t>
+            </a:r>
+            <a:r>
+              <a:rPr sz="1300">
+                <a:solidFill>
+                  <a:srgbClr val="6D8C97"/>
+                </a:solidFill>
+                <a:latin typeface="Consolas"/>
+              </a:rPr>
+              <a:t>  margin-top: 8px;</a:t>
+            </a:r>
+          </a:p>
+          <a:p>
+            <a:pPr>
+              <a:spcAft>
+                <a:spcPts val="0"/>
+              </a:spcAft>
+            </a:pPr>
+            <a:r>
+              <a:rPr sz="1300">
+                <a:solidFill>
+                  <a:srgbClr val="6D8C97"/>
+                </a:solidFill>
+                <a:latin typeface="Consolas"/>
+              </a:rPr>
+              <a:t>  37  </a:t>
+            </a:r>
+            <a:r>
+              <a:rPr sz="1300">
+                <a:solidFill>
+                  <a:srgbClr val="6D8C97"/>
+                </a:solidFill>
+                <a:latin typeface="Consolas"/>
+              </a:rPr>
+              <a:t>  padding: 9px;</a:t>
+            </a:r>
+          </a:p>
+          <a:p>
+            <a:pPr>
+              <a:spcAft>
+                <a:spcPts val="0"/>
+              </a:spcAft>
+            </a:pPr>
+            <a:r>
+              <a:rPr sz="1300">
+                <a:solidFill>
+                  <a:srgbClr val="6D8C97"/>
+                </a:solidFill>
+                <a:latin typeface="Consolas"/>
+              </a:rPr>
+              <a:t>  38  </a:t>
+            </a:r>
+            <a:r>
+              <a:rPr sz="1300">
+                <a:solidFill>
+                  <a:srgbClr val="6D8C97"/>
+                </a:solidFill>
+                <a:latin typeface="Consolas"/>
+              </a:rPr>
+              <a:t>  border: 1px solid #dbe3ec;</a:t>
+            </a:r>
+          </a:p>
+          <a:p>
+            <a:pPr>
+              <a:spcAft>
+                <a:spcPts val="0"/>
+              </a:spcAft>
+            </a:pPr>
+            <a:r>
+              <a:rPr sz="1300">
+                <a:solidFill>
+                  <a:srgbClr val="6D8C97"/>
+                </a:solidFill>
+                <a:latin typeface="Consolas"/>
+              </a:rPr>
+              <a:t>  39  </a:t>
+            </a:r>
+            <a:r>
+              <a:rPr sz="1300">
+                <a:solidFill>
+                  <a:srgbClr val="6D8C97"/>
+                </a:solidFill>
+                <a:latin typeface="Consolas"/>
+              </a:rPr>
+              <a:t>  border-radius: 6px;</a:t>
+            </a:r>
+          </a:p>
+          <a:p>
+            <a:pPr>
+              <a:spcAft>
+                <a:spcPts val="0"/>
+              </a:spcAft>
+            </a:pPr>
+            <a:r>
+              <a:rPr sz="1300">
+                <a:solidFill>
+                  <a:srgbClr val="6D8C97"/>
+                </a:solidFill>
+                <a:latin typeface="Consolas"/>
+              </a:rPr>
+              <a:t>  40  </a:t>
+            </a:r>
+            <a:r>
+              <a:rPr sz="1300">
+                <a:solidFill>
+                  <a:srgbClr val="6D8C97"/>
+                </a:solidFill>
+                <a:latin typeface="Consolas"/>
+              </a:rPr>
+              <a:t>  font-family: inherit;</a:t>
+            </a:r>
+          </a:p>
+          <a:p>
+            <a:pPr>
+              <a:spcAft>
+                <a:spcPts val="0"/>
+              </a:spcAft>
+            </a:pPr>
+            <a:r>
+              <a:rPr sz="1300">
+                <a:solidFill>
+                  <a:srgbClr val="6D8C97"/>
+                </a:solidFill>
+                <a:latin typeface="Consolas"/>
+              </a:rPr>
+              <a:t>  41  </a:t>
+            </a:r>
+            <a:r>
+              <a:rPr sz="1300">
+                <a:solidFill>
+                  <a:srgbClr val="6D8C97"/>
+                </a:solidFill>
+                <a:latin typeface="Consolas"/>
+              </a:rPr>
+              <a:t>  font-size: 14px;</a:t>
+            </a:r>
+          </a:p>
+          <a:p>
+            <a:pPr>
+              <a:spcAft>
+                <a:spcPts val="0"/>
+              </a:spcAft>
+            </a:pPr>
+            <a:r>
+              <a:rPr sz="1300">
+                <a:solidFill>
+                  <a:srgbClr val="6D8C97"/>
+                </a:solidFill>
+                <a:latin typeface="Consolas"/>
+              </a:rPr>
+              <a:t>  42  </a:t>
+            </a:r>
+            <a:r>
+              <a:rPr sz="1300">
+                <a:solidFill>
+                  <a:srgbClr val="6D8C97"/>
+                </a:solidFill>
+                <a:latin typeface="Consolas"/>
+              </a:rPr>
+              <a:t>}</a:t>
+            </a:r>
+          </a:p>
+          <a:p>
+            <a:pPr>
+              <a:spcAft>
+                <a:spcPts val="0"/>
+              </a:spcAft>
+            </a:pPr>
+            <a:r>
+              <a:rPr sz="1300">
+                <a:solidFill>
+                  <a:srgbClr val="6D8C97"/>
+                </a:solidFill>
+                <a:latin typeface="Consolas"/>
+              </a:rPr>
+              <a:t>  43  </a:t>
+            </a:r>
+            <a:r>
+              <a:rPr sz="1300">
+                <a:solidFill>
+                  <a:srgbClr val="6D8C97"/>
+                </a:solidFill>
+                <a:latin typeface="Consolas"/>
+              </a:rPr>
+              <a:t>.credits {</a:t>
+            </a:r>
+          </a:p>
+          <a:p>
+            <a:pPr>
+              <a:spcAft>
+                <a:spcPts val="0"/>
+              </a:spcAft>
+            </a:pPr>
+            <a:r>
+              <a:rPr sz="1300">
+                <a:solidFill>
+                  <a:srgbClr val="6D8C97"/>
+                </a:solidFill>
+                <a:latin typeface="Consolas"/>
+              </a:rPr>
+              <a:t>  44  </a:t>
+            </a:r>
+            <a:r>
+              <a:rPr sz="1300">
+                <a:solidFill>
+                  <a:srgbClr val="6D8C97"/>
+                </a:solidFill>
+                <a:latin typeface="Consolas"/>
+              </a:rPr>
+              <a:t>  margin-top: 22px;</a:t>
+            </a:r>
+          </a:p>
+          <a:p>
+            <a:pPr>
+              <a:spcAft>
+                <a:spcPts val="0"/>
+              </a:spcAft>
+            </a:pPr>
+            <a:r>
+              <a:rPr sz="1300">
+                <a:solidFill>
+                  <a:srgbClr val="6D8C97"/>
+                </a:solidFill>
+                <a:latin typeface="Consolas"/>
+              </a:rPr>
+              <a:t>  45  </a:t>
+            </a:r>
+            <a:r>
+              <a:rPr sz="1300">
+                <a:solidFill>
+                  <a:srgbClr val="6D8C97"/>
+                </a:solidFill>
+                <a:latin typeface="Consolas"/>
+              </a:rPr>
+              <a:t>  padding-top: 14px;</a:t>
+            </a:r>
+          </a:p>
+          <a:p>
+            <a:pPr>
+              <a:spcAft>
+                <a:spcPts val="0"/>
+              </a:spcAft>
+            </a:pPr>
+            <a:r>
+              <a:rPr sz="1300">
+                <a:solidFill>
+                  <a:srgbClr val="6D8C97"/>
+                </a:solidFill>
+                <a:latin typeface="Consolas"/>
+              </a:rPr>
+              <a:t>  46  </a:t>
+            </a:r>
+            <a:r>
+              <a:rPr sz="1300">
+                <a:solidFill>
+                  <a:srgbClr val="6D8C97"/>
+                </a:solidFill>
+                <a:latin typeface="Consolas"/>
+              </a:rPr>
+              <a:t>  border-top: 1px solid #dbe3ec;</a:t>
+            </a:r>
+          </a:p>
+          <a:p>
+            <a:pPr>
+              <a:spcAft>
+                <a:spcPts val="0"/>
+              </a:spcAft>
+            </a:pPr>
+            <a:r>
+              <a:rPr sz="1300">
+                <a:solidFill>
+                  <a:srgbClr val="6D8C97"/>
+                </a:solidFill>
+                <a:latin typeface="Consolas"/>
+              </a:rPr>
+              <a:t>  47  </a:t>
+            </a:r>
+            <a:r>
+              <a:rPr sz="1300">
+                <a:solidFill>
+                  <a:srgbClr val="7FE0A0"/>
+                </a:solidFill>
+                <a:latin typeface="Consolas"/>
+              </a:rPr>
+              <a:t>  color: #6b7787;</a:t>
+            </a:r>
+          </a:p>
+        </p:txBody>
+      </p:sp>
+      <p:sp>
+        <p:nvSpPr>
+          <p:cNvPr id="4" name="TextBox 3"/>
+          <p:cNvSpPr txBox="1"/>
+          <p:nvPr/>
+        </p:nvSpPr>
+        <p:spPr>
+          <a:xfrm>
+            <a:off x="548640" y="5623560"/>
+            <a:ext cx="11064240" cy="1051560"/>
+          </a:xfrm>
+          <a:prstGeom prst="rect">
+            <a:avLst/>
+          </a:prstGeom>
+          <a:noFill/>
+        </p:spPr>
+        <p:txBody>
+          <a:bodyPr wrap="square">
+            <a:spAutoFit/>
+          </a:bodyPr>
+          <a:lstStyle/>
+          <a:p>
+            <a:r>
+              <a:rPr sz="2000">
+                <a:solidFill>
+                  <a:srgbClr val="DCECEF"/>
+                </a:solidFill>
+              </a:rPr>
+              <a:t>Muted grey text.</a:t>
+            </a:r>
+          </a:p>
+        </p:txBody>
+      </p:sp>
+    </p:spTree>
+  </p:cSld>
+  <p:clrMapOvr>
+    <a:masterClrMapping/>
+  </p:clrMapOvr>
+</p:sld>
+</file>
+
+<file path=ppt/slides/slide18.xml><?xml version="1.0" encoding="utf-8"?>
+<p:sld xmlns:a="http://schemas.openxmlformats.org/drawingml/2006/main" xmlns:p="http://schemas.openxmlformats.org/presentationml/2006/main" xmlns:r="http://schemas.openxmlformats.org/officeDocument/2006/relationships">
+  <p:cSld>
+    <p:bg>
+      <p:bgPr>
+        <a:solidFill>
+          <a:srgbClr val="102127"/>
+        </a:solidFill>
+        <a:effectLst/>
+      </p:bgPr>
+    </p:bg>
+    <p:spTree>
+      <p:nvGrpSpPr>
+        <p:cNvPr id="1" name=""/>
+        <p:cNvGrpSpPr/>
+        <p:nvPr/>
+      </p:nvGrpSpPr>
+      <p:grpSpPr/>
+      <p:sp>
+        <p:nvSpPr>
+          <p:cNvPr id="2" name="TextBox 1"/>
+          <p:cNvSpPr txBox="1"/>
+          <p:nvPr/>
+        </p:nvSpPr>
+        <p:spPr>
+          <a:xfrm>
+            <a:off x="502920" y="274320"/>
+            <a:ext cx="11155680" cy="548640"/>
+          </a:xfrm>
+          <a:prstGeom prst="rect">
+            <a:avLst/>
+          </a:prstGeom>
+          <a:noFill/>
+        </p:spPr>
+        <p:txBody>
+          <a:bodyPr wrap="none">
+            <a:spAutoFit/>
+          </a:bodyPr>
+          <a:lstStyle/>
+          <a:p>
+            <a:r>
+              <a:rPr sz="2200" b="1">
+                <a:solidFill>
+                  <a:srgbClr val="01AEFD"/>
+                </a:solidFill>
+              </a:rPr>
+              <a:t>Type this into style.css   -   line 48</a:t>
+            </a:r>
+          </a:p>
+        </p:txBody>
+      </p:sp>
+      <p:sp>
+        <p:nvSpPr>
+          <p:cNvPr id="3" name="TextBox 2"/>
+          <p:cNvSpPr txBox="1"/>
+          <p:nvPr/>
+        </p:nvSpPr>
+        <p:spPr>
+          <a:xfrm>
+            <a:off x="502920" y="960120"/>
+            <a:ext cx="11155680" cy="4297680"/>
+          </a:xfrm>
+          <a:prstGeom prst="rect">
+            <a:avLst/>
+          </a:prstGeom>
+          <a:noFill/>
+        </p:spPr>
+        <p:txBody>
+          <a:bodyPr wrap="none">
+            <a:spAutoFit/>
+          </a:bodyPr>
+          <a:lstStyle/>
+          <a:p>
+            <a:pPr>
+              <a:spcAft>
+                <a:spcPts val="0"/>
+              </a:spcAft>
+            </a:pPr>
+            <a:r>
+              <a:rPr sz="1300">
+                <a:solidFill>
+                  <a:srgbClr val="6D8C97"/>
+                </a:solidFill>
+                <a:latin typeface="Consolas"/>
+              </a:rPr>
+              <a:t>  32  </a:t>
+            </a:r>
+            <a:r>
+              <a:rPr sz="1300">
+                <a:solidFill>
+                  <a:srgbClr val="6D8C97"/>
+                </a:solidFill>
+                <a:latin typeface="Consolas"/>
+              </a:rPr>
+              <a:t>.setup { margin-bottom: 12px; font-size: 14px; }</a:t>
+            </a:r>
+          </a:p>
+          <a:p>
+            <a:pPr>
+              <a:spcAft>
+                <a:spcPts val="0"/>
+              </a:spcAft>
+            </a:pPr>
+            <a:r>
+              <a:rPr sz="1300">
+                <a:solidFill>
+                  <a:srgbClr val="6D8C97"/>
+                </a:solidFill>
+                <a:latin typeface="Consolas"/>
+              </a:rPr>
+              <a:t>  33  </a:t>
+            </a:r>
+            <a:r>
+              <a:rPr sz="1300">
+                <a:solidFill>
+                  <a:srgbClr val="6D8C97"/>
+                </a:solidFill>
+                <a:latin typeface="Consolas"/>
+              </a:rPr>
+              <a:t>.setup summary { cursor: pointer; color: #0a6299; font-weight: bold; }</a:t>
+            </a:r>
+          </a:p>
+          <a:p>
+            <a:pPr>
+              <a:spcAft>
+                <a:spcPts val="0"/>
+              </a:spcAft>
+            </a:pPr>
+            <a:r>
+              <a:rPr sz="1300">
+                <a:solidFill>
+                  <a:srgbClr val="6D8C97"/>
+                </a:solidFill>
+                <a:latin typeface="Consolas"/>
+              </a:rPr>
+              <a:t>  34  </a:t>
+            </a:r>
+            <a:r>
+              <a:rPr sz="1300">
+                <a:solidFill>
+                  <a:srgbClr val="6D8C97"/>
+                </a:solidFill>
+                <a:latin typeface="Consolas"/>
+              </a:rPr>
+              <a:t>.setup textarea {</a:t>
+            </a:r>
+          </a:p>
+          <a:p>
+            <a:pPr>
+              <a:spcAft>
+                <a:spcPts val="0"/>
+              </a:spcAft>
+            </a:pPr>
+            <a:r>
+              <a:rPr sz="1300">
+                <a:solidFill>
+                  <a:srgbClr val="6D8C97"/>
+                </a:solidFill>
+                <a:latin typeface="Consolas"/>
+              </a:rPr>
+              <a:t>  35  </a:t>
+            </a:r>
+            <a:r>
+              <a:rPr sz="1300">
+                <a:solidFill>
+                  <a:srgbClr val="6D8C97"/>
+                </a:solidFill>
+                <a:latin typeface="Consolas"/>
+              </a:rPr>
+              <a:t>  width: 100%;</a:t>
+            </a:r>
+          </a:p>
+          <a:p>
+            <a:pPr>
+              <a:spcAft>
+                <a:spcPts val="0"/>
+              </a:spcAft>
+            </a:pPr>
+            <a:r>
+              <a:rPr sz="1300">
+                <a:solidFill>
+                  <a:srgbClr val="6D8C97"/>
+                </a:solidFill>
+                <a:latin typeface="Consolas"/>
+              </a:rPr>
+              <a:t>  36  </a:t>
+            </a:r>
+            <a:r>
+              <a:rPr sz="1300">
+                <a:solidFill>
+                  <a:srgbClr val="6D8C97"/>
+                </a:solidFill>
+                <a:latin typeface="Consolas"/>
+              </a:rPr>
+              <a:t>  margin-top: 8px;</a:t>
+            </a:r>
+          </a:p>
+          <a:p>
+            <a:pPr>
+              <a:spcAft>
+                <a:spcPts val="0"/>
+              </a:spcAft>
+            </a:pPr>
+            <a:r>
+              <a:rPr sz="1300">
+                <a:solidFill>
+                  <a:srgbClr val="6D8C97"/>
+                </a:solidFill>
+                <a:latin typeface="Consolas"/>
+              </a:rPr>
+              <a:t>  37  </a:t>
+            </a:r>
+            <a:r>
+              <a:rPr sz="1300">
+                <a:solidFill>
+                  <a:srgbClr val="6D8C97"/>
+                </a:solidFill>
+                <a:latin typeface="Consolas"/>
+              </a:rPr>
+              <a:t>  padding: 9px;</a:t>
+            </a:r>
+          </a:p>
+          <a:p>
+            <a:pPr>
+              <a:spcAft>
+                <a:spcPts val="0"/>
+              </a:spcAft>
+            </a:pPr>
+            <a:r>
+              <a:rPr sz="1300">
+                <a:solidFill>
+                  <a:srgbClr val="6D8C97"/>
+                </a:solidFill>
+                <a:latin typeface="Consolas"/>
+              </a:rPr>
+              <a:t>  38  </a:t>
+            </a:r>
+            <a:r>
+              <a:rPr sz="1300">
+                <a:solidFill>
+                  <a:srgbClr val="6D8C97"/>
+                </a:solidFill>
+                <a:latin typeface="Consolas"/>
+              </a:rPr>
+              <a:t>  border: 1px solid #dbe3ec;</a:t>
+            </a:r>
+          </a:p>
+          <a:p>
+            <a:pPr>
+              <a:spcAft>
+                <a:spcPts val="0"/>
+              </a:spcAft>
+            </a:pPr>
+            <a:r>
+              <a:rPr sz="1300">
+                <a:solidFill>
+                  <a:srgbClr val="6D8C97"/>
+                </a:solidFill>
+                <a:latin typeface="Consolas"/>
+              </a:rPr>
+              <a:t>  39  </a:t>
+            </a:r>
+            <a:r>
+              <a:rPr sz="1300">
+                <a:solidFill>
+                  <a:srgbClr val="6D8C97"/>
+                </a:solidFill>
+                <a:latin typeface="Consolas"/>
+              </a:rPr>
+              <a:t>  border-radius: 6px;</a:t>
+            </a:r>
+          </a:p>
+          <a:p>
+            <a:pPr>
+              <a:spcAft>
+                <a:spcPts val="0"/>
+              </a:spcAft>
+            </a:pPr>
+            <a:r>
+              <a:rPr sz="1300">
+                <a:solidFill>
+                  <a:srgbClr val="6D8C97"/>
+                </a:solidFill>
+                <a:latin typeface="Consolas"/>
+              </a:rPr>
+              <a:t>  40  </a:t>
+            </a:r>
+            <a:r>
+              <a:rPr sz="1300">
+                <a:solidFill>
+                  <a:srgbClr val="6D8C97"/>
+                </a:solidFill>
+                <a:latin typeface="Consolas"/>
+              </a:rPr>
+              <a:t>  font-family: inherit;</a:t>
+            </a:r>
+          </a:p>
+          <a:p>
+            <a:pPr>
+              <a:spcAft>
+                <a:spcPts val="0"/>
+              </a:spcAft>
+            </a:pPr>
+            <a:r>
+              <a:rPr sz="1300">
+                <a:solidFill>
+                  <a:srgbClr val="6D8C97"/>
+                </a:solidFill>
+                <a:latin typeface="Consolas"/>
+              </a:rPr>
+              <a:t>  41  </a:t>
+            </a:r>
+            <a:r>
+              <a:rPr sz="1300">
+                <a:solidFill>
+                  <a:srgbClr val="6D8C97"/>
+                </a:solidFill>
+                <a:latin typeface="Consolas"/>
+              </a:rPr>
+              <a:t>  font-size: 14px;</a:t>
+            </a:r>
+          </a:p>
+          <a:p>
+            <a:pPr>
+              <a:spcAft>
+                <a:spcPts val="0"/>
+              </a:spcAft>
+            </a:pPr>
+            <a:r>
+              <a:rPr sz="1300">
+                <a:solidFill>
+                  <a:srgbClr val="6D8C97"/>
+                </a:solidFill>
+                <a:latin typeface="Consolas"/>
+              </a:rPr>
+              <a:t>  42  </a:t>
+            </a:r>
+            <a:r>
+              <a:rPr sz="1300">
+                <a:solidFill>
+                  <a:srgbClr val="6D8C97"/>
+                </a:solidFill>
+                <a:latin typeface="Consolas"/>
+              </a:rPr>
+              <a:t>}</a:t>
+            </a:r>
+          </a:p>
+          <a:p>
+            <a:pPr>
+              <a:spcAft>
+                <a:spcPts val="0"/>
+              </a:spcAft>
+            </a:pPr>
+            <a:r>
+              <a:rPr sz="1300">
+                <a:solidFill>
+                  <a:srgbClr val="6D8C97"/>
+                </a:solidFill>
+                <a:latin typeface="Consolas"/>
+              </a:rPr>
+              <a:t>  43  </a:t>
+            </a:r>
+            <a:r>
+              <a:rPr sz="1300">
+                <a:solidFill>
+                  <a:srgbClr val="6D8C97"/>
+                </a:solidFill>
+                <a:latin typeface="Consolas"/>
+              </a:rPr>
+              <a:t>.credits {</a:t>
+            </a:r>
+          </a:p>
+          <a:p>
+            <a:pPr>
+              <a:spcAft>
+                <a:spcPts val="0"/>
+              </a:spcAft>
+            </a:pPr>
+            <a:r>
+              <a:rPr sz="1300">
+                <a:solidFill>
+                  <a:srgbClr val="6D8C97"/>
+                </a:solidFill>
+                <a:latin typeface="Consolas"/>
+              </a:rPr>
+              <a:t>  44  </a:t>
+            </a:r>
+            <a:r>
+              <a:rPr sz="1300">
+                <a:solidFill>
+                  <a:srgbClr val="6D8C97"/>
+                </a:solidFill>
+                <a:latin typeface="Consolas"/>
+              </a:rPr>
+              <a:t>  margin-top: 22px;</a:t>
+            </a:r>
+          </a:p>
+          <a:p>
+            <a:pPr>
+              <a:spcAft>
+                <a:spcPts val="0"/>
+              </a:spcAft>
+            </a:pPr>
+            <a:r>
+              <a:rPr sz="1300">
+                <a:solidFill>
+                  <a:srgbClr val="6D8C97"/>
+                </a:solidFill>
+                <a:latin typeface="Consolas"/>
+              </a:rPr>
+              <a:t>  45  </a:t>
+            </a:r>
+            <a:r>
+              <a:rPr sz="1300">
+                <a:solidFill>
+                  <a:srgbClr val="6D8C97"/>
+                </a:solidFill>
+                <a:latin typeface="Consolas"/>
+              </a:rPr>
+              <a:t>  padding-top: 14px;</a:t>
+            </a:r>
+          </a:p>
+          <a:p>
+            <a:pPr>
+              <a:spcAft>
+                <a:spcPts val="0"/>
+              </a:spcAft>
+            </a:pPr>
+            <a:r>
+              <a:rPr sz="1300">
+                <a:solidFill>
+                  <a:srgbClr val="6D8C97"/>
+                </a:solidFill>
+                <a:latin typeface="Consolas"/>
+              </a:rPr>
+              <a:t>  46  </a:t>
+            </a:r>
+            <a:r>
+              <a:rPr sz="1300">
+                <a:solidFill>
+                  <a:srgbClr val="6D8C97"/>
+                </a:solidFill>
+                <a:latin typeface="Consolas"/>
+              </a:rPr>
+              <a:t>  border-top: 1px solid #dbe3ec;</a:t>
+            </a:r>
+          </a:p>
+          <a:p>
+            <a:pPr>
+              <a:spcAft>
+                <a:spcPts val="0"/>
+              </a:spcAft>
+            </a:pPr>
+            <a:r>
+              <a:rPr sz="1300">
+                <a:solidFill>
+                  <a:srgbClr val="6D8C97"/>
+                </a:solidFill>
+                <a:latin typeface="Consolas"/>
+              </a:rPr>
+              <a:t>  47  </a:t>
+            </a:r>
+            <a:r>
+              <a:rPr sz="1300">
+                <a:solidFill>
+                  <a:srgbClr val="6D8C97"/>
+                </a:solidFill>
+                <a:latin typeface="Consolas"/>
+              </a:rPr>
+              <a:t>  color: #6b7787;</a:t>
+            </a:r>
+          </a:p>
+          <a:p>
+            <a:pPr>
+              <a:spcAft>
+                <a:spcPts val="0"/>
+              </a:spcAft>
+            </a:pPr>
+            <a:r>
+              <a:rPr sz="1300">
+                <a:solidFill>
+                  <a:srgbClr val="6D8C97"/>
+                </a:solidFill>
+                <a:latin typeface="Consolas"/>
+              </a:rPr>
+              <a:t>  48  </a:t>
+            </a:r>
+            <a:r>
+              <a:rPr sz="1300">
+                <a:solidFill>
+                  <a:srgbClr val="7FE0A0"/>
+                </a:solidFill>
+                <a:latin typeface="Consolas"/>
+              </a:rPr>
+              <a:t>  font-size: 12px;</a:t>
+            </a:r>
+          </a:p>
+        </p:txBody>
+      </p:sp>
+      <p:sp>
+        <p:nvSpPr>
+          <p:cNvPr id="4" name="TextBox 3"/>
+          <p:cNvSpPr txBox="1"/>
+          <p:nvPr/>
+        </p:nvSpPr>
+        <p:spPr>
+          <a:xfrm>
+            <a:off x="548640" y="5623560"/>
+            <a:ext cx="11064240" cy="1051560"/>
+          </a:xfrm>
+          <a:prstGeom prst="rect">
+            <a:avLst/>
+          </a:prstGeom>
+          <a:noFill/>
+        </p:spPr>
+        <p:txBody>
+          <a:bodyPr wrap="square">
+            <a:spAutoFit/>
+          </a:bodyPr>
+          <a:lstStyle/>
+          <a:p>
+            <a:r>
+              <a:rPr sz="2000">
+                <a:solidFill>
+                  <a:srgbClr val="DCECEF"/>
+                </a:solidFill>
+              </a:rPr>
+              <a:t>Small print.</a:t>
+            </a:r>
+          </a:p>
+        </p:txBody>
+      </p:sp>
+    </p:spTree>
+  </p:cSld>
+  <p:clrMapOvr>
+    <a:masterClrMapping/>
+  </p:clrMapOvr>
+</p:sld>
+</file>
+
+<file path=ppt/slides/slide19.xml><?xml version="1.0" encoding="utf-8"?>
+<p:sld xmlns:a="http://schemas.openxmlformats.org/drawingml/2006/main" xmlns:p="http://schemas.openxmlformats.org/presentationml/2006/main" xmlns:r="http://schemas.openxmlformats.org/officeDocument/2006/relationships">
+  <p:cSld>
+    <p:bg>
+      <p:bgPr>
+        <a:solidFill>
+          <a:srgbClr val="102127"/>
+        </a:solidFill>
+        <a:effectLst/>
+      </p:bgPr>
+    </p:bg>
+    <p:spTree>
+      <p:nvGrpSpPr>
+        <p:cNvPr id="1" name=""/>
+        <p:cNvGrpSpPr/>
+        <p:nvPr/>
+      </p:nvGrpSpPr>
+      <p:grpSpPr/>
+      <p:sp>
+        <p:nvSpPr>
+          <p:cNvPr id="2" name="TextBox 1"/>
+          <p:cNvSpPr txBox="1"/>
+          <p:nvPr/>
+        </p:nvSpPr>
+        <p:spPr>
+          <a:xfrm>
+            <a:off x="502920" y="274320"/>
+            <a:ext cx="11155680" cy="548640"/>
+          </a:xfrm>
+          <a:prstGeom prst="rect">
+            <a:avLst/>
+          </a:prstGeom>
+          <a:noFill/>
+        </p:spPr>
+        <p:txBody>
+          <a:bodyPr wrap="none">
+            <a:spAutoFit/>
+          </a:bodyPr>
+          <a:lstStyle/>
+          <a:p>
+            <a:r>
+              <a:rPr sz="2200" b="1">
+                <a:solidFill>
+                  <a:srgbClr val="01AEFD"/>
+                </a:solidFill>
+              </a:rPr>
+              <a:t>Type this into style.css   -   line 49</a:t>
+            </a:r>
+          </a:p>
+        </p:txBody>
+      </p:sp>
+      <p:sp>
+        <p:nvSpPr>
+          <p:cNvPr id="3" name="TextBox 2"/>
+          <p:cNvSpPr txBox="1"/>
+          <p:nvPr/>
+        </p:nvSpPr>
+        <p:spPr>
+          <a:xfrm>
+            <a:off x="502920" y="960120"/>
+            <a:ext cx="11155680" cy="4297680"/>
+          </a:xfrm>
+          <a:prstGeom prst="rect">
+            <a:avLst/>
+          </a:prstGeom>
+          <a:noFill/>
+        </p:spPr>
+        <p:txBody>
+          <a:bodyPr wrap="none">
+            <a:spAutoFit/>
+          </a:bodyPr>
+          <a:lstStyle/>
+          <a:p>
+            <a:pPr>
+              <a:spcAft>
+                <a:spcPts val="0"/>
+              </a:spcAft>
+            </a:pPr>
+            <a:r>
+              <a:rPr sz="1300">
+                <a:solidFill>
+                  <a:srgbClr val="6D8C97"/>
+                </a:solidFill>
+                <a:latin typeface="Consolas"/>
+              </a:rPr>
+              <a:t>  32  </a:t>
+            </a:r>
+            <a:r>
+              <a:rPr sz="1300">
+                <a:solidFill>
+                  <a:srgbClr val="6D8C97"/>
+                </a:solidFill>
+                <a:latin typeface="Consolas"/>
+              </a:rPr>
+              <a:t>.setup { margin-bottom: 12px; font-size: 14px; }</a:t>
+            </a:r>
+          </a:p>
+          <a:p>
+            <a:pPr>
+              <a:spcAft>
+                <a:spcPts val="0"/>
+              </a:spcAft>
+            </a:pPr>
+            <a:r>
+              <a:rPr sz="1300">
+                <a:solidFill>
+                  <a:srgbClr val="6D8C97"/>
+                </a:solidFill>
+                <a:latin typeface="Consolas"/>
+              </a:rPr>
+              <a:t>  33  </a:t>
+            </a:r>
+            <a:r>
+              <a:rPr sz="1300">
+                <a:solidFill>
+                  <a:srgbClr val="6D8C97"/>
+                </a:solidFill>
+                <a:latin typeface="Consolas"/>
+              </a:rPr>
+              <a:t>.setup summary { cursor: pointer; color: #0a6299; font-weight: bold; }</a:t>
+            </a:r>
+          </a:p>
+          <a:p>
+            <a:pPr>
+              <a:spcAft>
+                <a:spcPts val="0"/>
+              </a:spcAft>
+            </a:pPr>
+            <a:r>
+              <a:rPr sz="1300">
+                <a:solidFill>
+                  <a:srgbClr val="6D8C97"/>
+                </a:solidFill>
+                <a:latin typeface="Consolas"/>
+              </a:rPr>
+              <a:t>  34  </a:t>
+            </a:r>
+            <a:r>
+              <a:rPr sz="1300">
+                <a:solidFill>
+                  <a:srgbClr val="6D8C97"/>
+                </a:solidFill>
+                <a:latin typeface="Consolas"/>
+              </a:rPr>
+              <a:t>.setup textarea {</a:t>
+            </a:r>
+          </a:p>
+          <a:p>
+            <a:pPr>
+              <a:spcAft>
+                <a:spcPts val="0"/>
+              </a:spcAft>
+            </a:pPr>
+            <a:r>
+              <a:rPr sz="1300">
+                <a:solidFill>
+                  <a:srgbClr val="6D8C97"/>
+                </a:solidFill>
+                <a:latin typeface="Consolas"/>
+              </a:rPr>
+              <a:t>  35  </a:t>
+            </a:r>
+            <a:r>
+              <a:rPr sz="1300">
+                <a:solidFill>
+                  <a:srgbClr val="6D8C97"/>
+                </a:solidFill>
+                <a:latin typeface="Consolas"/>
+              </a:rPr>
+              <a:t>  width: 100%;</a:t>
+            </a:r>
+          </a:p>
+          <a:p>
+            <a:pPr>
+              <a:spcAft>
+                <a:spcPts val="0"/>
+              </a:spcAft>
+            </a:pPr>
+            <a:r>
+              <a:rPr sz="1300">
+                <a:solidFill>
+                  <a:srgbClr val="6D8C97"/>
+                </a:solidFill>
+                <a:latin typeface="Consolas"/>
+              </a:rPr>
+              <a:t>  36  </a:t>
+            </a:r>
+            <a:r>
+              <a:rPr sz="1300">
+                <a:solidFill>
+                  <a:srgbClr val="6D8C97"/>
+                </a:solidFill>
+                <a:latin typeface="Consolas"/>
+              </a:rPr>
+              <a:t>  margin-top: 8px;</a:t>
+            </a:r>
+          </a:p>
+          <a:p>
+            <a:pPr>
+              <a:spcAft>
+                <a:spcPts val="0"/>
+              </a:spcAft>
+            </a:pPr>
+            <a:r>
+              <a:rPr sz="1300">
+                <a:solidFill>
+                  <a:srgbClr val="6D8C97"/>
+                </a:solidFill>
+                <a:latin typeface="Consolas"/>
+              </a:rPr>
+              <a:t>  37  </a:t>
+            </a:r>
+            <a:r>
+              <a:rPr sz="1300">
+                <a:solidFill>
+                  <a:srgbClr val="6D8C97"/>
+                </a:solidFill>
+                <a:latin typeface="Consolas"/>
+              </a:rPr>
+              <a:t>  padding: 9px;</a:t>
+            </a:r>
+          </a:p>
+          <a:p>
+            <a:pPr>
+              <a:spcAft>
+                <a:spcPts val="0"/>
+              </a:spcAft>
+            </a:pPr>
+            <a:r>
+              <a:rPr sz="1300">
+                <a:solidFill>
+                  <a:srgbClr val="6D8C97"/>
+                </a:solidFill>
+                <a:latin typeface="Consolas"/>
+              </a:rPr>
+              <a:t>  38  </a:t>
+            </a:r>
+            <a:r>
+              <a:rPr sz="1300">
+                <a:solidFill>
+                  <a:srgbClr val="6D8C97"/>
+                </a:solidFill>
+                <a:latin typeface="Consolas"/>
+              </a:rPr>
+              <a:t>  border: 1px solid #dbe3ec;</a:t>
+            </a:r>
+          </a:p>
+          <a:p>
+            <a:pPr>
+              <a:spcAft>
+                <a:spcPts val="0"/>
+              </a:spcAft>
+            </a:pPr>
+            <a:r>
+              <a:rPr sz="1300">
+                <a:solidFill>
+                  <a:srgbClr val="6D8C97"/>
+                </a:solidFill>
+                <a:latin typeface="Consolas"/>
+              </a:rPr>
+              <a:t>  39  </a:t>
+            </a:r>
+            <a:r>
+              <a:rPr sz="1300">
+                <a:solidFill>
+                  <a:srgbClr val="6D8C97"/>
+                </a:solidFill>
+                <a:latin typeface="Consolas"/>
+              </a:rPr>
+              <a:t>  border-radius: 6px;</a:t>
+            </a:r>
+          </a:p>
+          <a:p>
+            <a:pPr>
+              <a:spcAft>
+                <a:spcPts val="0"/>
+              </a:spcAft>
+            </a:pPr>
+            <a:r>
+              <a:rPr sz="1300">
+                <a:solidFill>
+                  <a:srgbClr val="6D8C97"/>
+                </a:solidFill>
+                <a:latin typeface="Consolas"/>
+              </a:rPr>
+              <a:t>  40  </a:t>
+            </a:r>
+            <a:r>
+              <a:rPr sz="1300">
+                <a:solidFill>
+                  <a:srgbClr val="6D8C97"/>
+                </a:solidFill>
+                <a:latin typeface="Consolas"/>
+              </a:rPr>
+              <a:t>  font-family: inherit;</a:t>
+            </a:r>
+          </a:p>
+          <a:p>
+            <a:pPr>
+              <a:spcAft>
+                <a:spcPts val="0"/>
+              </a:spcAft>
+            </a:pPr>
+            <a:r>
+              <a:rPr sz="1300">
+                <a:solidFill>
+                  <a:srgbClr val="6D8C97"/>
+                </a:solidFill>
+                <a:latin typeface="Consolas"/>
+              </a:rPr>
+              <a:t>  41  </a:t>
+            </a:r>
+            <a:r>
+              <a:rPr sz="1300">
+                <a:solidFill>
+                  <a:srgbClr val="6D8C97"/>
+                </a:solidFill>
+                <a:latin typeface="Consolas"/>
+              </a:rPr>
+              <a:t>  font-size: 14px;</a:t>
+            </a:r>
+          </a:p>
+          <a:p>
+            <a:pPr>
+              <a:spcAft>
+                <a:spcPts val="0"/>
+              </a:spcAft>
+            </a:pPr>
+            <a:r>
+              <a:rPr sz="1300">
+                <a:solidFill>
+                  <a:srgbClr val="6D8C97"/>
+                </a:solidFill>
+                <a:latin typeface="Consolas"/>
+              </a:rPr>
+              <a:t>  42  </a:t>
+            </a:r>
+            <a:r>
+              <a:rPr sz="1300">
+                <a:solidFill>
+                  <a:srgbClr val="6D8C97"/>
+                </a:solidFill>
+                <a:latin typeface="Consolas"/>
+              </a:rPr>
+              <a:t>}</a:t>
+            </a:r>
+          </a:p>
+          <a:p>
+            <a:pPr>
+              <a:spcAft>
+                <a:spcPts val="0"/>
+              </a:spcAft>
+            </a:pPr>
+            <a:r>
+              <a:rPr sz="1300">
+                <a:solidFill>
+                  <a:srgbClr val="6D8C97"/>
+                </a:solidFill>
+                <a:latin typeface="Consolas"/>
+              </a:rPr>
+              <a:t>  43  </a:t>
+            </a:r>
+            <a:r>
+              <a:rPr sz="1300">
+                <a:solidFill>
+                  <a:srgbClr val="6D8C97"/>
+                </a:solidFill>
+                <a:latin typeface="Consolas"/>
+              </a:rPr>
+              <a:t>.credits {</a:t>
+            </a:r>
+          </a:p>
+          <a:p>
+            <a:pPr>
+              <a:spcAft>
+                <a:spcPts val="0"/>
+              </a:spcAft>
+            </a:pPr>
+            <a:r>
+              <a:rPr sz="1300">
+                <a:solidFill>
+                  <a:srgbClr val="6D8C97"/>
+                </a:solidFill>
+                <a:latin typeface="Consolas"/>
+              </a:rPr>
+              <a:t>  44  </a:t>
+            </a:r>
+            <a:r>
+              <a:rPr sz="1300">
+                <a:solidFill>
+                  <a:srgbClr val="6D8C97"/>
+                </a:solidFill>
+                <a:latin typeface="Consolas"/>
+              </a:rPr>
+              <a:t>  margin-top: 22px;</a:t>
+            </a:r>
+          </a:p>
+          <a:p>
+            <a:pPr>
+              <a:spcAft>
+                <a:spcPts val="0"/>
+              </a:spcAft>
+            </a:pPr>
+            <a:r>
+              <a:rPr sz="1300">
+                <a:solidFill>
+                  <a:srgbClr val="6D8C97"/>
+                </a:solidFill>
+                <a:latin typeface="Consolas"/>
+              </a:rPr>
+              <a:t>  45  </a:t>
+            </a:r>
+            <a:r>
+              <a:rPr sz="1300">
+                <a:solidFill>
+                  <a:srgbClr val="6D8C97"/>
+                </a:solidFill>
+                <a:latin typeface="Consolas"/>
+              </a:rPr>
+              <a:t>  padding-top: 14px;</a:t>
+            </a:r>
+          </a:p>
+          <a:p>
+            <a:pPr>
+              <a:spcAft>
+                <a:spcPts val="0"/>
+              </a:spcAft>
+            </a:pPr>
+            <a:r>
+              <a:rPr sz="1300">
+                <a:solidFill>
+                  <a:srgbClr val="6D8C97"/>
+                </a:solidFill>
+                <a:latin typeface="Consolas"/>
+              </a:rPr>
+              <a:t>  46  </a:t>
+            </a:r>
+            <a:r>
+              <a:rPr sz="1300">
+                <a:solidFill>
+                  <a:srgbClr val="6D8C97"/>
+                </a:solidFill>
+                <a:latin typeface="Consolas"/>
+              </a:rPr>
+              <a:t>  border-top: 1px solid #dbe3ec;</a:t>
+            </a:r>
+          </a:p>
+          <a:p>
+            <a:pPr>
+              <a:spcAft>
+                <a:spcPts val="0"/>
+              </a:spcAft>
+            </a:pPr>
+            <a:r>
+              <a:rPr sz="1300">
+                <a:solidFill>
+                  <a:srgbClr val="6D8C97"/>
+                </a:solidFill>
+                <a:latin typeface="Consolas"/>
+              </a:rPr>
+              <a:t>  47  </a:t>
+            </a:r>
+            <a:r>
+              <a:rPr sz="1300">
+                <a:solidFill>
+                  <a:srgbClr val="6D8C97"/>
+                </a:solidFill>
+                <a:latin typeface="Consolas"/>
+              </a:rPr>
+              <a:t>  color: #6b7787;</a:t>
+            </a:r>
+          </a:p>
+          <a:p>
+            <a:pPr>
+              <a:spcAft>
+                <a:spcPts val="0"/>
+              </a:spcAft>
+            </a:pPr>
+            <a:r>
+              <a:rPr sz="1300">
+                <a:solidFill>
+                  <a:srgbClr val="6D8C97"/>
+                </a:solidFill>
+                <a:latin typeface="Consolas"/>
+              </a:rPr>
+              <a:t>  48  </a:t>
+            </a:r>
+            <a:r>
+              <a:rPr sz="1300">
+                <a:solidFill>
+                  <a:srgbClr val="6D8C97"/>
+                </a:solidFill>
+                <a:latin typeface="Consolas"/>
+              </a:rPr>
+              <a:t>  font-size: 12px;</a:t>
+            </a:r>
+          </a:p>
+          <a:p>
+            <a:pPr>
+              <a:spcAft>
+                <a:spcPts val="0"/>
+              </a:spcAft>
+            </a:pPr>
+            <a:r>
+              <a:rPr sz="1300">
+                <a:solidFill>
+                  <a:srgbClr val="6D8C97"/>
+                </a:solidFill>
+                <a:latin typeface="Consolas"/>
+              </a:rPr>
+              <a:t>  49  </a:t>
+            </a:r>
+            <a:r>
+              <a:rPr sz="1300">
+                <a:solidFill>
+                  <a:srgbClr val="7FE0A0"/>
+                </a:solidFill>
+                <a:latin typeface="Consolas"/>
+              </a:rPr>
+              <a:t>}</a:t>
+            </a:r>
+          </a:p>
+        </p:txBody>
+      </p:sp>
+      <p:sp>
+        <p:nvSpPr>
+          <p:cNvPr id="4" name="TextBox 3"/>
+          <p:cNvSpPr txBox="1"/>
+          <p:nvPr/>
+        </p:nvSpPr>
+        <p:spPr>
+          <a:xfrm>
+            <a:off x="548640" y="5623560"/>
+            <a:ext cx="11064240" cy="1051560"/>
+          </a:xfrm>
+          <a:prstGeom prst="rect">
+            <a:avLst/>
+          </a:prstGeom>
+          <a:noFill/>
+        </p:spPr>
+        <p:txBody>
+          <a:bodyPr wrap="square">
+            <a:spAutoFit/>
+          </a:bodyPr>
+          <a:lstStyle/>
+          <a:p>
+            <a:r>
+              <a:rPr sz="2000">
+                <a:solidFill>
+                  <a:srgbClr val="DCECEF"/>
+                </a:solidFill>
+              </a:rPr>
+              <a:t>Close the rule.</a:t>
             </a:r>
           </a:p>
         </p:txBody>
@@ -3363,134 +7177,7 @@
 </p:sld>
 </file>
 
-<file path=ppt/slides/slide3.xml><?xml version="1.0" encoding="utf-8"?>
-<p:sld xmlns:a="http://schemas.openxmlformats.org/drawingml/2006/main" xmlns:p="http://schemas.openxmlformats.org/presentationml/2006/main" xmlns:r="http://schemas.openxmlformats.org/officeDocument/2006/relationships">
-  <p:cSld>
-    <p:spTree>
-      <p:nvGrpSpPr>
-        <p:cNvPr id="1" name=""/>
-        <p:cNvGrpSpPr/>
-        <p:nvPr/>
-      </p:nvGrpSpPr>
-      <p:grpSpPr/>
-      <p:sp>
-        <p:nvSpPr>
-          <p:cNvPr id="2" name="Title 1"/>
-          <p:cNvSpPr>
-            <a:spLocks noGrp="1"/>
-          </p:cNvSpPr>
-          <p:nvPr>
-            <p:ph type="title"/>
-          </p:nvPr>
-        </p:nvSpPr>
-        <p:spPr/>
-        <p:txBody>
-          <a:bodyPr/>
-          <a:lstStyle/>
-          <a:p>
-            <a:r>
-              <a:rPr sz="3800" b="1">
-                <a:solidFill>
-                  <a:srgbClr val="1F2A37"/>
-                </a:solidFill>
-              </a:rPr>
-              <a:t>Twenty minutes to finish</a:t>
-            </a:r>
-          </a:p>
-        </p:txBody>
-      </p:sp>
-      <p:sp>
-        <p:nvSpPr>
-          <p:cNvPr id="3" name="TextBox 2"/>
-          <p:cNvSpPr txBox="1"/>
-          <p:nvPr/>
-        </p:nvSpPr>
-        <p:spPr>
-          <a:xfrm>
-            <a:off x="822960" y="1828800"/>
-            <a:ext cx="10515600" cy="4206240"/>
-          </a:xfrm>
-          <a:prstGeom prst="rect">
-            <a:avLst/>
-          </a:prstGeom>
-          <a:noFill/>
-        </p:spPr>
-        <p:txBody>
-          <a:bodyPr wrap="square">
-            <a:spAutoFit/>
-          </a:bodyPr>
-          <a:lstStyle/>
-          <a:p>
-            <a:pPr>
-              <a:spcAft>
-                <a:spcPts val="1400"/>
-              </a:spcAft>
-            </a:pPr>
-            <a:r>
-              <a:rPr sz="2800">
-                <a:solidFill>
-                  <a:srgbClr val="01AEFD"/>
-                </a:solidFill>
-              </a:rPr>
-              <a:t>No new features</a:t>
-            </a:r>
-          </a:p>
-          <a:p>
-            <a:pPr>
-              <a:spcAft>
-                <a:spcPts val="1400"/>
-              </a:spcAft>
-            </a:pPr>
-            <a:r>
-              <a:rPr sz="2400">
-                <a:solidFill>
-                  <a:srgbClr val="1F2A37"/>
-                </a:solidFill>
-              </a:rPr>
-              <a:t>• Sign the credits - put your own name in</a:t>
-            </a:r>
-          </a:p>
-          <a:p>
-            <a:pPr>
-              <a:spcAft>
-                <a:spcPts val="1400"/>
-              </a:spcAft>
-            </a:pPr>
-            <a:r>
-              <a:rPr sz="2400">
-                <a:solidFill>
-                  <a:srgbClr val="1F2A37"/>
-                </a:solidFill>
-              </a:rPr>
-              <a:t>• Fix the one annoying thing</a:t>
-            </a:r>
-          </a:p>
-          <a:p>
-            <a:pPr>
-              <a:spcAft>
-                <a:spcPts val="1400"/>
-              </a:spcAft>
-            </a:pPr>
-            <a:r>
-              <a:rPr sz="2400">
-                <a:solidFill>
-                  <a:srgbClr val="1F2A37"/>
-                </a:solidFill>
-              </a:rPr>
-              <a:t>• Make it survive a stranger</a:t>
-            </a:r>
-          </a:p>
-        </p:txBody>
-      </p:sp>
-    </p:spTree>
-  </p:cSld>
-  <p:clrMapOvr>
-    <a:masterClrMapping/>
-  </p:clrMapOvr>
-</p:sld>
-</file>
-
-<file path=ppt/slides/slide4.xml><?xml version="1.0" encoding="utf-8"?>
+<file path=ppt/slides/slide20.xml><?xml version="1.0" encoding="utf-8"?>
 <p:sld xmlns:a="http://schemas.openxmlformats.org/drawingml/2006/main" xmlns:p="http://schemas.openxmlformats.org/presentationml/2006/main" xmlns:r="http://schemas.openxmlformats.org/officeDocument/2006/relationships">
   <p:cSld>
     <p:bg>
@@ -3517,7 +7204,7 @@
         <p:spPr>
           <a:xfrm>
             <a:off x="502920" y="274320"/>
-            <a:ext cx="11155680" cy="731520"/>
+            <a:ext cx="11155680" cy="548640"/>
           </a:xfrm>
           <a:prstGeom prst="rect">
             <a:avLst/>
@@ -3531,12 +7218,12 @@
           <a:lstStyle/>
           <a:p>
             <a:r>
-              <a:rPr sz="2600" b="1">
+              <a:rPr sz="2200" b="1">
                 <a:solidFill>
                   <a:srgbClr val="01AEFD"/>
                 </a:solidFill>
               </a:rPr>
-              <a:t>Type this into index.html  (1 of 3)</a:t>
+              <a:t>Type this into style.css   -   line 50</a:t>
             </a:r>
           </a:p>
         </p:txBody>
@@ -3549,8 +7236,8 @@
         </p:nvSpPr>
         <p:spPr>
           <a:xfrm>
-            <a:off x="502920" y="1051560"/>
-            <a:ext cx="11155680" cy="5394960"/>
+            <a:off x="502920" y="960120"/>
+            <a:ext cx="11155680" cy="4297680"/>
           </a:xfrm>
           <a:prstGeom prst="rect">
             <a:avLst/>
@@ -3569,7 +7256,132 @@
               </a:spcAft>
             </a:pPr>
             <a:r>
-              <a:rPr sz="1700">
+              <a:rPr sz="1300">
+                <a:solidFill>
+                  <a:srgbClr val="6D8C97"/>
+                </a:solidFill>
+                <a:latin typeface="Consolas"/>
+              </a:rPr>
+              <a:t>  32  </a:t>
+            </a:r>
+            <a:r>
+              <a:rPr sz="1300">
+                <a:solidFill>
+                  <a:srgbClr val="6D8C97"/>
+                </a:solidFill>
+                <a:latin typeface="Consolas"/>
+              </a:rPr>
+              <a:t>.setup { margin-bottom: 12px; font-size: 14px; }</a:t>
+            </a:r>
+          </a:p>
+          <a:p>
+            <a:pPr>
+              <a:spcAft>
+                <a:spcPts val="0"/>
+              </a:spcAft>
+            </a:pPr>
+            <a:r>
+              <a:rPr sz="1300">
+                <a:solidFill>
+                  <a:srgbClr val="6D8C97"/>
+                </a:solidFill>
+                <a:latin typeface="Consolas"/>
+              </a:rPr>
+              <a:t>  33  </a:t>
+            </a:r>
+            <a:r>
+              <a:rPr sz="1300">
+                <a:solidFill>
+                  <a:srgbClr val="6D8C97"/>
+                </a:solidFill>
+                <a:latin typeface="Consolas"/>
+              </a:rPr>
+              <a:t>.setup summary { cursor: pointer; color: #0a6299; font-weight: bold; }</a:t>
+            </a:r>
+          </a:p>
+          <a:p>
+            <a:pPr>
+              <a:spcAft>
+                <a:spcPts val="0"/>
+              </a:spcAft>
+            </a:pPr>
+            <a:r>
+              <a:rPr sz="1300">
+                <a:solidFill>
+                  <a:srgbClr val="6D8C97"/>
+                </a:solidFill>
+                <a:latin typeface="Consolas"/>
+              </a:rPr>
+              <a:t>  34  </a:t>
+            </a:r>
+            <a:r>
+              <a:rPr sz="1300">
+                <a:solidFill>
+                  <a:srgbClr val="6D8C97"/>
+                </a:solidFill>
+                <a:latin typeface="Consolas"/>
+              </a:rPr>
+              <a:t>.setup textarea {</a:t>
+            </a:r>
+          </a:p>
+          <a:p>
+            <a:pPr>
+              <a:spcAft>
+                <a:spcPts val="0"/>
+              </a:spcAft>
+            </a:pPr>
+            <a:r>
+              <a:rPr sz="1300">
+                <a:solidFill>
+                  <a:srgbClr val="6D8C97"/>
+                </a:solidFill>
+                <a:latin typeface="Consolas"/>
+              </a:rPr>
+              <a:t>  35  </a:t>
+            </a:r>
+            <a:r>
+              <a:rPr sz="1300">
+                <a:solidFill>
+                  <a:srgbClr val="6D8C97"/>
+                </a:solidFill>
+                <a:latin typeface="Consolas"/>
+              </a:rPr>
+              <a:t>  width: 100%;</a:t>
+            </a:r>
+          </a:p>
+          <a:p>
+            <a:pPr>
+              <a:spcAft>
+                <a:spcPts val="0"/>
+              </a:spcAft>
+            </a:pPr>
+            <a:r>
+              <a:rPr sz="1300">
+                <a:solidFill>
+                  <a:srgbClr val="6D8C97"/>
+                </a:solidFill>
+                <a:latin typeface="Consolas"/>
+              </a:rPr>
+              <a:t>  36  </a:t>
+            </a:r>
+            <a:r>
+              <a:rPr sz="1300">
+                <a:solidFill>
+                  <a:srgbClr val="6D8C97"/>
+                </a:solidFill>
+                <a:latin typeface="Consolas"/>
+              </a:rPr>
+              <a:t>  margin-top: 8px;</a:t>
+            </a:r>
+          </a:p>
+          <a:p>
+            <a:pPr>
+              <a:spcAft>
+                <a:spcPts val="0"/>
+              </a:spcAft>
+            </a:pPr>
+            <a:r>
+              <a:rPr sz="1300">
                 <a:solidFill>
                   <a:srgbClr val="6D8C97"/>
                 </a:solidFill>
@@ -3578,23 +7390,613 @@
               <a:t>  37  </a:t>
             </a:r>
             <a:r>
-              <a:rPr sz="1700">
+              <a:rPr sz="1300">
+                <a:solidFill>
+                  <a:srgbClr val="6D8C97"/>
+                </a:solidFill>
+                <a:latin typeface="Consolas"/>
+              </a:rPr>
+              <a:t>  padding: 9px;</a:t>
+            </a:r>
+          </a:p>
+          <a:p>
+            <a:pPr>
+              <a:spcAft>
+                <a:spcPts val="0"/>
+              </a:spcAft>
+            </a:pPr>
+            <a:r>
+              <a:rPr sz="1300">
+                <a:solidFill>
+                  <a:srgbClr val="6D8C97"/>
+                </a:solidFill>
+                <a:latin typeface="Consolas"/>
+              </a:rPr>
+              <a:t>  38  </a:t>
+            </a:r>
+            <a:r>
+              <a:rPr sz="1300">
+                <a:solidFill>
+                  <a:srgbClr val="6D8C97"/>
+                </a:solidFill>
+                <a:latin typeface="Consolas"/>
+              </a:rPr>
+              <a:t>  border: 1px solid #dbe3ec;</a:t>
+            </a:r>
+          </a:p>
+          <a:p>
+            <a:pPr>
+              <a:spcAft>
+                <a:spcPts val="0"/>
+              </a:spcAft>
+            </a:pPr>
+            <a:r>
+              <a:rPr sz="1300">
+                <a:solidFill>
+                  <a:srgbClr val="6D8C97"/>
+                </a:solidFill>
+                <a:latin typeface="Consolas"/>
+              </a:rPr>
+              <a:t>  39  </a:t>
+            </a:r>
+            <a:r>
+              <a:rPr sz="1300">
+                <a:solidFill>
+                  <a:srgbClr val="6D8C97"/>
+                </a:solidFill>
+                <a:latin typeface="Consolas"/>
+              </a:rPr>
+              <a:t>  border-radius: 6px;</a:t>
+            </a:r>
+          </a:p>
+          <a:p>
+            <a:pPr>
+              <a:spcAft>
+                <a:spcPts val="0"/>
+              </a:spcAft>
+            </a:pPr>
+            <a:r>
+              <a:rPr sz="1300">
+                <a:solidFill>
+                  <a:srgbClr val="6D8C97"/>
+                </a:solidFill>
+                <a:latin typeface="Consolas"/>
+              </a:rPr>
+              <a:t>  40  </a:t>
+            </a:r>
+            <a:r>
+              <a:rPr sz="1300">
+                <a:solidFill>
+                  <a:srgbClr val="6D8C97"/>
+                </a:solidFill>
+                <a:latin typeface="Consolas"/>
+              </a:rPr>
+              <a:t>  font-family: inherit;</a:t>
+            </a:r>
+          </a:p>
+          <a:p>
+            <a:pPr>
+              <a:spcAft>
+                <a:spcPts val="0"/>
+              </a:spcAft>
+            </a:pPr>
+            <a:r>
+              <a:rPr sz="1300">
+                <a:solidFill>
+                  <a:srgbClr val="6D8C97"/>
+                </a:solidFill>
+                <a:latin typeface="Consolas"/>
+              </a:rPr>
+              <a:t>  41  </a:t>
+            </a:r>
+            <a:r>
+              <a:rPr sz="1300">
+                <a:solidFill>
+                  <a:srgbClr val="6D8C97"/>
+                </a:solidFill>
+                <a:latin typeface="Consolas"/>
+              </a:rPr>
+              <a:t>  font-size: 14px;</a:t>
+            </a:r>
+          </a:p>
+          <a:p>
+            <a:pPr>
+              <a:spcAft>
+                <a:spcPts val="0"/>
+              </a:spcAft>
+            </a:pPr>
+            <a:r>
+              <a:rPr sz="1300">
+                <a:solidFill>
+                  <a:srgbClr val="6D8C97"/>
+                </a:solidFill>
+                <a:latin typeface="Consolas"/>
+              </a:rPr>
+              <a:t>  42  </a:t>
+            </a:r>
+            <a:r>
+              <a:rPr sz="1300">
+                <a:solidFill>
+                  <a:srgbClr val="6D8C97"/>
+                </a:solidFill>
+                <a:latin typeface="Consolas"/>
+              </a:rPr>
+              <a:t>}</a:t>
+            </a:r>
+          </a:p>
+          <a:p>
+            <a:pPr>
+              <a:spcAft>
+                <a:spcPts val="0"/>
+              </a:spcAft>
+            </a:pPr>
+            <a:r>
+              <a:rPr sz="1300">
+                <a:solidFill>
+                  <a:srgbClr val="6D8C97"/>
+                </a:solidFill>
+                <a:latin typeface="Consolas"/>
+              </a:rPr>
+              <a:t>  43  </a:t>
+            </a:r>
+            <a:r>
+              <a:rPr sz="1300">
+                <a:solidFill>
+                  <a:srgbClr val="6D8C97"/>
+                </a:solidFill>
+                <a:latin typeface="Consolas"/>
+              </a:rPr>
+              <a:t>.credits {</a:t>
+            </a:r>
+          </a:p>
+          <a:p>
+            <a:pPr>
+              <a:spcAft>
+                <a:spcPts val="0"/>
+              </a:spcAft>
+            </a:pPr>
+            <a:r>
+              <a:rPr sz="1300">
+                <a:solidFill>
+                  <a:srgbClr val="6D8C97"/>
+                </a:solidFill>
+                <a:latin typeface="Consolas"/>
+              </a:rPr>
+              <a:t>  44  </a:t>
+            </a:r>
+            <a:r>
+              <a:rPr sz="1300">
+                <a:solidFill>
+                  <a:srgbClr val="6D8C97"/>
+                </a:solidFill>
+                <a:latin typeface="Consolas"/>
+              </a:rPr>
+              <a:t>  margin-top: 22px;</a:t>
+            </a:r>
+          </a:p>
+          <a:p>
+            <a:pPr>
+              <a:spcAft>
+                <a:spcPts val="0"/>
+              </a:spcAft>
+            </a:pPr>
+            <a:r>
+              <a:rPr sz="1300">
+                <a:solidFill>
+                  <a:srgbClr val="6D8C97"/>
+                </a:solidFill>
+                <a:latin typeface="Consolas"/>
+              </a:rPr>
+              <a:t>  45  </a:t>
+            </a:r>
+            <a:r>
+              <a:rPr sz="1300">
+                <a:solidFill>
+                  <a:srgbClr val="6D8C97"/>
+                </a:solidFill>
+                <a:latin typeface="Consolas"/>
+              </a:rPr>
+              <a:t>  padding-top: 14px;</a:t>
+            </a:r>
+          </a:p>
+          <a:p>
+            <a:pPr>
+              <a:spcAft>
+                <a:spcPts val="0"/>
+              </a:spcAft>
+            </a:pPr>
+            <a:r>
+              <a:rPr sz="1300">
+                <a:solidFill>
+                  <a:srgbClr val="6D8C97"/>
+                </a:solidFill>
+                <a:latin typeface="Consolas"/>
+              </a:rPr>
+              <a:t>  46  </a:t>
+            </a:r>
+            <a:r>
+              <a:rPr sz="1300">
+                <a:solidFill>
+                  <a:srgbClr val="6D8C97"/>
+                </a:solidFill>
+                <a:latin typeface="Consolas"/>
+              </a:rPr>
+              <a:t>  border-top: 1px solid #dbe3ec;</a:t>
+            </a:r>
+          </a:p>
+          <a:p>
+            <a:pPr>
+              <a:spcAft>
+                <a:spcPts val="0"/>
+              </a:spcAft>
+            </a:pPr>
+            <a:r>
+              <a:rPr sz="1300">
+                <a:solidFill>
+                  <a:srgbClr val="6D8C97"/>
+                </a:solidFill>
+                <a:latin typeface="Consolas"/>
+              </a:rPr>
+              <a:t>  47  </a:t>
+            </a:r>
+            <a:r>
+              <a:rPr sz="1300">
+                <a:solidFill>
+                  <a:srgbClr val="6D8C97"/>
+                </a:solidFill>
+                <a:latin typeface="Consolas"/>
+              </a:rPr>
+              <a:t>  color: #6b7787;</a:t>
+            </a:r>
+          </a:p>
+          <a:p>
+            <a:pPr>
+              <a:spcAft>
+                <a:spcPts val="0"/>
+              </a:spcAft>
+            </a:pPr>
+            <a:r>
+              <a:rPr sz="1300">
+                <a:solidFill>
+                  <a:srgbClr val="6D8C97"/>
+                </a:solidFill>
+                <a:latin typeface="Consolas"/>
+              </a:rPr>
+              <a:t>  48  </a:t>
+            </a:r>
+            <a:r>
+              <a:rPr sz="1300">
+                <a:solidFill>
+                  <a:srgbClr val="6D8C97"/>
+                </a:solidFill>
+                <a:latin typeface="Consolas"/>
+              </a:rPr>
+              <a:t>  font-size: 12px;</a:t>
+            </a:r>
+          </a:p>
+          <a:p>
+            <a:pPr>
+              <a:spcAft>
+                <a:spcPts val="0"/>
+              </a:spcAft>
+            </a:pPr>
+            <a:r>
+              <a:rPr sz="1300">
+                <a:solidFill>
+                  <a:srgbClr val="6D8C97"/>
+                </a:solidFill>
+                <a:latin typeface="Consolas"/>
+              </a:rPr>
+              <a:t>  49  </a:t>
+            </a:r>
+            <a:r>
+              <a:rPr sz="1300">
+                <a:solidFill>
+                  <a:srgbClr val="6D8C97"/>
+                </a:solidFill>
+                <a:latin typeface="Consolas"/>
+              </a:rPr>
+              <a:t>}</a:t>
+            </a:r>
+          </a:p>
+          <a:p>
+            <a:pPr>
+              <a:spcAft>
+                <a:spcPts val="0"/>
+              </a:spcAft>
+            </a:pPr>
+            <a:r>
+              <a:rPr sz="1300">
+                <a:solidFill>
+                  <a:srgbClr val="6D8C97"/>
+                </a:solidFill>
+                <a:latin typeface="Consolas"/>
+              </a:rPr>
+              <a:t>  50  </a:t>
+            </a:r>
+            <a:r>
+              <a:rPr sz="1300">
                 <a:solidFill>
                   <a:srgbClr val="7FE0A0"/>
                 </a:solidFill>
                 <a:latin typeface="Consolas"/>
               </a:rPr>
-              <a:t>  &lt;footer class="credits"&gt;</a:t>
-            </a:r>
-          </a:p>
-          <a:p>
-            <a:pPr>
-              <a:spcAft>
-                <a:spcPts val="0"/>
-              </a:spcAft>
-            </a:pPr>
-            <a:r>
-              <a:rPr sz="1700">
+              <a:t>.credits p { margin: 0 0 4px; }</a:t>
+            </a:r>
+          </a:p>
+        </p:txBody>
+      </p:sp>
+      <p:sp>
+        <p:nvSpPr>
+          <p:cNvPr id="4" name="TextBox 3"/>
+          <p:cNvSpPr txBox="1"/>
+          <p:nvPr/>
+        </p:nvSpPr>
+        <p:spPr>
+          <a:xfrm>
+            <a:off x="548640" y="5623560"/>
+            <a:ext cx="11064240" cy="1051560"/>
+          </a:xfrm>
+          <a:prstGeom prst="rect">
+            <a:avLst/>
+          </a:prstGeom>
+          <a:noFill/>
+        </p:spPr>
+        <p:txBody>
+          <a:bodyPr wrap="square">
+            <a:spAutoFit/>
+          </a:bodyPr>
+          <a:lstStyle/>
+          <a:p>
+            <a:r>
+              <a:rPr sz="2000">
+                <a:solidFill>
+                  <a:srgbClr val="DCECEF"/>
+                </a:solidFill>
+              </a:rPr>
+              <a:t>A little gap under each credit line.</a:t>
+            </a:r>
+          </a:p>
+        </p:txBody>
+      </p:sp>
+    </p:spTree>
+  </p:cSld>
+  <p:clrMapOvr>
+    <a:masterClrMapping/>
+  </p:clrMapOvr>
+</p:sld>
+</file>
+
+<file path=ppt/slides/slide21.xml><?xml version="1.0" encoding="utf-8"?>
+<p:sld xmlns:a="http://schemas.openxmlformats.org/drawingml/2006/main" xmlns:p="http://schemas.openxmlformats.org/presentationml/2006/main" xmlns:r="http://schemas.openxmlformats.org/officeDocument/2006/relationships">
+  <p:cSld>
+    <p:bg>
+      <p:bgPr>
+        <a:solidFill>
+          <a:srgbClr val="102127"/>
+        </a:solidFill>
+        <a:effectLst/>
+      </p:bgPr>
+    </p:bg>
+    <p:spTree>
+      <p:nvGrpSpPr>
+        <p:cNvPr id="1" name=""/>
+        <p:cNvGrpSpPr/>
+        <p:nvPr/>
+      </p:nvGrpSpPr>
+      <p:grpSpPr/>
+      <p:sp>
+        <p:nvSpPr>
+          <p:cNvPr id="2" name="TextBox 1"/>
+          <p:cNvSpPr txBox="1"/>
+          <p:nvPr/>
+        </p:nvSpPr>
+        <p:spPr>
+          <a:xfrm>
+            <a:off x="502920" y="274320"/>
+            <a:ext cx="11155680" cy="548640"/>
+          </a:xfrm>
+          <a:prstGeom prst="rect">
+            <a:avLst/>
+          </a:prstGeom>
+          <a:noFill/>
+        </p:spPr>
+        <p:txBody>
+          <a:bodyPr wrap="none">
+            <a:spAutoFit/>
+          </a:bodyPr>
+          <a:lstStyle/>
+          <a:p>
+            <a:r>
+              <a:rPr sz="2200" b="1">
+                <a:solidFill>
+                  <a:srgbClr val="01AEFD"/>
+                </a:solidFill>
+              </a:rPr>
+              <a:t>All together in style.css</a:t>
+            </a:r>
+          </a:p>
+        </p:txBody>
+      </p:sp>
+      <p:sp>
+        <p:nvSpPr>
+          <p:cNvPr id="3" name="TextBox 2"/>
+          <p:cNvSpPr txBox="1"/>
+          <p:nvPr/>
+        </p:nvSpPr>
+        <p:spPr>
+          <a:xfrm>
+            <a:off x="502920" y="960120"/>
+            <a:ext cx="11155680" cy="4297680"/>
+          </a:xfrm>
+          <a:prstGeom prst="rect">
+            <a:avLst/>
+          </a:prstGeom>
+          <a:noFill/>
+        </p:spPr>
+        <p:txBody>
+          <a:bodyPr wrap="none">
+            <a:spAutoFit/>
+          </a:bodyPr>
+          <a:lstStyle/>
+          <a:p>
+            <a:pPr>
+              <a:spcAft>
+                <a:spcPts val="0"/>
+              </a:spcAft>
+            </a:pPr>
+            <a:r>
+              <a:rPr sz="1300">
+                <a:solidFill>
+                  <a:srgbClr val="6D8C97"/>
+                </a:solidFill>
+                <a:latin typeface="Consolas"/>
+              </a:rPr>
+              <a:t>  32  </a:t>
+            </a:r>
+            <a:r>
+              <a:rPr sz="1300">
+                <a:solidFill>
+                  <a:srgbClr val="7FE0A0"/>
+                </a:solidFill>
+                <a:latin typeface="Consolas"/>
+              </a:rPr>
+              <a:t>.setup { margin-bottom: 12px; font-size: 14px; }</a:t>
+            </a:r>
+          </a:p>
+          <a:p>
+            <a:pPr>
+              <a:spcAft>
+                <a:spcPts val="0"/>
+              </a:spcAft>
+            </a:pPr>
+            <a:r>
+              <a:rPr sz="1300">
+                <a:solidFill>
+                  <a:srgbClr val="6D8C97"/>
+                </a:solidFill>
+                <a:latin typeface="Consolas"/>
+              </a:rPr>
+              <a:t>  33  </a:t>
+            </a:r>
+            <a:r>
+              <a:rPr sz="1300">
+                <a:solidFill>
+                  <a:srgbClr val="7FE0A0"/>
+                </a:solidFill>
+                <a:latin typeface="Consolas"/>
+              </a:rPr>
+              <a:t>.setup summary { cursor: pointer; color: #0a6299; font-weight: bold; }</a:t>
+            </a:r>
+          </a:p>
+          <a:p>
+            <a:pPr>
+              <a:spcAft>
+                <a:spcPts val="0"/>
+              </a:spcAft>
+            </a:pPr>
+            <a:r>
+              <a:rPr sz="1300">
+                <a:solidFill>
+                  <a:srgbClr val="6D8C97"/>
+                </a:solidFill>
+                <a:latin typeface="Consolas"/>
+              </a:rPr>
+              <a:t>  34  </a:t>
+            </a:r>
+            <a:r>
+              <a:rPr sz="1300">
+                <a:solidFill>
+                  <a:srgbClr val="7FE0A0"/>
+                </a:solidFill>
+                <a:latin typeface="Consolas"/>
+              </a:rPr>
+              <a:t>.setup textarea {</a:t>
+            </a:r>
+          </a:p>
+          <a:p>
+            <a:pPr>
+              <a:spcAft>
+                <a:spcPts val="0"/>
+              </a:spcAft>
+            </a:pPr>
+            <a:r>
+              <a:rPr sz="1300">
+                <a:solidFill>
+                  <a:srgbClr val="6D8C97"/>
+                </a:solidFill>
+                <a:latin typeface="Consolas"/>
+              </a:rPr>
+              <a:t>  35  </a:t>
+            </a:r>
+            <a:r>
+              <a:rPr sz="1300">
+                <a:solidFill>
+                  <a:srgbClr val="7FE0A0"/>
+                </a:solidFill>
+                <a:latin typeface="Consolas"/>
+              </a:rPr>
+              <a:t>  width: 100%;</a:t>
+            </a:r>
+          </a:p>
+          <a:p>
+            <a:pPr>
+              <a:spcAft>
+                <a:spcPts val="0"/>
+              </a:spcAft>
+            </a:pPr>
+            <a:r>
+              <a:rPr sz="1300">
+                <a:solidFill>
+                  <a:srgbClr val="6D8C97"/>
+                </a:solidFill>
+                <a:latin typeface="Consolas"/>
+              </a:rPr>
+              <a:t>  36  </a:t>
+            </a:r>
+            <a:r>
+              <a:rPr sz="1300">
+                <a:solidFill>
+                  <a:srgbClr val="7FE0A0"/>
+                </a:solidFill>
+                <a:latin typeface="Consolas"/>
+              </a:rPr>
+              <a:t>  margin-top: 8px;</a:t>
+            </a:r>
+          </a:p>
+          <a:p>
+            <a:pPr>
+              <a:spcAft>
+                <a:spcPts val="0"/>
+              </a:spcAft>
+            </a:pPr>
+            <a:r>
+              <a:rPr sz="1300">
+                <a:solidFill>
+                  <a:srgbClr val="6D8C97"/>
+                </a:solidFill>
+                <a:latin typeface="Consolas"/>
+              </a:rPr>
+              <a:t>  37  </a:t>
+            </a:r>
+            <a:r>
+              <a:rPr sz="1300">
+                <a:solidFill>
+                  <a:srgbClr val="7FE0A0"/>
+                </a:solidFill>
+                <a:latin typeface="Consolas"/>
+              </a:rPr>
+              <a:t>  padding: 9px;</a:t>
+            </a:r>
+          </a:p>
+          <a:p>
+            <a:pPr>
+              <a:spcAft>
+                <a:spcPts val="0"/>
+              </a:spcAft>
+            </a:pPr>
+            <a:r>
+              <a:rPr sz="1300">
                 <a:solidFill>
                   <a:srgbClr val="6D8C97"/>
                 </a:solidFill>
@@ -3603,23 +8005,23 @@
               <a:t>  38  </a:t>
             </a:r>
             <a:r>
-              <a:rPr sz="1700">
+              <a:rPr sz="1300">
                 <a:solidFill>
                   <a:srgbClr val="7FE0A0"/>
                 </a:solidFill>
                 <a:latin typeface="Consolas"/>
               </a:rPr>
-              <a:t>    &lt;p&gt;Built by &lt;strong&gt;your name here&lt;/strong&gt; in AI101 &amp;middot; UTG Academy&lt;/p&gt;</a:t>
-            </a:r>
-          </a:p>
-          <a:p>
-            <a:pPr>
-              <a:spcAft>
-                <a:spcPts val="0"/>
-              </a:spcAft>
-            </a:pPr>
-            <a:r>
-              <a:rPr sz="1700">
+              <a:t>  border: 1px solid #dbe3ec;</a:t>
+            </a:r>
+          </a:p>
+          <a:p>
+            <a:pPr>
+              <a:spcAft>
+                <a:spcPts val="0"/>
+              </a:spcAft>
+            </a:pPr>
+            <a:r>
+              <a:rPr sz="1300">
                 <a:solidFill>
                   <a:srgbClr val="6D8C97"/>
                 </a:solidFill>
@@ -3628,23 +8030,23 @@
               <a:t>  39  </a:t>
             </a:r>
             <a:r>
-              <a:rPr sz="1700">
+              <a:rPr sz="1300">
                 <a:solidFill>
                   <a:srgbClr val="7FE0A0"/>
                 </a:solidFill>
                 <a:latin typeface="Consolas"/>
               </a:rPr>
-              <a:t>    &lt;p&gt;Runs on the school AI server. Written in plain HTML, CSS and JavaScript.&lt;/p&gt;</a:t>
-            </a:r>
-          </a:p>
-          <a:p>
-            <a:pPr>
-              <a:spcAft>
-                <a:spcPts val="0"/>
-              </a:spcAft>
-            </a:pPr>
-            <a:r>
-              <a:rPr sz="1700">
+              <a:t>  border-radius: 6px;</a:t>
+            </a:r>
+          </a:p>
+          <a:p>
+            <a:pPr>
+              <a:spcAft>
+                <a:spcPts val="0"/>
+              </a:spcAft>
+            </a:pPr>
+            <a:r>
+              <a:rPr sz="1300">
                 <a:solidFill>
                   <a:srgbClr val="6D8C97"/>
                 </a:solidFill>
@@ -3653,23 +8055,23 @@
               <a:t>  40  </a:t>
             </a:r>
             <a:r>
-              <a:rPr sz="1700">
+              <a:rPr sz="1300">
                 <a:solidFill>
                   <a:srgbClr val="7FE0A0"/>
                 </a:solidFill>
                 <a:latin typeface="Consolas"/>
               </a:rPr>
-              <a:t>  &lt;/footer&gt;</a:t>
-            </a:r>
-          </a:p>
-          <a:p>
-            <a:pPr>
-              <a:spcAft>
-                <a:spcPts val="0"/>
-              </a:spcAft>
-            </a:pPr>
-            <a:r>
-              <a:rPr sz="1700">
+              <a:t>  font-family: inherit;</a:t>
+            </a:r>
+          </a:p>
+          <a:p>
+            <a:pPr>
+              <a:spcAft>
+                <a:spcPts val="0"/>
+              </a:spcAft>
+            </a:pPr>
+            <a:r>
+              <a:rPr sz="1300">
                 <a:solidFill>
                   <a:srgbClr val="6D8C97"/>
                 </a:solidFill>
@@ -3678,13 +8080,2901 @@
               <a:t>  41  </a:t>
             </a:r>
             <a:r>
-              <a:rPr sz="1700">
+              <a:rPr sz="1300">
+                <a:solidFill>
+                  <a:srgbClr val="7FE0A0"/>
+                </a:solidFill>
+                <a:latin typeface="Consolas"/>
+              </a:rPr>
+              <a:t>  font-size: 14px;</a:t>
+            </a:r>
+          </a:p>
+          <a:p>
+            <a:pPr>
+              <a:spcAft>
+                <a:spcPts val="0"/>
+              </a:spcAft>
+            </a:pPr>
+            <a:r>
+              <a:rPr sz="1300">
+                <a:solidFill>
+                  <a:srgbClr val="6D8C97"/>
+                </a:solidFill>
+                <a:latin typeface="Consolas"/>
+              </a:rPr>
+              <a:t>  42  </a:t>
+            </a:r>
+            <a:r>
+              <a:rPr sz="1300">
+                <a:solidFill>
+                  <a:srgbClr val="7FE0A0"/>
+                </a:solidFill>
+                <a:latin typeface="Consolas"/>
+              </a:rPr>
+              <a:t>}</a:t>
+            </a:r>
+          </a:p>
+          <a:p>
+            <a:pPr>
+              <a:spcAft>
+                <a:spcPts val="0"/>
+              </a:spcAft>
+            </a:pPr>
+            <a:r>
+              <a:rPr sz="1300">
+                <a:solidFill>
+                  <a:srgbClr val="6D8C97"/>
+                </a:solidFill>
+                <a:latin typeface="Consolas"/>
+              </a:rPr>
+              <a:t>  43  </a:t>
+            </a:r>
+            <a:r>
+              <a:rPr sz="1300">
+                <a:solidFill>
+                  <a:srgbClr val="7FE0A0"/>
+                </a:solidFill>
+                <a:latin typeface="Consolas"/>
+              </a:rPr>
+              <a:t>.credits {</a:t>
+            </a:r>
+          </a:p>
+          <a:p>
+            <a:pPr>
+              <a:spcAft>
+                <a:spcPts val="0"/>
+              </a:spcAft>
+            </a:pPr>
+            <a:r>
+              <a:rPr sz="1300">
+                <a:solidFill>
+                  <a:srgbClr val="6D8C97"/>
+                </a:solidFill>
+                <a:latin typeface="Consolas"/>
+              </a:rPr>
+              <a:t>  44  </a:t>
+            </a:r>
+            <a:r>
+              <a:rPr sz="1300">
+                <a:solidFill>
+                  <a:srgbClr val="7FE0A0"/>
+                </a:solidFill>
+                <a:latin typeface="Consolas"/>
+              </a:rPr>
+              <a:t>  margin-top: 22px;</a:t>
+            </a:r>
+          </a:p>
+          <a:p>
+            <a:pPr>
+              <a:spcAft>
+                <a:spcPts val="0"/>
+              </a:spcAft>
+            </a:pPr>
+            <a:r>
+              <a:rPr sz="1300">
+                <a:solidFill>
+                  <a:srgbClr val="6D8C97"/>
+                </a:solidFill>
+                <a:latin typeface="Consolas"/>
+              </a:rPr>
+              <a:t>  45  </a:t>
+            </a:r>
+            <a:r>
+              <a:rPr sz="1300">
+                <a:solidFill>
+                  <a:srgbClr val="7FE0A0"/>
+                </a:solidFill>
+                <a:latin typeface="Consolas"/>
+              </a:rPr>
+              <a:t>  padding-top: 14px;</a:t>
+            </a:r>
+          </a:p>
+          <a:p>
+            <a:pPr>
+              <a:spcAft>
+                <a:spcPts val="0"/>
+              </a:spcAft>
+            </a:pPr>
+            <a:r>
+              <a:rPr sz="1300">
+                <a:solidFill>
+                  <a:srgbClr val="6D8C97"/>
+                </a:solidFill>
+                <a:latin typeface="Consolas"/>
+              </a:rPr>
+              <a:t>  46  </a:t>
+            </a:r>
+            <a:r>
+              <a:rPr sz="1300">
+                <a:solidFill>
+                  <a:srgbClr val="7FE0A0"/>
+                </a:solidFill>
+                <a:latin typeface="Consolas"/>
+              </a:rPr>
+              <a:t>  border-top: 1px solid #dbe3ec;</a:t>
+            </a:r>
+          </a:p>
+          <a:p>
+            <a:pPr>
+              <a:spcAft>
+                <a:spcPts val="0"/>
+              </a:spcAft>
+            </a:pPr>
+            <a:r>
+              <a:rPr sz="1300">
+                <a:solidFill>
+                  <a:srgbClr val="6D8C97"/>
+                </a:solidFill>
+                <a:latin typeface="Consolas"/>
+              </a:rPr>
+              <a:t>  47  </a:t>
+            </a:r>
+            <a:r>
+              <a:rPr sz="1300">
+                <a:solidFill>
+                  <a:srgbClr val="7FE0A0"/>
+                </a:solidFill>
+                <a:latin typeface="Consolas"/>
+              </a:rPr>
+              <a:t>  color: #6b7787;</a:t>
+            </a:r>
+          </a:p>
+          <a:p>
+            <a:pPr>
+              <a:spcAft>
+                <a:spcPts val="0"/>
+              </a:spcAft>
+            </a:pPr>
+            <a:r>
+              <a:rPr sz="1300">
+                <a:solidFill>
+                  <a:srgbClr val="6D8C97"/>
+                </a:solidFill>
+                <a:latin typeface="Consolas"/>
+              </a:rPr>
+              <a:t>  48  </a:t>
+            </a:r>
+            <a:r>
+              <a:rPr sz="1300">
+                <a:solidFill>
+                  <a:srgbClr val="7FE0A0"/>
+                </a:solidFill>
+                <a:latin typeface="Consolas"/>
+              </a:rPr>
+              <a:t>  font-size: 12px;</a:t>
+            </a:r>
+          </a:p>
+          <a:p>
+            <a:pPr>
+              <a:spcAft>
+                <a:spcPts val="0"/>
+              </a:spcAft>
+            </a:pPr>
+            <a:r>
+              <a:rPr sz="1300">
+                <a:solidFill>
+                  <a:srgbClr val="6D8C97"/>
+                </a:solidFill>
+                <a:latin typeface="Consolas"/>
+              </a:rPr>
+              <a:t>  49  </a:t>
+            </a:r>
+            <a:r>
+              <a:rPr sz="1300">
+                <a:solidFill>
+                  <a:srgbClr val="7FE0A0"/>
+                </a:solidFill>
+                <a:latin typeface="Consolas"/>
+              </a:rPr>
+              <a:t>}</a:t>
+            </a:r>
+          </a:p>
+          <a:p>
+            <a:pPr>
+              <a:spcAft>
+                <a:spcPts val="0"/>
+              </a:spcAft>
+            </a:pPr>
+            <a:r>
+              <a:rPr sz="1300">
+                <a:solidFill>
+                  <a:srgbClr val="6D8C97"/>
+                </a:solidFill>
+                <a:latin typeface="Consolas"/>
+              </a:rPr>
+              <a:t>  50  </a:t>
+            </a:r>
+            <a:r>
+              <a:rPr sz="1300">
+                <a:solidFill>
+                  <a:srgbClr val="7FE0A0"/>
+                </a:solidFill>
+                <a:latin typeface="Consolas"/>
+              </a:rPr>
+              <a:t>.credits p { margin: 0 0 4px; }</a:t>
+            </a:r>
+          </a:p>
+        </p:txBody>
+      </p:sp>
+      <p:sp>
+        <p:nvSpPr>
+          <p:cNvPr id="4" name="TextBox 3"/>
+          <p:cNvSpPr txBox="1"/>
+          <p:nvPr/>
+        </p:nvSpPr>
+        <p:spPr>
+          <a:xfrm>
+            <a:off x="548640" y="5623560"/>
+            <a:ext cx="11064240" cy="1051560"/>
+          </a:xfrm>
+          <a:prstGeom prst="rect">
+            <a:avLst/>
+          </a:prstGeom>
+          <a:noFill/>
+        </p:spPr>
+        <p:txBody>
+          <a:bodyPr wrap="square">
+            <a:spAutoFit/>
+          </a:bodyPr>
+          <a:lstStyle/>
+          <a:p>
+            <a:r>
+              <a:rPr sz="2000">
                 <a:solidFill>
                   <a:srgbClr val="DCECEF"/>
                 </a:solidFill>
-                <a:latin typeface="Consolas"/>
-              </a:rPr>
-              <a:t>&lt;/main&gt;</a:t>
+              </a:rPr>
+              <a:t>That is the whole piece. Check yours looks the same before moving on.</a:t>
+            </a:r>
+          </a:p>
+        </p:txBody>
+      </p:sp>
+    </p:spTree>
+  </p:cSld>
+  <p:clrMapOvr>
+    <a:masterClrMapping/>
+  </p:clrMapOvr>
+</p:sld>
+</file>
+
+<file path=ppt/slides/slide22.xml><?xml version="1.0" encoding="utf-8"?>
+<p:sld xmlns:a="http://schemas.openxmlformats.org/drawingml/2006/main" xmlns:p="http://schemas.openxmlformats.org/presentationml/2006/main" xmlns:r="http://schemas.openxmlformats.org/officeDocument/2006/relationships">
+  <p:cSld>
+    <p:spTree>
+      <p:nvGrpSpPr>
+        <p:cNvPr id="1" name=""/>
+        <p:cNvGrpSpPr/>
+        <p:nvPr/>
+      </p:nvGrpSpPr>
+      <p:grpSpPr/>
+      <p:sp>
+        <p:nvSpPr>
+          <p:cNvPr id="2" name="Title 1"/>
+          <p:cNvSpPr>
+            <a:spLocks noGrp="1"/>
+          </p:cNvSpPr>
+          <p:nvPr>
+            <p:ph type="title"/>
+          </p:nvPr>
+        </p:nvSpPr>
+        <p:spPr/>
+        <p:txBody>
+          <a:bodyPr/>
+          <a:lstStyle/>
+          <a:p>
+            <a:r>
+              <a:rPr sz="3800" b="1">
+                <a:solidFill>
+                  <a:srgbClr val="1F2A37"/>
+                </a:solidFill>
+              </a:rPr>
+              <a:t>What does the &lt;footer&gt; tag hold?</a:t>
+            </a:r>
+          </a:p>
+        </p:txBody>
+      </p:sp>
+      <p:sp>
+        <p:nvSpPr>
+          <p:cNvPr id="3" name="TextBox 2"/>
+          <p:cNvSpPr txBox="1"/>
+          <p:nvPr/>
+        </p:nvSpPr>
+        <p:spPr>
+          <a:xfrm>
+            <a:off x="868680" y="502920"/>
+            <a:ext cx="5486400" cy="457200"/>
+          </a:xfrm>
+          <a:prstGeom prst="rect">
+            <a:avLst/>
+          </a:prstGeom>
+          <a:noFill/>
+        </p:spPr>
+        <p:txBody>
+          <a:bodyPr wrap="none">
+            <a:spAutoFit/>
+          </a:bodyPr>
+          <a:lstStyle/>
+          <a:p>
+            <a:r>
+              <a:rPr sz="1500" b="1">
+                <a:solidFill>
+                  <a:srgbClr val="01AEFD"/>
+                </a:solidFill>
+              </a:rPr>
+              <a:t>QUICK CHECK</a:t>
+            </a:r>
+          </a:p>
+        </p:txBody>
+      </p:sp>
+      <p:sp>
+        <p:nvSpPr>
+          <p:cNvPr id="4" name="TextBox 3"/>
+          <p:cNvSpPr txBox="1"/>
+          <p:nvPr/>
+        </p:nvSpPr>
+        <p:spPr>
+          <a:xfrm>
+            <a:off x="822960" y="1828800"/>
+            <a:ext cx="10515600" cy="4206240"/>
+          </a:xfrm>
+          <a:prstGeom prst="rect">
+            <a:avLst/>
+          </a:prstGeom>
+          <a:noFill/>
+        </p:spPr>
+        <p:txBody>
+          <a:bodyPr wrap="square">
+            <a:spAutoFit/>
+          </a:bodyPr>
+          <a:lstStyle/>
+          <a:p>
+            <a:pPr>
+              <a:spcAft>
+                <a:spcPts val="1400"/>
+              </a:spcAft>
+            </a:pPr>
+            <a:r>
+              <a:rPr sz="2400">
+                <a:solidFill>
+                  <a:srgbClr val="1F2A37"/>
+                </a:solidFill>
+              </a:rPr>
+              <a:t>• A. The bottom strip of the page - credits and small print</a:t>
+            </a:r>
+          </a:p>
+          <a:p>
+            <a:pPr>
+              <a:spcAft>
+                <a:spcPts val="1400"/>
+              </a:spcAft>
+            </a:pPr>
+            <a:r>
+              <a:rPr sz="2400">
+                <a:solidFill>
+                  <a:srgbClr val="1F2A37"/>
+                </a:solidFill>
+              </a:rPr>
+              <a:t>• B. The main chat</a:t>
+            </a:r>
+          </a:p>
+          <a:p>
+            <a:pPr>
+              <a:spcAft>
+                <a:spcPts val="1400"/>
+              </a:spcAft>
+            </a:pPr>
+            <a:r>
+              <a:rPr sz="2400">
+                <a:solidFill>
+                  <a:srgbClr val="1F2A37"/>
+                </a:solidFill>
+              </a:rPr>
+              <a:t>• C. The title</a:t>
+            </a:r>
+          </a:p>
+          <a:p>
+            <a:pPr>
+              <a:spcAft>
+                <a:spcPts val="1400"/>
+              </a:spcAft>
+            </a:pPr>
+            <a:r>
+              <a:rPr sz="2400">
+                <a:solidFill>
+                  <a:srgbClr val="1F2A37"/>
+                </a:solidFill>
+              </a:rPr>
+              <a:t>• D. The character buttons</a:t>
+            </a:r>
+          </a:p>
+          <a:p>
+            <a:pPr>
+              <a:spcAft>
+                <a:spcPts val="1400"/>
+              </a:spcAft>
+            </a:pPr>
+            <a:r>
+              <a:rPr sz="2400">
+                <a:solidFill>
+                  <a:srgbClr val="1F2A37"/>
+                </a:solidFill>
+              </a:rPr>
+              <a:t>• Pick one - the answer is on the next slide.</a:t>
+            </a:r>
+          </a:p>
+        </p:txBody>
+      </p:sp>
+    </p:spTree>
+  </p:cSld>
+  <p:clrMapOvr>
+    <a:masterClrMapping/>
+  </p:clrMapOvr>
+</p:sld>
+</file>
+
+<file path=ppt/slides/slide23.xml><?xml version="1.0" encoding="utf-8"?>
+<p:sld xmlns:a="http://schemas.openxmlformats.org/drawingml/2006/main" xmlns:p="http://schemas.openxmlformats.org/presentationml/2006/main" xmlns:r="http://schemas.openxmlformats.org/officeDocument/2006/relationships">
+  <p:cSld>
+    <p:spTree>
+      <p:nvGrpSpPr>
+        <p:cNvPr id="1" name=""/>
+        <p:cNvGrpSpPr/>
+        <p:nvPr/>
+      </p:nvGrpSpPr>
+      <p:grpSpPr/>
+      <p:sp>
+        <p:nvSpPr>
+          <p:cNvPr id="2" name="Title 1"/>
+          <p:cNvSpPr>
+            <a:spLocks noGrp="1"/>
+          </p:cNvSpPr>
+          <p:nvPr>
+            <p:ph type="title"/>
+          </p:nvPr>
+        </p:nvSpPr>
+        <p:spPr/>
+        <p:txBody>
+          <a:bodyPr/>
+          <a:lstStyle/>
+          <a:p>
+            <a:r>
+              <a:rPr sz="3800" b="1">
+                <a:solidFill>
+                  <a:srgbClr val="1F2A37"/>
+                </a:solidFill>
+              </a:rPr>
+              <a:t>What does the &lt;footer&gt; tag hold?</a:t>
+            </a:r>
+          </a:p>
+        </p:txBody>
+      </p:sp>
+      <p:sp>
+        <p:nvSpPr>
+          <p:cNvPr id="3" name="TextBox 2"/>
+          <p:cNvSpPr txBox="1"/>
+          <p:nvPr/>
+        </p:nvSpPr>
+        <p:spPr>
+          <a:xfrm>
+            <a:off x="868680" y="502920"/>
+            <a:ext cx="5486400" cy="457200"/>
+          </a:xfrm>
+          <a:prstGeom prst="rect">
+            <a:avLst/>
+          </a:prstGeom>
+          <a:noFill/>
+        </p:spPr>
+        <p:txBody>
+          <a:bodyPr wrap="none">
+            <a:spAutoFit/>
+          </a:bodyPr>
+          <a:lstStyle/>
+          <a:p>
+            <a:r>
+              <a:rPr sz="1500" b="1">
+                <a:solidFill>
+                  <a:srgbClr val="01AEFD"/>
+                </a:solidFill>
+              </a:rPr>
+              <a:t>ANSWER</a:t>
+            </a:r>
+          </a:p>
+        </p:txBody>
+      </p:sp>
+      <p:sp>
+        <p:nvSpPr>
+          <p:cNvPr id="4" name="TextBox 3"/>
+          <p:cNvSpPr txBox="1"/>
+          <p:nvPr/>
+        </p:nvSpPr>
+        <p:spPr>
+          <a:xfrm>
+            <a:off x="822960" y="1828800"/>
+            <a:ext cx="10515600" cy="4206240"/>
+          </a:xfrm>
+          <a:prstGeom prst="rect">
+            <a:avLst/>
+          </a:prstGeom>
+          <a:noFill/>
+        </p:spPr>
+        <p:txBody>
+          <a:bodyPr wrap="square">
+            <a:spAutoFit/>
+          </a:bodyPr>
+          <a:lstStyle/>
+          <a:p>
+            <a:pPr>
+              <a:spcAft>
+                <a:spcPts val="1400"/>
+              </a:spcAft>
+            </a:pPr>
+            <a:r>
+              <a:rPr sz="2400">
+                <a:solidFill>
+                  <a:srgbClr val="1F2A37"/>
+                </a:solidFill>
+              </a:rPr>
+              <a:t>• A. The bottom strip of the page - credits and small print (correct)</a:t>
+            </a:r>
+          </a:p>
+          <a:p>
+            <a:pPr>
+              <a:spcAft>
+                <a:spcPts val="1400"/>
+              </a:spcAft>
+            </a:pPr>
+            <a:r>
+              <a:rPr sz="2400">
+                <a:solidFill>
+                  <a:srgbClr val="1F2A37"/>
+                </a:solidFill>
+              </a:rPr>
+              <a:t>• B. The main chat</a:t>
+            </a:r>
+          </a:p>
+          <a:p>
+            <a:pPr>
+              <a:spcAft>
+                <a:spcPts val="1400"/>
+              </a:spcAft>
+            </a:pPr>
+            <a:r>
+              <a:rPr sz="2400">
+                <a:solidFill>
+                  <a:srgbClr val="1F2A37"/>
+                </a:solidFill>
+              </a:rPr>
+              <a:t>• C. The title</a:t>
+            </a:r>
+          </a:p>
+          <a:p>
+            <a:pPr>
+              <a:spcAft>
+                <a:spcPts val="1400"/>
+              </a:spcAft>
+            </a:pPr>
+            <a:r>
+              <a:rPr sz="2400">
+                <a:solidFill>
+                  <a:srgbClr val="1F2A37"/>
+                </a:solidFill>
+              </a:rPr>
+              <a:t>• D. The character buttons</a:t>
+            </a:r>
+          </a:p>
+          <a:p>
+            <a:pPr>
+              <a:spcAft>
+                <a:spcPts val="1400"/>
+              </a:spcAft>
+            </a:pPr>
+            <a:r>
+              <a:rPr sz="2400">
+                <a:solidFill>
+                  <a:srgbClr val="1F2A37"/>
+                </a:solidFill>
+              </a:rPr>
+              <a:t>• &lt;footer&gt; is the box for the very bottom of the page.</a:t>
+            </a:r>
+          </a:p>
+        </p:txBody>
+      </p:sp>
+    </p:spTree>
+  </p:cSld>
+  <p:clrMapOvr>
+    <a:masterClrMapping/>
+  </p:clrMapOvr>
+</p:sld>
+</file>
+
+<file path=ppt/slides/slide24.xml><?xml version="1.0" encoding="utf-8"?>
+<p:sld xmlns:a="http://schemas.openxmlformats.org/drawingml/2006/main" xmlns:p="http://schemas.openxmlformats.org/presentationml/2006/main" xmlns:r="http://schemas.openxmlformats.org/officeDocument/2006/relationships">
+  <p:cSld>
+    <p:spTree>
+      <p:nvGrpSpPr>
+        <p:cNvPr id="1" name=""/>
+        <p:cNvGrpSpPr/>
+        <p:nvPr/>
+      </p:nvGrpSpPr>
+      <p:grpSpPr/>
+      <p:sp>
+        <p:nvSpPr>
+          <p:cNvPr id="2" name="Title 1"/>
+          <p:cNvSpPr>
+            <a:spLocks noGrp="1"/>
+          </p:cNvSpPr>
+          <p:nvPr>
+            <p:ph type="title"/>
+          </p:nvPr>
+        </p:nvSpPr>
+        <p:spPr/>
+        <p:txBody>
+          <a:bodyPr/>
+          <a:lstStyle/>
+          <a:p>
+            <a:r>
+              <a:rPr sz="3800" b="1">
+                <a:solidFill>
+                  <a:srgbClr val="1F2A37"/>
+                </a:solidFill>
+              </a:rPr>
+              <a:t>&lt;strong&gt; makes the text inside it ...</a:t>
+            </a:r>
+          </a:p>
+        </p:txBody>
+      </p:sp>
+      <p:sp>
+        <p:nvSpPr>
+          <p:cNvPr id="3" name="TextBox 2"/>
+          <p:cNvSpPr txBox="1"/>
+          <p:nvPr/>
+        </p:nvSpPr>
+        <p:spPr>
+          <a:xfrm>
+            <a:off x="868680" y="502920"/>
+            <a:ext cx="5486400" cy="457200"/>
+          </a:xfrm>
+          <a:prstGeom prst="rect">
+            <a:avLst/>
+          </a:prstGeom>
+          <a:noFill/>
+        </p:spPr>
+        <p:txBody>
+          <a:bodyPr wrap="none">
+            <a:spAutoFit/>
+          </a:bodyPr>
+          <a:lstStyle/>
+          <a:p>
+            <a:r>
+              <a:rPr sz="1500" b="1">
+                <a:solidFill>
+                  <a:srgbClr val="01AEFD"/>
+                </a:solidFill>
+              </a:rPr>
+              <a:t>QUICK CHECK</a:t>
+            </a:r>
+          </a:p>
+        </p:txBody>
+      </p:sp>
+      <p:sp>
+        <p:nvSpPr>
+          <p:cNvPr id="4" name="TextBox 3"/>
+          <p:cNvSpPr txBox="1"/>
+          <p:nvPr/>
+        </p:nvSpPr>
+        <p:spPr>
+          <a:xfrm>
+            <a:off x="822960" y="1828800"/>
+            <a:ext cx="10515600" cy="4206240"/>
+          </a:xfrm>
+          <a:prstGeom prst="rect">
+            <a:avLst/>
+          </a:prstGeom>
+          <a:noFill/>
+        </p:spPr>
+        <p:txBody>
+          <a:bodyPr wrap="square">
+            <a:spAutoFit/>
+          </a:bodyPr>
+          <a:lstStyle/>
+          <a:p>
+            <a:pPr>
+              <a:spcAft>
+                <a:spcPts val="1400"/>
+              </a:spcAft>
+            </a:pPr>
+            <a:r>
+              <a:rPr sz="2400">
+                <a:solidFill>
+                  <a:srgbClr val="1F2A37"/>
+                </a:solidFill>
+              </a:rPr>
+              <a:t>• A. bold</a:t>
+            </a:r>
+          </a:p>
+          <a:p>
+            <a:pPr>
+              <a:spcAft>
+                <a:spcPts val="1400"/>
+              </a:spcAft>
+            </a:pPr>
+            <a:r>
+              <a:rPr sz="2400">
+                <a:solidFill>
+                  <a:srgbClr val="1F2A37"/>
+                </a:solidFill>
+              </a:rPr>
+              <a:t>• B. blue</a:t>
+            </a:r>
+          </a:p>
+          <a:p>
+            <a:pPr>
+              <a:spcAft>
+                <a:spcPts val="1400"/>
+              </a:spcAft>
+            </a:pPr>
+            <a:r>
+              <a:rPr sz="2400">
+                <a:solidFill>
+                  <a:srgbClr val="1F2A37"/>
+                </a:solidFill>
+              </a:rPr>
+              <a:t>• C. bigger</a:t>
+            </a:r>
+          </a:p>
+          <a:p>
+            <a:pPr>
+              <a:spcAft>
+                <a:spcPts val="1400"/>
+              </a:spcAft>
+            </a:pPr>
+            <a:r>
+              <a:rPr sz="2400">
+                <a:solidFill>
+                  <a:srgbClr val="1F2A37"/>
+                </a:solidFill>
+              </a:rPr>
+              <a:t>• D. hidden</a:t>
+            </a:r>
+          </a:p>
+          <a:p>
+            <a:pPr>
+              <a:spcAft>
+                <a:spcPts val="1400"/>
+              </a:spcAft>
+            </a:pPr>
+            <a:r>
+              <a:rPr sz="2400">
+                <a:solidFill>
+                  <a:srgbClr val="1F2A37"/>
+                </a:solidFill>
+              </a:rPr>
+              <a:t>• Pick one - the answer is on the next slide.</a:t>
+            </a:r>
+          </a:p>
+        </p:txBody>
+      </p:sp>
+    </p:spTree>
+  </p:cSld>
+  <p:clrMapOvr>
+    <a:masterClrMapping/>
+  </p:clrMapOvr>
+</p:sld>
+</file>
+
+<file path=ppt/slides/slide25.xml><?xml version="1.0" encoding="utf-8"?>
+<p:sld xmlns:a="http://schemas.openxmlformats.org/drawingml/2006/main" xmlns:p="http://schemas.openxmlformats.org/presentationml/2006/main" xmlns:r="http://schemas.openxmlformats.org/officeDocument/2006/relationships">
+  <p:cSld>
+    <p:spTree>
+      <p:nvGrpSpPr>
+        <p:cNvPr id="1" name=""/>
+        <p:cNvGrpSpPr/>
+        <p:nvPr/>
+      </p:nvGrpSpPr>
+      <p:grpSpPr/>
+      <p:sp>
+        <p:nvSpPr>
+          <p:cNvPr id="2" name="Title 1"/>
+          <p:cNvSpPr>
+            <a:spLocks noGrp="1"/>
+          </p:cNvSpPr>
+          <p:nvPr>
+            <p:ph type="title"/>
+          </p:nvPr>
+        </p:nvSpPr>
+        <p:spPr/>
+        <p:txBody>
+          <a:bodyPr/>
+          <a:lstStyle/>
+          <a:p>
+            <a:r>
+              <a:rPr sz="3800" b="1">
+                <a:solidFill>
+                  <a:srgbClr val="1F2A37"/>
+                </a:solidFill>
+              </a:rPr>
+              <a:t>&lt;strong&gt; makes the text inside it ...</a:t>
+            </a:r>
+          </a:p>
+        </p:txBody>
+      </p:sp>
+      <p:sp>
+        <p:nvSpPr>
+          <p:cNvPr id="3" name="TextBox 2"/>
+          <p:cNvSpPr txBox="1"/>
+          <p:nvPr/>
+        </p:nvSpPr>
+        <p:spPr>
+          <a:xfrm>
+            <a:off x="868680" y="502920"/>
+            <a:ext cx="5486400" cy="457200"/>
+          </a:xfrm>
+          <a:prstGeom prst="rect">
+            <a:avLst/>
+          </a:prstGeom>
+          <a:noFill/>
+        </p:spPr>
+        <p:txBody>
+          <a:bodyPr wrap="none">
+            <a:spAutoFit/>
+          </a:bodyPr>
+          <a:lstStyle/>
+          <a:p>
+            <a:r>
+              <a:rPr sz="1500" b="1">
+                <a:solidFill>
+                  <a:srgbClr val="01AEFD"/>
+                </a:solidFill>
+              </a:rPr>
+              <a:t>ANSWER</a:t>
+            </a:r>
+          </a:p>
+        </p:txBody>
+      </p:sp>
+      <p:sp>
+        <p:nvSpPr>
+          <p:cNvPr id="4" name="TextBox 3"/>
+          <p:cNvSpPr txBox="1"/>
+          <p:nvPr/>
+        </p:nvSpPr>
+        <p:spPr>
+          <a:xfrm>
+            <a:off x="822960" y="1828800"/>
+            <a:ext cx="10515600" cy="4206240"/>
+          </a:xfrm>
+          <a:prstGeom prst="rect">
+            <a:avLst/>
+          </a:prstGeom>
+          <a:noFill/>
+        </p:spPr>
+        <p:txBody>
+          <a:bodyPr wrap="square">
+            <a:spAutoFit/>
+          </a:bodyPr>
+          <a:lstStyle/>
+          <a:p>
+            <a:pPr>
+              <a:spcAft>
+                <a:spcPts val="1400"/>
+              </a:spcAft>
+            </a:pPr>
+            <a:r>
+              <a:rPr sz="2400">
+                <a:solidFill>
+                  <a:srgbClr val="1F2A37"/>
+                </a:solidFill>
+              </a:rPr>
+              <a:t>• A. bold (correct)</a:t>
+            </a:r>
+          </a:p>
+          <a:p>
+            <a:pPr>
+              <a:spcAft>
+                <a:spcPts val="1400"/>
+              </a:spcAft>
+            </a:pPr>
+            <a:r>
+              <a:rPr sz="2400">
+                <a:solidFill>
+                  <a:srgbClr val="1F2A37"/>
+                </a:solidFill>
+              </a:rPr>
+              <a:t>• B. blue</a:t>
+            </a:r>
+          </a:p>
+          <a:p>
+            <a:pPr>
+              <a:spcAft>
+                <a:spcPts val="1400"/>
+              </a:spcAft>
+            </a:pPr>
+            <a:r>
+              <a:rPr sz="2400">
+                <a:solidFill>
+                  <a:srgbClr val="1F2A37"/>
+                </a:solidFill>
+              </a:rPr>
+              <a:t>• C. bigger</a:t>
+            </a:r>
+          </a:p>
+          <a:p>
+            <a:pPr>
+              <a:spcAft>
+                <a:spcPts val="1400"/>
+              </a:spcAft>
+            </a:pPr>
+            <a:r>
+              <a:rPr sz="2400">
+                <a:solidFill>
+                  <a:srgbClr val="1F2A37"/>
+                </a:solidFill>
+              </a:rPr>
+              <a:t>• D. hidden</a:t>
+            </a:r>
+          </a:p>
+          <a:p>
+            <a:pPr>
+              <a:spcAft>
+                <a:spcPts val="1400"/>
+              </a:spcAft>
+            </a:pPr>
+            <a:r>
+              <a:rPr sz="2400">
+                <a:solidFill>
+                  <a:srgbClr val="1F2A37"/>
+                </a:solidFill>
+              </a:rPr>
+              <a:t>• &lt;strong&gt; renders its text bold so it stands out.</a:t>
+            </a:r>
+          </a:p>
+        </p:txBody>
+      </p:sp>
+    </p:spTree>
+  </p:cSld>
+  <p:clrMapOvr>
+    <a:masterClrMapping/>
+  </p:clrMapOvr>
+</p:sld>
+</file>
+
+<file path=ppt/slides/slide26.xml><?xml version="1.0" encoding="utf-8"?>
+<p:sld xmlns:a="http://schemas.openxmlformats.org/drawingml/2006/main" xmlns:p="http://schemas.openxmlformats.org/presentationml/2006/main" xmlns:r="http://schemas.openxmlformats.org/officeDocument/2006/relationships">
+  <p:cSld>
+    <p:spTree>
+      <p:nvGrpSpPr>
+        <p:cNvPr id="1" name=""/>
+        <p:cNvGrpSpPr/>
+        <p:nvPr/>
+      </p:nvGrpSpPr>
+      <p:grpSpPr/>
+      <p:sp>
+        <p:nvSpPr>
+          <p:cNvPr id="2" name="Title 1"/>
+          <p:cNvSpPr>
+            <a:spLocks noGrp="1"/>
+          </p:cNvSpPr>
+          <p:nvPr>
+            <p:ph type="title"/>
+          </p:nvPr>
+        </p:nvSpPr>
+        <p:spPr/>
+        <p:txBody>
+          <a:bodyPr/>
+          <a:lstStyle/>
+          <a:p>
+            <a:r>
+              <a:rPr sz="3800" b="1">
+                <a:solidFill>
+                  <a:srgbClr val="1F2A37"/>
+                </a:solidFill>
+              </a:rPr>
+              <a:t>From week 7 - how does a stateless AI 'remember' your conversation?</a:t>
+            </a:r>
+          </a:p>
+        </p:txBody>
+      </p:sp>
+      <p:sp>
+        <p:nvSpPr>
+          <p:cNvPr id="3" name="TextBox 2"/>
+          <p:cNvSpPr txBox="1"/>
+          <p:nvPr/>
+        </p:nvSpPr>
+        <p:spPr>
+          <a:xfrm>
+            <a:off x="868680" y="502920"/>
+            <a:ext cx="5486400" cy="457200"/>
+          </a:xfrm>
+          <a:prstGeom prst="rect">
+            <a:avLst/>
+          </a:prstGeom>
+          <a:noFill/>
+        </p:spPr>
+        <p:txBody>
+          <a:bodyPr wrap="none">
+            <a:spAutoFit/>
+          </a:bodyPr>
+          <a:lstStyle/>
+          <a:p>
+            <a:r>
+              <a:rPr sz="1500" b="1">
+                <a:solidFill>
+                  <a:srgbClr val="01AEFD"/>
+                </a:solidFill>
+              </a:rPr>
+              <a:t>QUICK CHECK</a:t>
+            </a:r>
+          </a:p>
+        </p:txBody>
+      </p:sp>
+      <p:sp>
+        <p:nvSpPr>
+          <p:cNvPr id="4" name="TextBox 3"/>
+          <p:cNvSpPr txBox="1"/>
+          <p:nvPr/>
+        </p:nvSpPr>
+        <p:spPr>
+          <a:xfrm>
+            <a:off x="822960" y="1828800"/>
+            <a:ext cx="10515600" cy="4206240"/>
+          </a:xfrm>
+          <a:prstGeom prst="rect">
+            <a:avLst/>
+          </a:prstGeom>
+          <a:noFill/>
+        </p:spPr>
+        <p:txBody>
+          <a:bodyPr wrap="square">
+            <a:spAutoFit/>
+          </a:bodyPr>
+          <a:lstStyle/>
+          <a:p>
+            <a:pPr>
+              <a:spcAft>
+                <a:spcPts val="1400"/>
+              </a:spcAft>
+            </a:pPr>
+            <a:r>
+              <a:rPr sz="2400">
+                <a:solidFill>
+                  <a:srgbClr val="1F2A37"/>
+                </a:solidFill>
+              </a:rPr>
+              <a:t>• A. You keep a history array and resend all of it every time</a:t>
+            </a:r>
+          </a:p>
+          <a:p>
+            <a:pPr>
+              <a:spcAft>
+                <a:spcPts val="1400"/>
+              </a:spcAft>
+            </a:pPr>
+            <a:r>
+              <a:rPr sz="2400">
+                <a:solidFill>
+                  <a:srgbClr val="1F2A37"/>
+                </a:solidFill>
+              </a:rPr>
+              <a:t>• B. The server stores it</a:t>
+            </a:r>
+          </a:p>
+          <a:p>
+            <a:pPr>
+              <a:spcAft>
+                <a:spcPts val="1400"/>
+              </a:spcAft>
+            </a:pPr>
+            <a:r>
+              <a:rPr sz="2400">
+                <a:solidFill>
+                  <a:srgbClr val="1F2A37"/>
+                </a:solidFill>
+              </a:rPr>
+              <a:t>• C. It uses cookies</a:t>
+            </a:r>
+          </a:p>
+          <a:p>
+            <a:pPr>
+              <a:spcAft>
+                <a:spcPts val="1400"/>
+              </a:spcAft>
+            </a:pPr>
+            <a:r>
+              <a:rPr sz="2400">
+                <a:solidFill>
+                  <a:srgbClr val="1F2A37"/>
+                </a:solidFill>
+              </a:rPr>
+              <a:t>• D. It does not remember</a:t>
+            </a:r>
+          </a:p>
+          <a:p>
+            <a:pPr>
+              <a:spcAft>
+                <a:spcPts val="1400"/>
+              </a:spcAft>
+            </a:pPr>
+            <a:r>
+              <a:rPr sz="2400">
+                <a:solidFill>
+                  <a:srgbClr val="1F2A37"/>
+                </a:solidFill>
+              </a:rPr>
+              <a:t>• Pick one - the answer is on the next slide.</a:t>
+            </a:r>
+          </a:p>
+        </p:txBody>
+      </p:sp>
+    </p:spTree>
+  </p:cSld>
+  <p:clrMapOvr>
+    <a:masterClrMapping/>
+  </p:clrMapOvr>
+</p:sld>
+</file>
+
+<file path=ppt/slides/slide27.xml><?xml version="1.0" encoding="utf-8"?>
+<p:sld xmlns:a="http://schemas.openxmlformats.org/drawingml/2006/main" xmlns:p="http://schemas.openxmlformats.org/presentationml/2006/main" xmlns:r="http://schemas.openxmlformats.org/officeDocument/2006/relationships">
+  <p:cSld>
+    <p:spTree>
+      <p:nvGrpSpPr>
+        <p:cNvPr id="1" name=""/>
+        <p:cNvGrpSpPr/>
+        <p:nvPr/>
+      </p:nvGrpSpPr>
+      <p:grpSpPr/>
+      <p:sp>
+        <p:nvSpPr>
+          <p:cNvPr id="2" name="Title 1"/>
+          <p:cNvSpPr>
+            <a:spLocks noGrp="1"/>
+          </p:cNvSpPr>
+          <p:nvPr>
+            <p:ph type="title"/>
+          </p:nvPr>
+        </p:nvSpPr>
+        <p:spPr/>
+        <p:txBody>
+          <a:bodyPr/>
+          <a:lstStyle/>
+          <a:p>
+            <a:r>
+              <a:rPr sz="3800" b="1">
+                <a:solidFill>
+                  <a:srgbClr val="1F2A37"/>
+                </a:solidFill>
+              </a:rPr>
+              <a:t>From week 7 - how does a stateless AI 'remember' your conversation?</a:t>
+            </a:r>
+          </a:p>
+        </p:txBody>
+      </p:sp>
+      <p:sp>
+        <p:nvSpPr>
+          <p:cNvPr id="3" name="TextBox 2"/>
+          <p:cNvSpPr txBox="1"/>
+          <p:nvPr/>
+        </p:nvSpPr>
+        <p:spPr>
+          <a:xfrm>
+            <a:off x="868680" y="502920"/>
+            <a:ext cx="5486400" cy="457200"/>
+          </a:xfrm>
+          <a:prstGeom prst="rect">
+            <a:avLst/>
+          </a:prstGeom>
+          <a:noFill/>
+        </p:spPr>
+        <p:txBody>
+          <a:bodyPr wrap="none">
+            <a:spAutoFit/>
+          </a:bodyPr>
+          <a:lstStyle/>
+          <a:p>
+            <a:r>
+              <a:rPr sz="1500" b="1">
+                <a:solidFill>
+                  <a:srgbClr val="01AEFD"/>
+                </a:solidFill>
+              </a:rPr>
+              <a:t>ANSWER</a:t>
+            </a:r>
+          </a:p>
+        </p:txBody>
+      </p:sp>
+      <p:sp>
+        <p:nvSpPr>
+          <p:cNvPr id="4" name="TextBox 3"/>
+          <p:cNvSpPr txBox="1"/>
+          <p:nvPr/>
+        </p:nvSpPr>
+        <p:spPr>
+          <a:xfrm>
+            <a:off x="822960" y="1828800"/>
+            <a:ext cx="10515600" cy="4206240"/>
+          </a:xfrm>
+          <a:prstGeom prst="rect">
+            <a:avLst/>
+          </a:prstGeom>
+          <a:noFill/>
+        </p:spPr>
+        <p:txBody>
+          <a:bodyPr wrap="square">
+            <a:spAutoFit/>
+          </a:bodyPr>
+          <a:lstStyle/>
+          <a:p>
+            <a:pPr>
+              <a:spcAft>
+                <a:spcPts val="1400"/>
+              </a:spcAft>
+            </a:pPr>
+            <a:r>
+              <a:rPr sz="2400">
+                <a:solidFill>
+                  <a:srgbClr val="1F2A37"/>
+                </a:solidFill>
+              </a:rPr>
+              <a:t>• A. You keep a history array and resend all of it every time (correct)</a:t>
+            </a:r>
+          </a:p>
+          <a:p>
+            <a:pPr>
+              <a:spcAft>
+                <a:spcPts val="1400"/>
+              </a:spcAft>
+            </a:pPr>
+            <a:r>
+              <a:rPr sz="2400">
+                <a:solidFill>
+                  <a:srgbClr val="1F2A37"/>
+                </a:solidFill>
+              </a:rPr>
+              <a:t>• B. The server stores it</a:t>
+            </a:r>
+          </a:p>
+          <a:p>
+            <a:pPr>
+              <a:spcAft>
+                <a:spcPts val="1400"/>
+              </a:spcAft>
+            </a:pPr>
+            <a:r>
+              <a:rPr sz="2400">
+                <a:solidFill>
+                  <a:srgbClr val="1F2A37"/>
+                </a:solidFill>
+              </a:rPr>
+              <a:t>• C. It uses cookies</a:t>
+            </a:r>
+          </a:p>
+          <a:p>
+            <a:pPr>
+              <a:spcAft>
+                <a:spcPts val="1400"/>
+              </a:spcAft>
+            </a:pPr>
+            <a:r>
+              <a:rPr sz="2400">
+                <a:solidFill>
+                  <a:srgbClr val="1F2A37"/>
+                </a:solidFill>
+              </a:rPr>
+              <a:t>• D. It does not remember</a:t>
+            </a:r>
+          </a:p>
+          <a:p>
+            <a:pPr>
+              <a:spcAft>
+                <a:spcPts val="1400"/>
+              </a:spcAft>
+            </a:pPr>
+            <a:r>
+              <a:rPr sz="2400">
+                <a:solidFill>
+                  <a:srgbClr val="1F2A37"/>
+                </a:solidFill>
+              </a:rPr>
+              <a:t>• The model remembers nothing between calls; you send the whole history each request.</a:t>
+            </a:r>
+          </a:p>
+        </p:txBody>
+      </p:sp>
+    </p:spTree>
+  </p:cSld>
+  <p:clrMapOvr>
+    <a:masterClrMapping/>
+  </p:clrMapOvr>
+</p:sld>
+</file>
+
+<file path=ppt/slides/slide28.xml><?xml version="1.0" encoding="utf-8"?>
+<p:sld xmlns:a="http://schemas.openxmlformats.org/drawingml/2006/main" xmlns:p="http://schemas.openxmlformats.org/presentationml/2006/main" xmlns:r="http://schemas.openxmlformats.org/officeDocument/2006/relationships">
+  <p:cSld>
+    <p:spTree>
+      <p:nvGrpSpPr>
+        <p:cNvPr id="1" name=""/>
+        <p:cNvGrpSpPr/>
+        <p:nvPr/>
+      </p:nvGrpSpPr>
+      <p:grpSpPr/>
+      <p:sp>
+        <p:nvSpPr>
+          <p:cNvPr id="2" name="Title 1"/>
+          <p:cNvSpPr>
+            <a:spLocks noGrp="1"/>
+          </p:cNvSpPr>
+          <p:nvPr>
+            <p:ph type="title"/>
+          </p:nvPr>
+        </p:nvSpPr>
+        <p:spPr/>
+        <p:txBody>
+          <a:bodyPr/>
+          <a:lstStyle/>
+          <a:p>
+            <a:r>
+              <a:rPr sz="3800" b="1">
+                <a:solidFill>
+                  <a:srgbClr val="1F2A37"/>
+                </a:solidFill>
+              </a:rPr>
+              <a:t>From week 10 - stream: true makes the reply ...</a:t>
+            </a:r>
+          </a:p>
+        </p:txBody>
+      </p:sp>
+      <p:sp>
+        <p:nvSpPr>
+          <p:cNvPr id="3" name="TextBox 2"/>
+          <p:cNvSpPr txBox="1"/>
+          <p:nvPr/>
+        </p:nvSpPr>
+        <p:spPr>
+          <a:xfrm>
+            <a:off x="868680" y="502920"/>
+            <a:ext cx="5486400" cy="457200"/>
+          </a:xfrm>
+          <a:prstGeom prst="rect">
+            <a:avLst/>
+          </a:prstGeom>
+          <a:noFill/>
+        </p:spPr>
+        <p:txBody>
+          <a:bodyPr wrap="none">
+            <a:spAutoFit/>
+          </a:bodyPr>
+          <a:lstStyle/>
+          <a:p>
+            <a:r>
+              <a:rPr sz="1500" b="1">
+                <a:solidFill>
+                  <a:srgbClr val="01AEFD"/>
+                </a:solidFill>
+              </a:rPr>
+              <a:t>QUICK CHECK</a:t>
+            </a:r>
+          </a:p>
+        </p:txBody>
+      </p:sp>
+      <p:sp>
+        <p:nvSpPr>
+          <p:cNvPr id="4" name="TextBox 3"/>
+          <p:cNvSpPr txBox="1"/>
+          <p:nvPr/>
+        </p:nvSpPr>
+        <p:spPr>
+          <a:xfrm>
+            <a:off x="822960" y="1828800"/>
+            <a:ext cx="10515600" cy="4206240"/>
+          </a:xfrm>
+          <a:prstGeom prst="rect">
+            <a:avLst/>
+          </a:prstGeom>
+          <a:noFill/>
+        </p:spPr>
+        <p:txBody>
+          <a:bodyPr wrap="square">
+            <a:spAutoFit/>
+          </a:bodyPr>
+          <a:lstStyle/>
+          <a:p>
+            <a:pPr>
+              <a:spcAft>
+                <a:spcPts val="1400"/>
+              </a:spcAft>
+            </a:pPr>
+            <a:r>
+              <a:rPr sz="2400">
+                <a:solidFill>
+                  <a:srgbClr val="1F2A37"/>
+                </a:solidFill>
+              </a:rPr>
+              <a:t>• A. arrive in pieces as it is written</a:t>
+            </a:r>
+          </a:p>
+          <a:p>
+            <a:pPr>
+              <a:spcAft>
+                <a:spcPts val="1400"/>
+              </a:spcAft>
+            </a:pPr>
+            <a:r>
+              <a:rPr sz="2400">
+                <a:solidFill>
+                  <a:srgbClr val="1F2A37"/>
+                </a:solidFill>
+              </a:rPr>
+              <a:t>• B. shorter</a:t>
+            </a:r>
+          </a:p>
+          <a:p>
+            <a:pPr>
+              <a:spcAft>
+                <a:spcPts val="1400"/>
+              </a:spcAft>
+            </a:pPr>
+            <a:r>
+              <a:rPr sz="2400">
+                <a:solidFill>
+                  <a:srgbClr val="1F2A37"/>
+                </a:solidFill>
+              </a:rPr>
+              <a:t>• C. faster overall</a:t>
+            </a:r>
+          </a:p>
+          <a:p>
+            <a:pPr>
+              <a:spcAft>
+                <a:spcPts val="1400"/>
+              </a:spcAft>
+            </a:pPr>
+            <a:r>
+              <a:rPr sz="2400">
+                <a:solidFill>
+                  <a:srgbClr val="1F2A37"/>
+                </a:solidFill>
+              </a:rPr>
+              <a:t>• D. saved automatically</a:t>
+            </a:r>
+          </a:p>
+          <a:p>
+            <a:pPr>
+              <a:spcAft>
+                <a:spcPts val="1400"/>
+              </a:spcAft>
+            </a:pPr>
+            <a:r>
+              <a:rPr sz="2400">
+                <a:solidFill>
+                  <a:srgbClr val="1F2A37"/>
+                </a:solidFill>
+              </a:rPr>
+              <a:t>• Pick one - the answer is on the next slide.</a:t>
+            </a:r>
+          </a:p>
+        </p:txBody>
+      </p:sp>
+    </p:spTree>
+  </p:cSld>
+  <p:clrMapOvr>
+    <a:masterClrMapping/>
+  </p:clrMapOvr>
+</p:sld>
+</file>
+
+<file path=ppt/slides/slide29.xml><?xml version="1.0" encoding="utf-8"?>
+<p:sld xmlns:a="http://schemas.openxmlformats.org/drawingml/2006/main" xmlns:p="http://schemas.openxmlformats.org/presentationml/2006/main" xmlns:r="http://schemas.openxmlformats.org/officeDocument/2006/relationships">
+  <p:cSld>
+    <p:spTree>
+      <p:nvGrpSpPr>
+        <p:cNvPr id="1" name=""/>
+        <p:cNvGrpSpPr/>
+        <p:nvPr/>
+      </p:nvGrpSpPr>
+      <p:grpSpPr/>
+      <p:sp>
+        <p:nvSpPr>
+          <p:cNvPr id="2" name="Title 1"/>
+          <p:cNvSpPr>
+            <a:spLocks noGrp="1"/>
+          </p:cNvSpPr>
+          <p:nvPr>
+            <p:ph type="title"/>
+          </p:nvPr>
+        </p:nvSpPr>
+        <p:spPr/>
+        <p:txBody>
+          <a:bodyPr/>
+          <a:lstStyle/>
+          <a:p>
+            <a:r>
+              <a:rPr sz="3800" b="1">
+                <a:solidFill>
+                  <a:srgbClr val="1F2A37"/>
+                </a:solidFill>
+              </a:rPr>
+              <a:t>From week 10 - stream: true makes the reply ...</a:t>
+            </a:r>
+          </a:p>
+        </p:txBody>
+      </p:sp>
+      <p:sp>
+        <p:nvSpPr>
+          <p:cNvPr id="3" name="TextBox 2"/>
+          <p:cNvSpPr txBox="1"/>
+          <p:nvPr/>
+        </p:nvSpPr>
+        <p:spPr>
+          <a:xfrm>
+            <a:off x="868680" y="502920"/>
+            <a:ext cx="5486400" cy="457200"/>
+          </a:xfrm>
+          <a:prstGeom prst="rect">
+            <a:avLst/>
+          </a:prstGeom>
+          <a:noFill/>
+        </p:spPr>
+        <p:txBody>
+          <a:bodyPr wrap="none">
+            <a:spAutoFit/>
+          </a:bodyPr>
+          <a:lstStyle/>
+          <a:p>
+            <a:r>
+              <a:rPr sz="1500" b="1">
+                <a:solidFill>
+                  <a:srgbClr val="01AEFD"/>
+                </a:solidFill>
+              </a:rPr>
+              <a:t>ANSWER</a:t>
+            </a:r>
+          </a:p>
+        </p:txBody>
+      </p:sp>
+      <p:sp>
+        <p:nvSpPr>
+          <p:cNvPr id="4" name="TextBox 3"/>
+          <p:cNvSpPr txBox="1"/>
+          <p:nvPr/>
+        </p:nvSpPr>
+        <p:spPr>
+          <a:xfrm>
+            <a:off x="822960" y="1828800"/>
+            <a:ext cx="10515600" cy="4206240"/>
+          </a:xfrm>
+          <a:prstGeom prst="rect">
+            <a:avLst/>
+          </a:prstGeom>
+          <a:noFill/>
+        </p:spPr>
+        <p:txBody>
+          <a:bodyPr wrap="square">
+            <a:spAutoFit/>
+          </a:bodyPr>
+          <a:lstStyle/>
+          <a:p>
+            <a:pPr>
+              <a:spcAft>
+                <a:spcPts val="1400"/>
+              </a:spcAft>
+            </a:pPr>
+            <a:r>
+              <a:rPr sz="2400">
+                <a:solidFill>
+                  <a:srgbClr val="1F2A37"/>
+                </a:solidFill>
+              </a:rPr>
+              <a:t>• A. arrive in pieces as it is written (correct)</a:t>
+            </a:r>
+          </a:p>
+          <a:p>
+            <a:pPr>
+              <a:spcAft>
+                <a:spcPts val="1400"/>
+              </a:spcAft>
+            </a:pPr>
+            <a:r>
+              <a:rPr sz="2400">
+                <a:solidFill>
+                  <a:srgbClr val="1F2A37"/>
+                </a:solidFill>
+              </a:rPr>
+              <a:t>• B. shorter</a:t>
+            </a:r>
+          </a:p>
+          <a:p>
+            <a:pPr>
+              <a:spcAft>
+                <a:spcPts val="1400"/>
+              </a:spcAft>
+            </a:pPr>
+            <a:r>
+              <a:rPr sz="2400">
+                <a:solidFill>
+                  <a:srgbClr val="1F2A37"/>
+                </a:solidFill>
+              </a:rPr>
+              <a:t>• C. faster overall</a:t>
+            </a:r>
+          </a:p>
+          <a:p>
+            <a:pPr>
+              <a:spcAft>
+                <a:spcPts val="1400"/>
+              </a:spcAft>
+            </a:pPr>
+            <a:r>
+              <a:rPr sz="2400">
+                <a:solidFill>
+                  <a:srgbClr val="1F2A37"/>
+                </a:solidFill>
+              </a:rPr>
+              <a:t>• D. saved automatically</a:t>
+            </a:r>
+          </a:p>
+          <a:p>
+            <a:pPr>
+              <a:spcAft>
+                <a:spcPts val="1400"/>
+              </a:spcAft>
+            </a:pPr>
+            <a:r>
+              <a:rPr sz="2400">
+                <a:solidFill>
+                  <a:srgbClr val="1F2A37"/>
+                </a:solidFill>
+              </a:rPr>
+              <a:t>• Streaming shows the words as they land instead of waiting for the whole answer.</a:t>
+            </a:r>
+          </a:p>
+        </p:txBody>
+      </p:sp>
+    </p:spTree>
+  </p:cSld>
+  <p:clrMapOvr>
+    <a:masterClrMapping/>
+  </p:clrMapOvr>
+</p:sld>
+</file>
+
+<file path=ppt/slides/slide3.xml><?xml version="1.0" encoding="utf-8"?>
+<p:sld xmlns:a="http://schemas.openxmlformats.org/drawingml/2006/main" xmlns:p="http://schemas.openxmlformats.org/presentationml/2006/main" xmlns:r="http://schemas.openxmlformats.org/officeDocument/2006/relationships">
+  <p:cSld>
+    <p:spTree>
+      <p:nvGrpSpPr>
+        <p:cNvPr id="1" name=""/>
+        <p:cNvGrpSpPr/>
+        <p:nvPr/>
+      </p:nvGrpSpPr>
+      <p:grpSpPr/>
+      <p:sp>
+        <p:nvSpPr>
+          <p:cNvPr id="2" name="Title 1"/>
+          <p:cNvSpPr>
+            <a:spLocks noGrp="1"/>
+          </p:cNvSpPr>
+          <p:nvPr>
+            <p:ph type="title"/>
+          </p:nvPr>
+        </p:nvSpPr>
+        <p:spPr/>
+        <p:txBody>
+          <a:bodyPr/>
+          <a:lstStyle/>
+          <a:p>
+            <a:r>
+              <a:rPr sz="3800" b="1">
+                <a:solidFill>
+                  <a:srgbClr val="1F2A37"/>
+                </a:solidFill>
+              </a:rPr>
+              <a:t>Twenty minutes to finish</a:t>
+            </a:r>
+          </a:p>
+        </p:txBody>
+      </p:sp>
+      <p:sp>
+        <p:nvSpPr>
+          <p:cNvPr id="3" name="TextBox 2"/>
+          <p:cNvSpPr txBox="1"/>
+          <p:nvPr/>
+        </p:nvSpPr>
+        <p:spPr>
+          <a:xfrm>
+            <a:off x="822960" y="1828800"/>
+            <a:ext cx="10515600" cy="4206240"/>
+          </a:xfrm>
+          <a:prstGeom prst="rect">
+            <a:avLst/>
+          </a:prstGeom>
+          <a:noFill/>
+        </p:spPr>
+        <p:txBody>
+          <a:bodyPr wrap="square">
+            <a:spAutoFit/>
+          </a:bodyPr>
+          <a:lstStyle/>
+          <a:p>
+            <a:pPr>
+              <a:spcAft>
+                <a:spcPts val="1400"/>
+              </a:spcAft>
+            </a:pPr>
+            <a:r>
+              <a:rPr sz="2800">
+                <a:solidFill>
+                  <a:srgbClr val="01AEFD"/>
+                </a:solidFill>
+              </a:rPr>
+              <a:t>No new features</a:t>
+            </a:r>
+          </a:p>
+          <a:p>
+            <a:pPr>
+              <a:spcAft>
+                <a:spcPts val="1400"/>
+              </a:spcAft>
+            </a:pPr>
+            <a:r>
+              <a:rPr sz="2400">
+                <a:solidFill>
+                  <a:srgbClr val="1F2A37"/>
+                </a:solidFill>
+              </a:rPr>
+              <a:t>• Sign the credits - put your own name in</a:t>
+            </a:r>
+          </a:p>
+          <a:p>
+            <a:pPr>
+              <a:spcAft>
+                <a:spcPts val="1400"/>
+              </a:spcAft>
+            </a:pPr>
+            <a:r>
+              <a:rPr sz="2400">
+                <a:solidFill>
+                  <a:srgbClr val="1F2A37"/>
+                </a:solidFill>
+              </a:rPr>
+              <a:t>• Fix the one annoying thing</a:t>
+            </a:r>
+          </a:p>
+          <a:p>
+            <a:pPr>
+              <a:spcAft>
+                <a:spcPts val="1400"/>
+              </a:spcAft>
+            </a:pPr>
+            <a:r>
+              <a:rPr sz="2400">
+                <a:solidFill>
+                  <a:srgbClr val="1F2A37"/>
+                </a:solidFill>
+              </a:rPr>
+              <a:t>• Make it survive a stranger</a:t>
+            </a:r>
+          </a:p>
+        </p:txBody>
+      </p:sp>
+    </p:spTree>
+  </p:cSld>
+  <p:clrMapOvr>
+    <a:masterClrMapping/>
+  </p:clrMapOvr>
+</p:sld>
+</file>
+
+<file path=ppt/slides/slide30.xml><?xml version="1.0" encoding="utf-8"?>
+<p:sld xmlns:a="http://schemas.openxmlformats.org/drawingml/2006/main" xmlns:p="http://schemas.openxmlformats.org/presentationml/2006/main" xmlns:r="http://schemas.openxmlformats.org/officeDocument/2006/relationships">
+  <p:cSld>
+    <p:spTree>
+      <p:nvGrpSpPr>
+        <p:cNvPr id="1" name=""/>
+        <p:cNvGrpSpPr/>
+        <p:nvPr/>
+      </p:nvGrpSpPr>
+      <p:grpSpPr/>
+      <p:sp>
+        <p:nvSpPr>
+          <p:cNvPr id="2" name="Title 1"/>
+          <p:cNvSpPr>
+            <a:spLocks noGrp="1"/>
+          </p:cNvSpPr>
+          <p:nvPr>
+            <p:ph type="title"/>
+          </p:nvPr>
+        </p:nvSpPr>
+        <p:spPr/>
+        <p:txBody>
+          <a:bodyPr/>
+          <a:lstStyle/>
+          <a:p>
+            <a:r>
+              <a:rPr sz="3800" b="1">
+                <a:solidFill>
+                  <a:srgbClr val="1F2A37"/>
+                </a:solidFill>
+              </a:rPr>
+              <a:t>From week 11 - what draws each streamed piece on screen?</a:t>
+            </a:r>
+          </a:p>
+        </p:txBody>
+      </p:sp>
+      <p:sp>
+        <p:nvSpPr>
+          <p:cNvPr id="3" name="TextBox 2"/>
+          <p:cNvSpPr txBox="1"/>
+          <p:nvPr/>
+        </p:nvSpPr>
+        <p:spPr>
+          <a:xfrm>
+            <a:off x="868680" y="502920"/>
+            <a:ext cx="5486400" cy="457200"/>
+          </a:xfrm>
+          <a:prstGeom prst="rect">
+            <a:avLst/>
+          </a:prstGeom>
+          <a:noFill/>
+        </p:spPr>
+        <p:txBody>
+          <a:bodyPr wrap="none">
+            <a:spAutoFit/>
+          </a:bodyPr>
+          <a:lstStyle/>
+          <a:p>
+            <a:r>
+              <a:rPr sz="1500" b="1">
+                <a:solidFill>
+                  <a:srgbClr val="01AEFD"/>
+                </a:solidFill>
+              </a:rPr>
+              <a:t>QUICK CHECK</a:t>
+            </a:r>
+          </a:p>
+        </p:txBody>
+      </p:sp>
+      <p:sp>
+        <p:nvSpPr>
+          <p:cNvPr id="4" name="TextBox 3"/>
+          <p:cNvSpPr txBox="1"/>
+          <p:nvPr/>
+        </p:nvSpPr>
+        <p:spPr>
+          <a:xfrm>
+            <a:off x="822960" y="1828800"/>
+            <a:ext cx="10515600" cy="4206240"/>
+          </a:xfrm>
+          <a:prstGeom prst="rect">
+            <a:avLst/>
+          </a:prstGeom>
+          <a:noFill/>
+        </p:spPr>
+        <p:txBody>
+          <a:bodyPr wrap="square">
+            <a:spAutoFit/>
+          </a:bodyPr>
+          <a:lstStyle/>
+          <a:p>
+            <a:pPr>
+              <a:spcAft>
+                <a:spcPts val="1400"/>
+              </a:spcAft>
+            </a:pPr>
+            <a:r>
+              <a:rPr sz="2400">
+                <a:solidFill>
+                  <a:srgbClr val="1F2A37"/>
+                </a:solidFill>
+              </a:rPr>
+              <a:t>• A. onPiece, the function passed into askAI</a:t>
+            </a:r>
+          </a:p>
+          <a:p>
+            <a:pPr>
+              <a:spcAft>
+                <a:spcPts val="1400"/>
+              </a:spcAft>
+            </a:pPr>
+            <a:r>
+              <a:rPr sz="2400">
+                <a:solidFill>
+                  <a:srgbClr val="1F2A37"/>
+                </a:solidFill>
+              </a:rPr>
+              <a:t>• B. the server</a:t>
+            </a:r>
+          </a:p>
+          <a:p>
+            <a:pPr>
+              <a:spcAft>
+                <a:spcPts val="1400"/>
+              </a:spcAft>
+            </a:pPr>
+            <a:r>
+              <a:rPr sz="2400">
+                <a:solidFill>
+                  <a:srgbClr val="1F2A37"/>
+                </a:solidFill>
+              </a:rPr>
+              <a:t>• C. a timer</a:t>
+            </a:r>
+          </a:p>
+          <a:p>
+            <a:pPr>
+              <a:spcAft>
+                <a:spcPts val="1400"/>
+              </a:spcAft>
+            </a:pPr>
+            <a:r>
+              <a:rPr sz="2400">
+                <a:solidFill>
+                  <a:srgbClr val="1F2A37"/>
+                </a:solidFill>
+              </a:rPr>
+              <a:t>• D. trimHistory</a:t>
+            </a:r>
+          </a:p>
+          <a:p>
+            <a:pPr>
+              <a:spcAft>
+                <a:spcPts val="1400"/>
+              </a:spcAft>
+            </a:pPr>
+            <a:r>
+              <a:rPr sz="2400">
+                <a:solidFill>
+                  <a:srgbClr val="1F2A37"/>
+                </a:solidFill>
+              </a:rPr>
+              <a:t>• Pick one - the answer is on the next slide.</a:t>
+            </a:r>
+          </a:p>
+        </p:txBody>
+      </p:sp>
+    </p:spTree>
+  </p:cSld>
+  <p:clrMapOvr>
+    <a:masterClrMapping/>
+  </p:clrMapOvr>
+</p:sld>
+</file>
+
+<file path=ppt/slides/slide31.xml><?xml version="1.0" encoding="utf-8"?>
+<p:sld xmlns:a="http://schemas.openxmlformats.org/drawingml/2006/main" xmlns:p="http://schemas.openxmlformats.org/presentationml/2006/main" xmlns:r="http://schemas.openxmlformats.org/officeDocument/2006/relationships">
+  <p:cSld>
+    <p:spTree>
+      <p:nvGrpSpPr>
+        <p:cNvPr id="1" name=""/>
+        <p:cNvGrpSpPr/>
+        <p:nvPr/>
+      </p:nvGrpSpPr>
+      <p:grpSpPr/>
+      <p:sp>
+        <p:nvSpPr>
+          <p:cNvPr id="2" name="Title 1"/>
+          <p:cNvSpPr>
+            <a:spLocks noGrp="1"/>
+          </p:cNvSpPr>
+          <p:nvPr>
+            <p:ph type="title"/>
+          </p:nvPr>
+        </p:nvSpPr>
+        <p:spPr/>
+        <p:txBody>
+          <a:bodyPr/>
+          <a:lstStyle/>
+          <a:p>
+            <a:r>
+              <a:rPr sz="3800" b="1">
+                <a:solidFill>
+                  <a:srgbClr val="1F2A37"/>
+                </a:solidFill>
+              </a:rPr>
+              <a:t>From week 11 - what draws each streamed piece on screen?</a:t>
+            </a:r>
+          </a:p>
+        </p:txBody>
+      </p:sp>
+      <p:sp>
+        <p:nvSpPr>
+          <p:cNvPr id="3" name="TextBox 2"/>
+          <p:cNvSpPr txBox="1"/>
+          <p:nvPr/>
+        </p:nvSpPr>
+        <p:spPr>
+          <a:xfrm>
+            <a:off x="868680" y="502920"/>
+            <a:ext cx="5486400" cy="457200"/>
+          </a:xfrm>
+          <a:prstGeom prst="rect">
+            <a:avLst/>
+          </a:prstGeom>
+          <a:noFill/>
+        </p:spPr>
+        <p:txBody>
+          <a:bodyPr wrap="none">
+            <a:spAutoFit/>
+          </a:bodyPr>
+          <a:lstStyle/>
+          <a:p>
+            <a:r>
+              <a:rPr sz="1500" b="1">
+                <a:solidFill>
+                  <a:srgbClr val="01AEFD"/>
+                </a:solidFill>
+              </a:rPr>
+              <a:t>ANSWER</a:t>
+            </a:r>
+          </a:p>
+        </p:txBody>
+      </p:sp>
+      <p:sp>
+        <p:nvSpPr>
+          <p:cNvPr id="4" name="TextBox 3"/>
+          <p:cNvSpPr txBox="1"/>
+          <p:nvPr/>
+        </p:nvSpPr>
+        <p:spPr>
+          <a:xfrm>
+            <a:off x="822960" y="1828800"/>
+            <a:ext cx="10515600" cy="4206240"/>
+          </a:xfrm>
+          <a:prstGeom prst="rect">
+            <a:avLst/>
+          </a:prstGeom>
+          <a:noFill/>
+        </p:spPr>
+        <p:txBody>
+          <a:bodyPr wrap="square">
+            <a:spAutoFit/>
+          </a:bodyPr>
+          <a:lstStyle/>
+          <a:p>
+            <a:pPr>
+              <a:spcAft>
+                <a:spcPts val="1400"/>
+              </a:spcAft>
+            </a:pPr>
+            <a:r>
+              <a:rPr sz="2400">
+                <a:solidFill>
+                  <a:srgbClr val="1F2A37"/>
+                </a:solidFill>
+              </a:rPr>
+              <a:t>• A. onPiece, the function passed into askAI (correct)</a:t>
+            </a:r>
+          </a:p>
+          <a:p>
+            <a:pPr>
+              <a:spcAft>
+                <a:spcPts val="1400"/>
+              </a:spcAft>
+            </a:pPr>
+            <a:r>
+              <a:rPr sz="2400">
+                <a:solidFill>
+                  <a:srgbClr val="1F2A37"/>
+                </a:solidFill>
+              </a:rPr>
+              <a:t>• B. the server</a:t>
+            </a:r>
+          </a:p>
+          <a:p>
+            <a:pPr>
+              <a:spcAft>
+                <a:spcPts val="1400"/>
+              </a:spcAft>
+            </a:pPr>
+            <a:r>
+              <a:rPr sz="2400">
+                <a:solidFill>
+                  <a:srgbClr val="1F2A37"/>
+                </a:solidFill>
+              </a:rPr>
+              <a:t>• C. a timer</a:t>
+            </a:r>
+          </a:p>
+          <a:p>
+            <a:pPr>
+              <a:spcAft>
+                <a:spcPts val="1400"/>
+              </a:spcAft>
+            </a:pPr>
+            <a:r>
+              <a:rPr sz="2400">
+                <a:solidFill>
+                  <a:srgbClr val="1F2A37"/>
+                </a:solidFill>
+              </a:rPr>
+              <a:t>• D. trimHistory</a:t>
+            </a:r>
+          </a:p>
+          <a:p>
+            <a:pPr>
+              <a:spcAft>
+                <a:spcPts val="1400"/>
+              </a:spcAft>
+            </a:pPr>
+            <a:r>
+              <a:rPr sz="2400">
+                <a:solidFill>
+                  <a:srgbClr val="1F2A37"/>
+                </a:solidFill>
+              </a:rPr>
+              <a:t>• onPiece runs on every piece and updates the bubble as text arrives.</a:t>
+            </a:r>
+          </a:p>
+        </p:txBody>
+      </p:sp>
+    </p:spTree>
+  </p:cSld>
+  <p:clrMapOvr>
+    <a:masterClrMapping/>
+  </p:clrMapOvr>
+</p:sld>
+</file>
+
+<file path=ppt/slides/slide32.xml><?xml version="1.0" encoding="utf-8"?>
+<p:sld xmlns:a="http://schemas.openxmlformats.org/drawingml/2006/main" xmlns:p="http://schemas.openxmlformats.org/presentationml/2006/main" xmlns:r="http://schemas.openxmlformats.org/officeDocument/2006/relationships">
+  <p:cSld>
+    <p:spTree>
+      <p:nvGrpSpPr>
+        <p:cNvPr id="1" name=""/>
+        <p:cNvGrpSpPr/>
+        <p:nvPr/>
+      </p:nvGrpSpPr>
+      <p:grpSpPr/>
+      <p:sp>
+        <p:nvSpPr>
+          <p:cNvPr id="2" name="Title 1"/>
+          <p:cNvSpPr>
+            <a:spLocks noGrp="1"/>
+          </p:cNvSpPr>
+          <p:nvPr>
+            <p:ph type="title"/>
+          </p:nvPr>
+        </p:nvSpPr>
+        <p:spPr/>
+        <p:txBody>
+          <a:bodyPr/>
+          <a:lstStyle/>
+          <a:p>
+            <a:r>
+              <a:rPr sz="3800" b="1">
+                <a:solidFill>
+                  <a:srgbClr val="1F2A37"/>
+                </a:solidFill>
+              </a:rPr>
+              <a:t>Rehearse in pairs</a:t>
+            </a:r>
+          </a:p>
+        </p:txBody>
+      </p:sp>
+      <p:sp>
+        <p:nvSpPr>
+          <p:cNvPr id="3" name="TextBox 2"/>
+          <p:cNvSpPr txBox="1"/>
+          <p:nvPr/>
+        </p:nvSpPr>
+        <p:spPr>
+          <a:xfrm>
+            <a:off x="822960" y="1828800"/>
+            <a:ext cx="10515600" cy="4206240"/>
+          </a:xfrm>
+          <a:prstGeom prst="rect">
+            <a:avLst/>
+          </a:prstGeom>
+          <a:noFill/>
+        </p:spPr>
+        <p:txBody>
+          <a:bodyPr wrap="square">
+            <a:spAutoFit/>
+          </a:bodyPr>
+          <a:lstStyle/>
+          <a:p>
+            <a:pPr>
+              <a:spcAft>
+                <a:spcPts val="1400"/>
+              </a:spcAft>
+            </a:pPr>
+            <a:r>
+              <a:rPr sz="2800">
+                <a:solidFill>
+                  <a:srgbClr val="01AEFD"/>
+                </a:solidFill>
+              </a:rPr>
+              <a:t>Your partner is a stranger</a:t>
+            </a:r>
+          </a:p>
+          <a:p>
+            <a:pPr>
+              <a:spcAft>
+                <a:spcPts val="1400"/>
+              </a:spcAft>
+            </a:pPr>
+            <a:r>
+              <a:rPr sz="2400">
+                <a:solidFill>
+                  <a:srgbClr val="1F2A37"/>
+                </a:solidFill>
+              </a:rPr>
+              <a:t>• They use it. You say nothing.</a:t>
+            </a:r>
+          </a:p>
+          <a:p>
+            <a:pPr>
+              <a:spcAft>
+                <a:spcPts val="1400"/>
+              </a:spcAft>
+            </a:pPr>
+            <a:r>
+              <a:rPr sz="2400">
+                <a:solidFill>
+                  <a:srgbClr val="1F2A37"/>
+                </a:solidFill>
+              </a:rPr>
+              <a:t>• Watch where they hesitate</a:t>
+            </a:r>
+          </a:p>
+          <a:p>
+            <a:pPr>
+              <a:spcAft>
+                <a:spcPts val="1400"/>
+              </a:spcAft>
+            </a:pPr>
+            <a:r>
+              <a:rPr sz="2400">
+                <a:solidFill>
+                  <a:srgbClr val="1F2A37"/>
+                </a:solidFill>
+              </a:rPr>
+              <a:t>• Then swap</a:t>
+            </a:r>
+          </a:p>
+        </p:txBody>
+      </p:sp>
+    </p:spTree>
+  </p:cSld>
+  <p:clrMapOvr>
+    <a:masterClrMapping/>
+  </p:clrMapOvr>
+</p:sld>
+</file>
+
+<file path=ppt/slides/slide33.xml><?xml version="1.0" encoding="utf-8"?>
+<p:sld xmlns:a="http://schemas.openxmlformats.org/drawingml/2006/main" xmlns:p="http://schemas.openxmlformats.org/presentationml/2006/main" xmlns:r="http://schemas.openxmlformats.org/officeDocument/2006/relationships">
+  <p:cSld>
+    <p:spTree>
+      <p:nvGrpSpPr>
+        <p:cNvPr id="1" name=""/>
+        <p:cNvGrpSpPr/>
+        <p:nvPr/>
+      </p:nvGrpSpPr>
+      <p:grpSpPr/>
+      <p:sp>
+        <p:nvSpPr>
+          <p:cNvPr id="2" name="Title 1"/>
+          <p:cNvSpPr>
+            <a:spLocks noGrp="1"/>
+          </p:cNvSpPr>
+          <p:nvPr>
+            <p:ph type="title"/>
+          </p:nvPr>
+        </p:nvSpPr>
+        <p:spPr/>
+        <p:txBody>
+          <a:bodyPr/>
+          <a:lstStyle/>
+          <a:p>
+            <a:r>
+              <a:rPr sz="3800" b="1">
+                <a:solidFill>
+                  <a:srgbClr val="1F2A37"/>
+                </a:solidFill>
+              </a:rPr>
+              <a:t>Demo format</a:t>
+            </a:r>
+          </a:p>
+        </p:txBody>
+      </p:sp>
+      <p:sp>
+        <p:nvSpPr>
+          <p:cNvPr id="3" name="TextBox 2"/>
+          <p:cNvSpPr txBox="1"/>
+          <p:nvPr/>
+        </p:nvSpPr>
+        <p:spPr>
+          <a:xfrm>
+            <a:off x="822960" y="1828800"/>
+            <a:ext cx="10515600" cy="4206240"/>
+          </a:xfrm>
+          <a:prstGeom prst="rect">
+            <a:avLst/>
+          </a:prstGeom>
+          <a:noFill/>
+        </p:spPr>
+        <p:txBody>
+          <a:bodyPr wrap="square">
+            <a:spAutoFit/>
+          </a:bodyPr>
+          <a:lstStyle/>
+          <a:p>
+            <a:pPr>
+              <a:spcAft>
+                <a:spcPts val="1400"/>
+              </a:spcAft>
+            </a:pPr>
+            <a:r>
+              <a:rPr sz="2800">
+                <a:solidFill>
+                  <a:srgbClr val="01AEFD"/>
+                </a:solidFill>
+              </a:rPr>
+              <a:t>90 seconds</a:t>
+            </a:r>
+          </a:p>
+          <a:p>
+            <a:pPr>
+              <a:spcAft>
+                <a:spcPts val="1400"/>
+              </a:spcAft>
+            </a:pPr>
+            <a:r>
+              <a:rPr sz="2400">
+                <a:solidFill>
+                  <a:srgbClr val="1F2A37"/>
+                </a:solidFill>
+              </a:rPr>
+              <a:t>• What it is</a:t>
+            </a:r>
+          </a:p>
+          <a:p>
+            <a:pPr>
+              <a:spcAft>
+                <a:spcPts val="1400"/>
+              </a:spcAft>
+            </a:pPr>
+            <a:r>
+              <a:rPr sz="2400">
+                <a:solidFill>
+                  <a:srgbClr val="1F2A37"/>
+                </a:solidFill>
+              </a:rPr>
+              <a:t>• One conversation</a:t>
+            </a:r>
+          </a:p>
+          <a:p>
+            <a:pPr>
+              <a:spcAft>
+                <a:spcPts val="1400"/>
+              </a:spcAft>
+            </a:pPr>
+            <a:r>
+              <a:rPr sz="2400">
+                <a:solidFill>
+                  <a:srgbClr val="1F2A37"/>
+                </a:solidFill>
+              </a:rPr>
+              <a:t>• One thing that was hard</a:t>
+            </a:r>
+          </a:p>
+        </p:txBody>
+      </p:sp>
+    </p:spTree>
+  </p:cSld>
+  <p:clrMapOvr>
+    <a:masterClrMapping/>
+  </p:clrMapOvr>
+</p:sld>
+</file>
+
+<file path=ppt/slides/slide34.xml><?xml version="1.0" encoding="utf-8"?>
+<p:sld xmlns:a="http://schemas.openxmlformats.org/drawingml/2006/main" xmlns:p="http://schemas.openxmlformats.org/presentationml/2006/main" xmlns:r="http://schemas.openxmlformats.org/officeDocument/2006/relationships">
+  <p:cSld>
+    <p:spTree>
+      <p:nvGrpSpPr>
+        <p:cNvPr id="1" name=""/>
+        <p:cNvGrpSpPr/>
+        <p:nvPr/>
+      </p:nvGrpSpPr>
+      <p:grpSpPr/>
+      <p:sp>
+        <p:nvSpPr>
+          <p:cNvPr id="2" name="Title 1"/>
+          <p:cNvSpPr>
+            <a:spLocks noGrp="1"/>
+          </p:cNvSpPr>
+          <p:nvPr>
+            <p:ph type="title"/>
+          </p:nvPr>
+        </p:nvSpPr>
+        <p:spPr/>
+        <p:txBody>
+          <a:bodyPr/>
+          <a:lstStyle/>
+          <a:p>
+            <a:r>
+              <a:rPr sz="3800" b="1">
+                <a:solidFill>
+                  <a:srgbClr val="1F2A37"/>
+                </a:solidFill>
+              </a:rPr>
+              <a:t>What did the machine never do?</a:t>
+            </a:r>
+          </a:p>
+        </p:txBody>
+      </p:sp>
+      <p:sp>
+        <p:nvSpPr>
+          <p:cNvPr id="3" name="TextBox 2"/>
+          <p:cNvSpPr txBox="1"/>
+          <p:nvPr/>
+        </p:nvSpPr>
+        <p:spPr>
+          <a:xfrm>
+            <a:off x="822960" y="1828800"/>
+            <a:ext cx="10515600" cy="4206240"/>
+          </a:xfrm>
+          <a:prstGeom prst="rect">
+            <a:avLst/>
+          </a:prstGeom>
+          <a:noFill/>
+        </p:spPr>
+        <p:txBody>
+          <a:bodyPr wrap="square">
+            <a:spAutoFit/>
+          </a:bodyPr>
+          <a:lstStyle/>
+          <a:p>
+            <a:pPr>
+              <a:spcAft>
+                <a:spcPts val="1400"/>
+              </a:spcAft>
+            </a:pPr>
+            <a:r>
+              <a:rPr sz="2400">
+                <a:solidFill>
+                  <a:srgbClr val="1F2A37"/>
+                </a:solidFill>
+              </a:rPr>
+              <a:t>• It never knew anything was true</a:t>
+            </a:r>
+          </a:p>
+          <a:p>
+            <a:pPr>
+              <a:spcAft>
+                <a:spcPts val="1400"/>
+              </a:spcAft>
+            </a:pPr>
+            <a:r>
+              <a:rPr sz="2400">
+                <a:solidFill>
+                  <a:srgbClr val="1F2A37"/>
+                </a:solidFill>
+              </a:rPr>
+              <a:t>• It never remembered you</a:t>
+            </a:r>
+          </a:p>
+          <a:p>
+            <a:pPr>
+              <a:spcAft>
+                <a:spcPts val="1400"/>
+              </a:spcAft>
+            </a:pPr>
+            <a:r>
+              <a:rPr sz="2400">
+                <a:solidFill>
+                  <a:srgbClr val="1F2A37"/>
+                </a:solidFill>
+              </a:rPr>
+              <a:t>• It never decided anything</a:t>
+            </a:r>
+          </a:p>
+          <a:p>
+            <a:pPr>
+              <a:spcAft>
+                <a:spcPts val="1400"/>
+              </a:spcAft>
+            </a:pPr>
+            <a:r>
+              <a:rPr sz="2400">
+                <a:solidFill>
+                  <a:srgbClr val="1F2A37"/>
+                </a:solidFill>
+              </a:rPr>
+              <a:t>• You built all of that</a:t>
+            </a:r>
+          </a:p>
+        </p:txBody>
+      </p:sp>
+    </p:spTree>
+  </p:cSld>
+  <p:clrMapOvr>
+    <a:masterClrMapping/>
+  </p:clrMapOvr>
+</p:sld>
+</file>
+
+<file path=ppt/slides/slide35.xml><?xml version="1.0" encoding="utf-8"?>
+<p:sld xmlns:a="http://schemas.openxmlformats.org/drawingml/2006/main" xmlns:p="http://schemas.openxmlformats.org/presentationml/2006/main" xmlns:r="http://schemas.openxmlformats.org/officeDocument/2006/relationships">
+  <p:cSld>
+    <p:spTree>
+      <p:nvGrpSpPr>
+        <p:cNvPr id="1" name=""/>
+        <p:cNvGrpSpPr/>
+        <p:nvPr/>
+      </p:nvGrpSpPr>
+      <p:grpSpPr/>
+      <p:sp>
+        <p:nvSpPr>
+          <p:cNvPr id="2" name="Title 1"/>
+          <p:cNvSpPr>
+            <a:spLocks noGrp="1"/>
+          </p:cNvSpPr>
+          <p:nvPr>
+            <p:ph type="title"/>
+          </p:nvPr>
+        </p:nvSpPr>
+        <p:spPr/>
+        <p:txBody>
+          <a:bodyPr/>
+          <a:lstStyle/>
+          <a:p>
+            <a:r>
+              <a:rPr sz="3800" b="1">
+                <a:solidFill>
+                  <a:srgbClr val="1F2A37"/>
+                </a:solidFill>
+              </a:rPr>
+              <a:t>Checkpoint: your finished companion</a:t>
+            </a:r>
+          </a:p>
+        </p:txBody>
+      </p:sp>
+      <p:sp>
+        <p:nvSpPr>
+          <p:cNvPr id="3" name="TextBox 2"/>
+          <p:cNvSpPr txBox="1"/>
+          <p:nvPr/>
+        </p:nvSpPr>
+        <p:spPr>
+          <a:xfrm>
+            <a:off x="868680" y="502920"/>
+            <a:ext cx="5486400" cy="457200"/>
+          </a:xfrm>
+          <a:prstGeom prst="rect">
+            <a:avLst/>
+          </a:prstGeom>
+          <a:noFill/>
+        </p:spPr>
+        <p:txBody>
+          <a:bodyPr wrap="none">
+            <a:spAutoFit/>
+          </a:bodyPr>
+          <a:lstStyle/>
+          <a:p>
+            <a:r>
+              <a:rPr sz="1500" b="1">
+                <a:solidFill>
+                  <a:srgbClr val="01AEFD"/>
+                </a:solidFill>
+              </a:rPr>
+              <a:t>CHECKPOINT - RUN IT</a:t>
+            </a:r>
+          </a:p>
+        </p:txBody>
+      </p:sp>
+      <p:sp>
+        <p:nvSpPr>
+          <p:cNvPr id="4" name="TextBox 3"/>
+          <p:cNvSpPr txBox="1"/>
+          <p:nvPr/>
+        </p:nvSpPr>
+        <p:spPr>
+          <a:xfrm>
+            <a:off x="822960" y="1828800"/>
+            <a:ext cx="10515600" cy="4206240"/>
+          </a:xfrm>
+          <a:prstGeom prst="rect">
+            <a:avLst/>
+          </a:prstGeom>
+          <a:noFill/>
+        </p:spPr>
+        <p:txBody>
+          <a:bodyPr wrap="square">
+            <a:spAutoFit/>
+          </a:bodyPr>
+          <a:lstStyle/>
+          <a:p>
+            <a:pPr>
+              <a:spcAft>
+                <a:spcPts val="1400"/>
+              </a:spcAft>
+            </a:pPr>
+            <a:r>
+              <a:rPr sz="2800">
+                <a:solidFill>
+                  <a:srgbClr val="01AEFD"/>
+                </a:solidFill>
+              </a:rPr>
+              <a:t>Press Run - this is the whole thing. Pick a character, set the model and imagination, chat with streaming replies, save and reload a conversation, and see your name in the footer. Put your name in the credits: fifteen weeks, one real AI app that you built and understand line by line.</a:t>
+            </a:r>
+          </a:p>
+          <a:p>
+            <a:pPr>
+              <a:spcAft>
+                <a:spcPts val="1400"/>
+              </a:spcAft>
+            </a:pPr>
+            <a:r>
+              <a:rPr sz="2400">
+                <a:solidFill>
+                  <a:srgbClr val="1F2A37"/>
+                </a:solidFill>
+              </a:rPr>
+              <a:t>• Run it in the classroom, or press Show the output in the web deck.</a:t>
+            </a:r>
+          </a:p>
+          <a:p>
+            <a:pPr>
+              <a:spcAft>
+                <a:spcPts val="1400"/>
+              </a:spcAft>
+            </a:pPr>
+            <a:r>
+              <a:rPr sz="2400">
+                <a:solidFill>
+                  <a:srgbClr val="1F2A37"/>
+                </a:solidFill>
+              </a:rPr>
+              <a:t>• Everyone's screen should match this.</a:t>
+            </a:r>
+          </a:p>
+        </p:txBody>
+      </p:sp>
+    </p:spTree>
+  </p:cSld>
+  <p:clrMapOvr>
+    <a:masterClrMapping/>
+  </p:clrMapOvr>
+</p:sld>
+</file>
+
+<file path=ppt/slides/slide36.xml><?xml version="1.0" encoding="utf-8"?>
+<p:sld xmlns:a="http://schemas.openxmlformats.org/drawingml/2006/main" xmlns:p="http://schemas.openxmlformats.org/presentationml/2006/main" xmlns:r="http://schemas.openxmlformats.org/officeDocument/2006/relationships">
+  <p:cSld>
+    <p:spTree>
+      <p:nvGrpSpPr>
+        <p:cNvPr id="1" name=""/>
+        <p:cNvGrpSpPr/>
+        <p:nvPr/>
+      </p:nvGrpSpPr>
+      <p:grpSpPr/>
+      <p:sp>
+        <p:nvSpPr>
+          <p:cNvPr id="2" name="Title 1"/>
+          <p:cNvSpPr>
+            <a:spLocks noGrp="1"/>
+          </p:cNvSpPr>
+          <p:nvPr>
+            <p:ph type="title"/>
+          </p:nvPr>
+        </p:nvSpPr>
+        <p:spPr/>
+        <p:txBody>
+          <a:bodyPr/>
+          <a:lstStyle/>
+          <a:p>
+            <a:r>
+              <a:rPr sz="3800" b="1">
+                <a:solidFill>
+                  <a:srgbClr val="1F2A37"/>
+                </a:solidFill>
+              </a:rPr>
+              <a:t>Next: AI102</a:t>
+            </a:r>
+          </a:p>
+        </p:txBody>
+      </p:sp>
+      <p:sp>
+        <p:nvSpPr>
+          <p:cNvPr id="3" name="TextBox 2"/>
+          <p:cNvSpPr txBox="1"/>
+          <p:nvPr/>
+        </p:nvSpPr>
+        <p:spPr>
+          <a:xfrm>
+            <a:off x="822960" y="1828800"/>
+            <a:ext cx="10515600" cy="4206240"/>
+          </a:xfrm>
+          <a:prstGeom prst="rect">
+            <a:avLst/>
+          </a:prstGeom>
+          <a:noFill/>
+        </p:spPr>
+        <p:txBody>
+          <a:bodyPr wrap="square">
+            <a:spAutoFit/>
+          </a:bodyPr>
+          <a:lstStyle/>
+          <a:p>
+            <a:pPr>
+              <a:spcAft>
+                <a:spcPts val="1400"/>
+              </a:spcAft>
+            </a:pPr>
+            <a:r>
+              <a:rPr sz="2800">
+                <a:solidFill>
+                  <a:srgbClr val="01AEFD"/>
+                </a:solidFill>
+              </a:rPr>
+              <a:t>Pictures, voices, video</a:t>
+            </a:r>
+          </a:p>
+          <a:p>
+            <a:pPr>
+              <a:spcAft>
+                <a:spcPts val="1400"/>
+              </a:spcAft>
+            </a:pPr>
+            <a:r>
+              <a:rPr sz="2400">
+                <a:solidFill>
+                  <a:srgbClr val="1F2A37"/>
+                </a:solidFill>
+              </a:rPr>
+              <a:t>• Same server, same skills</a:t>
+            </a:r>
+          </a:p>
+          <a:p>
+            <a:pPr>
+              <a:spcAft>
+                <a:spcPts val="1400"/>
+              </a:spcAft>
+            </a:pPr>
+            <a:r>
+              <a:rPr sz="2400">
+                <a:solidFill>
+                  <a:srgbClr val="1F2A37"/>
+                </a:solidFill>
+              </a:rPr>
+              <a:t>• Everything you wrote still applies</a:t>
+            </a:r>
+          </a:p>
+        </p:txBody>
+      </p:sp>
+    </p:spTree>
+  </p:cSld>
+  <p:clrMapOvr>
+    <a:masterClrMapping/>
+  </p:clrMapOvr>
+</p:sld>
+</file>
+
+<file path=ppt/slides/slide4.xml><?xml version="1.0" encoding="utf-8"?>
+<p:sld xmlns:a="http://schemas.openxmlformats.org/drawingml/2006/main" xmlns:p="http://schemas.openxmlformats.org/presentationml/2006/main" xmlns:r="http://schemas.openxmlformats.org/officeDocument/2006/relationships">
+  <p:cSld>
+    <p:spTree>
+      <p:nvGrpSpPr>
+        <p:cNvPr id="1" name=""/>
+        <p:cNvGrpSpPr/>
+        <p:nvPr/>
+      </p:nvGrpSpPr>
+      <p:grpSpPr/>
+      <p:sp>
+        <p:nvSpPr>
+          <p:cNvPr id="2" name="Title 1"/>
+          <p:cNvSpPr>
+            <a:spLocks noGrp="1"/>
+          </p:cNvSpPr>
+          <p:nvPr>
+            <p:ph type="title"/>
+          </p:nvPr>
+        </p:nvSpPr>
+        <p:spPr/>
+        <p:txBody>
+          <a:bodyPr/>
+          <a:lstStyle/>
+          <a:p>
+            <a:r>
+              <a:rPr sz="3800" b="1">
+                <a:solidFill>
+                  <a:srgbClr val="1F2A37"/>
+                </a:solidFill>
+              </a:rPr>
+              <a:t>The &lt;footer&gt; tag</a:t>
+            </a:r>
+          </a:p>
+        </p:txBody>
+      </p:sp>
+      <p:sp>
+        <p:nvSpPr>
+          <p:cNvPr id="3" name="TextBox 2"/>
+          <p:cNvSpPr txBox="1"/>
+          <p:nvPr/>
+        </p:nvSpPr>
+        <p:spPr>
+          <a:xfrm>
+            <a:off x="868680" y="502920"/>
+            <a:ext cx="5486400" cy="457200"/>
+          </a:xfrm>
+          <a:prstGeom prst="rect">
+            <a:avLst/>
+          </a:prstGeom>
+          <a:noFill/>
+        </p:spPr>
+        <p:txBody>
+          <a:bodyPr wrap="none">
+            <a:spAutoFit/>
+          </a:bodyPr>
+          <a:lstStyle/>
+          <a:p>
+            <a:r>
+              <a:rPr sz="1500" b="1">
+                <a:solidFill>
+                  <a:srgbClr val="01AEFD"/>
+                </a:solidFill>
+              </a:rPr>
+              <a:t>HTML</a:t>
+            </a:r>
+          </a:p>
+        </p:txBody>
+      </p:sp>
+      <p:sp>
+        <p:nvSpPr>
+          <p:cNvPr id="4" name="TextBox 3"/>
+          <p:cNvSpPr txBox="1"/>
+          <p:nvPr/>
+        </p:nvSpPr>
+        <p:spPr>
+          <a:xfrm>
+            <a:off x="822960" y="1828800"/>
+            <a:ext cx="10515600" cy="4206240"/>
+          </a:xfrm>
+          <a:prstGeom prst="rect">
+            <a:avLst/>
+          </a:prstGeom>
+          <a:noFill/>
+        </p:spPr>
+        <p:txBody>
+          <a:bodyPr wrap="square">
+            <a:spAutoFit/>
+          </a:bodyPr>
+          <a:lstStyle/>
+          <a:p>
+            <a:pPr>
+              <a:spcAft>
+                <a:spcPts val="1400"/>
+              </a:spcAft>
+            </a:pPr>
+            <a:r>
+              <a:rPr sz="2400">
+                <a:solidFill>
+                  <a:srgbClr val="1F2A37"/>
+                </a:solidFill>
+              </a:rPr>
+              <a:t>• A box for the strip at the BOTTOM of the page - credits and small print.</a:t>
             </a:r>
           </a:p>
         </p:txBody>
@@ -3724,7 +11014,7 @@
         <p:spPr>
           <a:xfrm>
             <a:off x="502920" y="274320"/>
-            <a:ext cx="11155680" cy="731520"/>
+            <a:ext cx="11155680" cy="548640"/>
           </a:xfrm>
           <a:prstGeom prst="rect">
             <a:avLst/>
@@ -3738,12 +11028,12 @@
           <a:lstStyle/>
           <a:p>
             <a:r>
-              <a:rPr sz="2600" b="1">
+              <a:rPr sz="2200" b="1">
                 <a:solidFill>
                   <a:srgbClr val="01AEFD"/>
                 </a:solidFill>
               </a:rPr>
-              <a:t>Type this into style.css  (2 of 3)</a:t>
+              <a:t>Type this into index.html   -   line 37</a:t>
             </a:r>
           </a:p>
         </p:txBody>
@@ -3756,8 +11046,8 @@
         </p:nvSpPr>
         <p:spPr>
           <a:xfrm>
-            <a:off x="502920" y="1051560"/>
-            <a:ext cx="11155680" cy="5394960"/>
+            <a:off x="502920" y="960120"/>
+            <a:ext cx="11155680" cy="4297680"/>
           </a:xfrm>
           <a:prstGeom prst="rect">
             <a:avLst/>
@@ -3776,372 +11066,55 @@
               </a:spcAft>
             </a:pPr>
             <a:r>
-              <a:rPr sz="1400">
-                <a:solidFill>
-                  <a:srgbClr val="6D8C97"/>
-                </a:solidFill>
-                <a:latin typeface="Consolas"/>
-              </a:rPr>
-              <a:t>  32  </a:t>
-            </a:r>
-            <a:r>
-              <a:rPr sz="1400">
+              <a:rPr sz="1800">
+                <a:solidFill>
+                  <a:srgbClr val="6D8C97"/>
+                </a:solidFill>
+                <a:latin typeface="Consolas"/>
+              </a:rPr>
+              <a:t>  37  </a:t>
+            </a:r>
+            <a:r>
+              <a:rPr sz="1800">
+                <a:solidFill>
+                  <a:srgbClr val="7FE0A0"/>
+                </a:solidFill>
+                <a:latin typeface="Consolas"/>
+              </a:rPr>
+              <a:t>  &lt;footer class="credits"&gt;</a:t>
+            </a:r>
+          </a:p>
+        </p:txBody>
+      </p:sp>
+      <p:sp>
+        <p:nvSpPr>
+          <p:cNvPr id="4" name="TextBox 3"/>
+          <p:cNvSpPr txBox="1"/>
+          <p:nvPr/>
+        </p:nvSpPr>
+        <p:spPr>
+          <a:xfrm>
+            <a:off x="548640" y="5623560"/>
+            <a:ext cx="11064240" cy="1051560"/>
+          </a:xfrm>
+          <a:prstGeom prst="rect">
+            <a:avLst/>
+          </a:prstGeom>
+          <a:noFill/>
+        </p:spPr>
+        <p:txBody>
+          <a:bodyPr wrap="square">
+            <a:spAutoFit/>
+          </a:bodyPr>
+          <a:lstStyle/>
+          <a:p>
+            <a:r>
+              <a:rPr sz="2000">
                 <a:solidFill>
                   <a:srgbClr val="DCECEF"/>
                 </a:solidFill>
-                <a:latin typeface="Consolas"/>
-              </a:rPr>
-              <a:t>.setup { margin-bottom: 12px; font-size: 14px; }</a:t>
-            </a:r>
-          </a:p>
-          <a:p>
-            <a:pPr>
-              <a:spcAft>
-                <a:spcPts val="0"/>
-              </a:spcAft>
-            </a:pPr>
-            <a:r>
-              <a:rPr sz="1400">
-                <a:solidFill>
-                  <a:srgbClr val="6D8C97"/>
-                </a:solidFill>
-                <a:latin typeface="Consolas"/>
-              </a:rPr>
-              <a:t>  33  </a:t>
-            </a:r>
-            <a:r>
-              <a:rPr sz="1400">
-                <a:solidFill>
-                  <a:srgbClr val="DCECEF"/>
-                </a:solidFill>
-                <a:latin typeface="Consolas"/>
-              </a:rPr>
-              <a:t>.setup summary { cursor: pointer; color: #0a6299; font-weight: bold; }</a:t>
-            </a:r>
-          </a:p>
-          <a:p>
-            <a:pPr>
-              <a:spcAft>
-                <a:spcPts val="0"/>
-              </a:spcAft>
-            </a:pPr>
-            <a:r>
-              <a:rPr sz="1400">
-                <a:solidFill>
-                  <a:srgbClr val="6D8C97"/>
-                </a:solidFill>
-                <a:latin typeface="Consolas"/>
-              </a:rPr>
-              <a:t>  34  </a:t>
-            </a:r>
-            <a:r>
-              <a:rPr sz="1400">
-                <a:solidFill>
-                  <a:srgbClr val="DCECEF"/>
-                </a:solidFill>
-                <a:latin typeface="Consolas"/>
-              </a:rPr>
-              <a:t>.setup textarea {</a:t>
-            </a:r>
-          </a:p>
-          <a:p>
-            <a:pPr>
-              <a:spcAft>
-                <a:spcPts val="0"/>
-              </a:spcAft>
-            </a:pPr>
-            <a:r>
-              <a:rPr sz="1400">
-                <a:solidFill>
-                  <a:srgbClr val="6D8C97"/>
-                </a:solidFill>
-                <a:latin typeface="Consolas"/>
-              </a:rPr>
-              <a:t>  35  </a:t>
-            </a:r>
-            <a:r>
-              <a:rPr sz="1400">
-                <a:solidFill>
-                  <a:srgbClr val="DCECEF"/>
-                </a:solidFill>
-                <a:latin typeface="Consolas"/>
-              </a:rPr>
-              <a:t>  width: 100%;</a:t>
-            </a:r>
-          </a:p>
-          <a:p>
-            <a:pPr>
-              <a:spcAft>
-                <a:spcPts val="0"/>
-              </a:spcAft>
-            </a:pPr>
-            <a:r>
-              <a:rPr sz="1400">
-                <a:solidFill>
-                  <a:srgbClr val="6D8C97"/>
-                </a:solidFill>
-                <a:latin typeface="Consolas"/>
-              </a:rPr>
-              <a:t>  36  </a:t>
-            </a:r>
-            <a:r>
-              <a:rPr sz="1400">
-                <a:solidFill>
-                  <a:srgbClr val="DCECEF"/>
-                </a:solidFill>
-                <a:latin typeface="Consolas"/>
-              </a:rPr>
-              <a:t>  margin-top: 8px;</a:t>
-            </a:r>
-          </a:p>
-          <a:p>
-            <a:pPr>
-              <a:spcAft>
-                <a:spcPts val="0"/>
-              </a:spcAft>
-            </a:pPr>
-            <a:r>
-              <a:rPr sz="1400">
-                <a:solidFill>
-                  <a:srgbClr val="6D8C97"/>
-                </a:solidFill>
-                <a:latin typeface="Consolas"/>
-              </a:rPr>
-              <a:t>  37  </a:t>
-            </a:r>
-            <a:r>
-              <a:rPr sz="1400">
-                <a:solidFill>
-                  <a:srgbClr val="DCECEF"/>
-                </a:solidFill>
-                <a:latin typeface="Consolas"/>
-              </a:rPr>
-              <a:t>  padding: 9px;</a:t>
-            </a:r>
-          </a:p>
-          <a:p>
-            <a:pPr>
-              <a:spcAft>
-                <a:spcPts val="0"/>
-              </a:spcAft>
-            </a:pPr>
-            <a:r>
-              <a:rPr sz="1400">
-                <a:solidFill>
-                  <a:srgbClr val="6D8C97"/>
-                </a:solidFill>
-                <a:latin typeface="Consolas"/>
-              </a:rPr>
-              <a:t>  38  </a:t>
-            </a:r>
-            <a:r>
-              <a:rPr sz="1400">
-                <a:solidFill>
-                  <a:srgbClr val="DCECEF"/>
-                </a:solidFill>
-                <a:latin typeface="Consolas"/>
-              </a:rPr>
-              <a:t>  border: 1px solid #dbe3ec;</a:t>
-            </a:r>
-          </a:p>
-          <a:p>
-            <a:pPr>
-              <a:spcAft>
-                <a:spcPts val="0"/>
-              </a:spcAft>
-            </a:pPr>
-            <a:r>
-              <a:rPr sz="1400">
-                <a:solidFill>
-                  <a:srgbClr val="6D8C97"/>
-                </a:solidFill>
-                <a:latin typeface="Consolas"/>
-              </a:rPr>
-              <a:t>  39  </a:t>
-            </a:r>
-            <a:r>
-              <a:rPr sz="1400">
-                <a:solidFill>
-                  <a:srgbClr val="DCECEF"/>
-                </a:solidFill>
-                <a:latin typeface="Consolas"/>
-              </a:rPr>
-              <a:t>  border-radius: 6px;</a:t>
-            </a:r>
-          </a:p>
-          <a:p>
-            <a:pPr>
-              <a:spcAft>
-                <a:spcPts val="0"/>
-              </a:spcAft>
-            </a:pPr>
-            <a:r>
-              <a:rPr sz="1400">
-                <a:solidFill>
-                  <a:srgbClr val="6D8C97"/>
-                </a:solidFill>
-                <a:latin typeface="Consolas"/>
-              </a:rPr>
-              <a:t>  40  </a:t>
-            </a:r>
-            <a:r>
-              <a:rPr sz="1400">
-                <a:solidFill>
-                  <a:srgbClr val="DCECEF"/>
-                </a:solidFill>
-                <a:latin typeface="Consolas"/>
-              </a:rPr>
-              <a:t>  font-family: inherit;</a:t>
-            </a:r>
-          </a:p>
-          <a:p>
-            <a:pPr>
-              <a:spcAft>
-                <a:spcPts val="0"/>
-              </a:spcAft>
-            </a:pPr>
-            <a:r>
-              <a:rPr sz="1400">
-                <a:solidFill>
-                  <a:srgbClr val="6D8C97"/>
-                </a:solidFill>
-                <a:latin typeface="Consolas"/>
-              </a:rPr>
-              <a:t>  41  </a:t>
-            </a:r>
-            <a:r>
-              <a:rPr sz="1400">
-                <a:solidFill>
-                  <a:srgbClr val="DCECEF"/>
-                </a:solidFill>
-                <a:latin typeface="Consolas"/>
-              </a:rPr>
-              <a:t>  font-size: 14px;</a:t>
-            </a:r>
-          </a:p>
-          <a:p>
-            <a:pPr>
-              <a:spcAft>
-                <a:spcPts val="0"/>
-              </a:spcAft>
-            </a:pPr>
-            <a:r>
-              <a:rPr sz="1400">
-                <a:solidFill>
-                  <a:srgbClr val="6D8C97"/>
-                </a:solidFill>
-                <a:latin typeface="Consolas"/>
-              </a:rPr>
-              <a:t>  42  </a:t>
-            </a:r>
-            <a:r>
-              <a:rPr sz="1400">
-                <a:solidFill>
-                  <a:srgbClr val="DCECEF"/>
-                </a:solidFill>
-                <a:latin typeface="Consolas"/>
-              </a:rPr>
-              <a:t>}</a:t>
-            </a:r>
-          </a:p>
-          <a:p>
-            <a:pPr>
-              <a:spcAft>
-                <a:spcPts val="0"/>
-              </a:spcAft>
-            </a:pPr>
-            <a:r>
-              <a:rPr sz="1400">
-                <a:solidFill>
-                  <a:srgbClr val="6D8C97"/>
-                </a:solidFill>
-                <a:latin typeface="Consolas"/>
-              </a:rPr>
-              <a:t>  43  </a:t>
-            </a:r>
-            <a:r>
-              <a:rPr sz="1400">
-                <a:solidFill>
-                  <a:srgbClr val="7FE0A0"/>
-                </a:solidFill>
-                <a:latin typeface="Consolas"/>
-              </a:rPr>
-              <a:t>.credits {</a:t>
-            </a:r>
-          </a:p>
-          <a:p>
-            <a:pPr>
-              <a:spcAft>
-                <a:spcPts val="0"/>
-              </a:spcAft>
-            </a:pPr>
-            <a:r>
-              <a:rPr sz="1400">
-                <a:solidFill>
-                  <a:srgbClr val="6D8C97"/>
-                </a:solidFill>
-                <a:latin typeface="Consolas"/>
-              </a:rPr>
-              <a:t>  44  </a:t>
-            </a:r>
-            <a:r>
-              <a:rPr sz="1400">
-                <a:solidFill>
-                  <a:srgbClr val="7FE0A0"/>
-                </a:solidFill>
-                <a:latin typeface="Consolas"/>
-              </a:rPr>
-              <a:t>  margin-top: 22px;</a:t>
-            </a:r>
-          </a:p>
-          <a:p>
-            <a:pPr>
-              <a:spcAft>
-                <a:spcPts val="0"/>
-              </a:spcAft>
-            </a:pPr>
-            <a:r>
-              <a:rPr sz="1400">
-                <a:solidFill>
-                  <a:srgbClr val="6D8C97"/>
-                </a:solidFill>
-                <a:latin typeface="Consolas"/>
-              </a:rPr>
-              <a:t>  45  </a:t>
-            </a:r>
-            <a:r>
-              <a:rPr sz="1400">
-                <a:solidFill>
-                  <a:srgbClr val="7FE0A0"/>
-                </a:solidFill>
-                <a:latin typeface="Consolas"/>
-              </a:rPr>
-              <a:t>  padding-top: 14px;</a:t>
-            </a:r>
-          </a:p>
-          <a:p>
-            <a:pPr>
-              <a:spcAft>
-                <a:spcPts val="0"/>
-              </a:spcAft>
-            </a:pPr>
-            <a:r>
-              <a:rPr sz="1400">
-                <a:solidFill>
-                  <a:srgbClr val="6D8C97"/>
-                </a:solidFill>
-                <a:latin typeface="Consolas"/>
-              </a:rPr>
-              <a:t>  46  </a:t>
-            </a:r>
-            <a:r>
-              <a:rPr sz="1400">
-                <a:solidFill>
-                  <a:srgbClr val="7FE0A0"/>
-                </a:solidFill>
-                <a:latin typeface="Consolas"/>
-              </a:rPr>
-              <a:t>  border-top: 1px solid #dbe3ec;</a:t>
+              </a:rPr>
+              <a:t>A &lt;footer&gt; for the bottom of the page. class="credits" styles it.</a:t>
             </a:r>
           </a:p>
         </p:txBody>
@@ -4155,6 +11128,121 @@
 </file>
 
 <file path=ppt/slides/slide6.xml><?xml version="1.0" encoding="utf-8"?>
+<p:sld xmlns:a="http://schemas.openxmlformats.org/drawingml/2006/main" xmlns:p="http://schemas.openxmlformats.org/presentationml/2006/main" xmlns:r="http://schemas.openxmlformats.org/officeDocument/2006/relationships">
+  <p:cSld>
+    <p:spTree>
+      <p:nvGrpSpPr>
+        <p:cNvPr id="1" name=""/>
+        <p:cNvGrpSpPr/>
+        <p:nvPr/>
+      </p:nvGrpSpPr>
+      <p:grpSpPr/>
+      <p:sp>
+        <p:nvSpPr>
+          <p:cNvPr id="2" name="Title 1"/>
+          <p:cNvSpPr>
+            <a:spLocks noGrp="1"/>
+          </p:cNvSpPr>
+          <p:nvPr>
+            <p:ph type="title"/>
+          </p:nvPr>
+        </p:nvSpPr>
+        <p:spPr/>
+        <p:txBody>
+          <a:bodyPr/>
+          <a:lstStyle/>
+          <a:p>
+            <a:r>
+              <a:rPr sz="3800" b="1">
+                <a:solidFill>
+                  <a:srgbClr val="1F2A37"/>
+                </a:solidFill>
+              </a:rPr>
+              <a:t>The &lt;strong&gt; tag</a:t>
+            </a:r>
+          </a:p>
+        </p:txBody>
+      </p:sp>
+      <p:sp>
+        <p:nvSpPr>
+          <p:cNvPr id="3" name="TextBox 2"/>
+          <p:cNvSpPr txBox="1"/>
+          <p:nvPr/>
+        </p:nvSpPr>
+        <p:spPr>
+          <a:xfrm>
+            <a:off x="868680" y="502920"/>
+            <a:ext cx="5486400" cy="457200"/>
+          </a:xfrm>
+          <a:prstGeom prst="rect">
+            <a:avLst/>
+          </a:prstGeom>
+          <a:noFill/>
+        </p:spPr>
+        <p:txBody>
+          <a:bodyPr wrap="none">
+            <a:spAutoFit/>
+          </a:bodyPr>
+          <a:lstStyle/>
+          <a:p>
+            <a:r>
+              <a:rPr sz="1500" b="1">
+                <a:solidFill>
+                  <a:srgbClr val="01AEFD"/>
+                </a:solidFill>
+              </a:rPr>
+              <a:t>HTML</a:t>
+            </a:r>
+          </a:p>
+        </p:txBody>
+      </p:sp>
+      <p:sp>
+        <p:nvSpPr>
+          <p:cNvPr id="4" name="TextBox 3"/>
+          <p:cNvSpPr txBox="1"/>
+          <p:nvPr/>
+        </p:nvSpPr>
+        <p:spPr>
+          <a:xfrm>
+            <a:off x="822960" y="1828800"/>
+            <a:ext cx="10515600" cy="4206240"/>
+          </a:xfrm>
+          <a:prstGeom prst="rect">
+            <a:avLst/>
+          </a:prstGeom>
+          <a:noFill/>
+        </p:spPr>
+        <p:txBody>
+          <a:bodyPr wrap="square">
+            <a:spAutoFit/>
+          </a:bodyPr>
+          <a:lstStyle/>
+          <a:p>
+            <a:pPr>
+              <a:spcAft>
+                <a:spcPts val="1400"/>
+              </a:spcAft>
+            </a:pPr>
+            <a:r>
+              <a:rPr sz="2400">
+                <a:solidFill>
+                  <a:srgbClr val="1F2A37"/>
+                </a:solidFill>
+              </a:rPr>
+              <a:t>• Makes the text inside it bold, so it stands out.</a:t>
+            </a:r>
+          </a:p>
+        </p:txBody>
+      </p:sp>
+    </p:spTree>
+  </p:cSld>
+  <p:clrMapOvr>
+    <a:masterClrMapping/>
+  </p:clrMapOvr>
+</p:sld>
+</file>
+
+<file path=ppt/slides/slide7.xml><?xml version="1.0" encoding="utf-8"?>
 <p:sld xmlns:a="http://schemas.openxmlformats.org/drawingml/2006/main" xmlns:p="http://schemas.openxmlformats.org/presentationml/2006/main" xmlns:r="http://schemas.openxmlformats.org/officeDocument/2006/relationships">
   <p:cSld>
     <p:bg>
@@ -4181,7 +11269,7 @@
         <p:spPr>
           <a:xfrm>
             <a:off x="502920" y="274320"/>
-            <a:ext cx="11155680" cy="731520"/>
+            <a:ext cx="11155680" cy="548640"/>
           </a:xfrm>
           <a:prstGeom prst="rect">
             <a:avLst/>
@@ -4195,12 +11283,12 @@
           <a:lstStyle/>
           <a:p>
             <a:r>
-              <a:rPr sz="2600" b="1">
+              <a:rPr sz="2200" b="1">
                 <a:solidFill>
                   <a:srgbClr val="01AEFD"/>
                 </a:solidFill>
               </a:rPr>
-              <a:t>Type this into style.css  (3 of 3)</a:t>
+              <a:t>Type this into index.html   -   line 38</a:t>
             </a:r>
           </a:p>
         </p:txBody>
@@ -4213,8 +11301,8 @@
         </p:nvSpPr>
         <p:spPr>
           <a:xfrm>
-            <a:off x="502920" y="1051560"/>
-            <a:ext cx="11155680" cy="5394960"/>
+            <a:off x="502920" y="960120"/>
+            <a:ext cx="11155680" cy="4297680"/>
           </a:xfrm>
           <a:prstGeom prst="rect">
             <a:avLst/>
@@ -4233,155 +11321,61 @@
               </a:spcAft>
             </a:pPr>
             <a:r>
-              <a:rPr sz="1700">
-                <a:solidFill>
-                  <a:srgbClr val="6D8C97"/>
-                </a:solidFill>
-                <a:latin typeface="Consolas"/>
-              </a:rPr>
-              <a:t>  47  </a:t>
-            </a:r>
-            <a:r>
-              <a:rPr sz="1700">
+              <a:rPr sz="1800">
+                <a:solidFill>
+                  <a:srgbClr val="6D8C97"/>
+                </a:solidFill>
+                <a:latin typeface="Consolas"/>
+              </a:rPr>
+              <a:t>  37  </a:t>
+            </a:r>
+            <a:r>
+              <a:rPr sz="1800">
+                <a:solidFill>
+                  <a:srgbClr val="6D8C97"/>
+                </a:solidFill>
+                <a:latin typeface="Consolas"/>
+              </a:rPr>
+              <a:t>  &lt;footer class="credits"&gt;</a:t>
+            </a:r>
+          </a:p>
+          <a:p>
+            <a:pPr>
+              <a:spcAft>
+                <a:spcPts val="0"/>
+              </a:spcAft>
+            </a:pPr>
+            <a:r>
+              <a:rPr sz="1800">
+                <a:solidFill>
+                  <a:srgbClr val="6D8C97"/>
+                </a:solidFill>
+                <a:latin typeface="Consolas"/>
+              </a:rPr>
+              <a:t>  38  </a:t>
+            </a:r>
+            <a:r>
+              <a:rPr sz="1800">
                 <a:solidFill>
                   <a:srgbClr val="7FE0A0"/>
                 </a:solidFill>
                 <a:latin typeface="Consolas"/>
               </a:rPr>
-              <a:t>  color: #6b7787;</a:t>
-            </a:r>
-          </a:p>
-          <a:p>
-            <a:pPr>
-              <a:spcAft>
-                <a:spcPts val="0"/>
-              </a:spcAft>
-            </a:pPr>
-            <a:r>
-              <a:rPr sz="1700">
-                <a:solidFill>
-                  <a:srgbClr val="6D8C97"/>
-                </a:solidFill>
-                <a:latin typeface="Consolas"/>
-              </a:rPr>
-              <a:t>  48  </a:t>
-            </a:r>
-            <a:r>
-              <a:rPr sz="1700">
-                <a:solidFill>
-                  <a:srgbClr val="7FE0A0"/>
-                </a:solidFill>
-                <a:latin typeface="Consolas"/>
-              </a:rPr>
-              <a:t>  font-size: 12px;</a:t>
-            </a:r>
-          </a:p>
-          <a:p>
-            <a:pPr>
-              <a:spcAft>
-                <a:spcPts val="0"/>
-              </a:spcAft>
-            </a:pPr>
-            <a:r>
-              <a:rPr sz="1700">
-                <a:solidFill>
-                  <a:srgbClr val="6D8C97"/>
-                </a:solidFill>
-                <a:latin typeface="Consolas"/>
-              </a:rPr>
-              <a:t>  49  </a:t>
-            </a:r>
-            <a:r>
-              <a:rPr sz="1700">
-                <a:solidFill>
-                  <a:srgbClr val="7FE0A0"/>
-                </a:solidFill>
-                <a:latin typeface="Consolas"/>
-              </a:rPr>
-              <a:t>}</a:t>
-            </a:r>
-          </a:p>
-          <a:p>
-            <a:pPr>
-              <a:spcAft>
-                <a:spcPts val="0"/>
-              </a:spcAft>
-            </a:pPr>
-            <a:r>
-              <a:rPr sz="1700">
-                <a:solidFill>
-                  <a:srgbClr val="6D8C97"/>
-                </a:solidFill>
-                <a:latin typeface="Consolas"/>
-              </a:rPr>
-              <a:t>  50  </a:t>
-            </a:r>
-            <a:r>
-              <a:rPr sz="1700">
-                <a:solidFill>
-                  <a:srgbClr val="7FE0A0"/>
-                </a:solidFill>
-                <a:latin typeface="Consolas"/>
-              </a:rPr>
-              <a:t>.credits p { margin: 0 0 4px; }</a:t>
-            </a:r>
-          </a:p>
-        </p:txBody>
-      </p:sp>
-    </p:spTree>
-  </p:cSld>
-  <p:clrMapOvr>
-    <a:masterClrMapping/>
-  </p:clrMapOvr>
-</p:sld>
-</file>
-
-<file path=ppt/slides/slide7.xml><?xml version="1.0" encoding="utf-8"?>
-<p:sld xmlns:a="http://schemas.openxmlformats.org/drawingml/2006/main" xmlns:p="http://schemas.openxmlformats.org/presentationml/2006/main" xmlns:r="http://schemas.openxmlformats.org/officeDocument/2006/relationships">
-  <p:cSld>
-    <p:spTree>
-      <p:nvGrpSpPr>
-        <p:cNvPr id="1" name=""/>
-        <p:cNvGrpSpPr/>
-        <p:nvPr/>
-      </p:nvGrpSpPr>
-      <p:grpSpPr/>
-      <p:sp>
-        <p:nvSpPr>
-          <p:cNvPr id="2" name="Title 1"/>
-          <p:cNvSpPr>
-            <a:spLocks noGrp="1"/>
-          </p:cNvSpPr>
-          <p:nvPr>
-            <p:ph type="title"/>
-          </p:nvPr>
-        </p:nvSpPr>
-        <p:spPr/>
-        <p:txBody>
-          <a:bodyPr/>
-          <a:lstStyle/>
-          <a:p>
-            <a:r>
-              <a:rPr sz="3800" b="1">
-                <a:solidFill>
-                  <a:srgbClr val="1F2A37"/>
-                </a:solidFill>
-              </a:rPr>
-              <a:t>Rehearse in pairs</a:t>
-            </a:r>
-          </a:p>
-        </p:txBody>
-      </p:sp>
-      <p:sp>
-        <p:nvSpPr>
-          <p:cNvPr id="3" name="TextBox 2"/>
+              <a:t>    &lt;p&gt;Built by &lt;strong&gt;your name here&lt;/strong&gt; in AI101 &amp;middot; UTG Academy&lt;/p&gt;</a:t>
+            </a:r>
+          </a:p>
+        </p:txBody>
+      </p:sp>
+      <p:sp>
+        <p:nvSpPr>
+          <p:cNvPr id="4" name="TextBox 3"/>
           <p:cNvSpPr txBox="1"/>
           <p:nvPr/>
         </p:nvSpPr>
         <p:spPr>
           <a:xfrm>
-            <a:off x="822960" y="1828800"/>
-            <a:ext cx="10515600" cy="4206240"/>
+            <a:off x="548640" y="5623560"/>
+            <a:ext cx="11064240" cy="1051560"/>
           </a:xfrm>
           <a:prstGeom prst="rect">
             <a:avLst/>
@@ -4394,63 +11388,13 @@
           </a:bodyPr>
           <a:lstStyle/>
           <a:p>
-            <a:pPr>
-              <a:spcAft>
-                <a:spcPts val="1400"/>
-              </a:spcAft>
-            </a:pPr>
-            <a:r>
-              <a:rPr sz="2800">
-                <a:solidFill>
-                  <a:srgbClr val="01AEFD"/>
-                </a:solidFill>
-              </a:rPr>
-              <a:t>Your partner is a stranger</a:t>
-            </a:r>
-          </a:p>
-          <a:p>
-            <a:pPr>
-              <a:spcAft>
-                <a:spcPts val="1400"/>
-              </a:spcAft>
-            </a:pPr>
-            <a:r>
-              <a:rPr sz="2400">
-                <a:solidFill>
-                  <a:srgbClr val="1F2A37"/>
-                </a:solidFill>
-              </a:rPr>
-              <a:t>• They use it. You say nothing.</a:t>
-            </a:r>
-          </a:p>
-          <a:p>
-            <a:pPr>
-              <a:spcAft>
-                <a:spcPts val="1400"/>
-              </a:spcAft>
-            </a:pPr>
-            <a:r>
-              <a:rPr sz="2400">
-                <a:solidFill>
-                  <a:srgbClr val="1F2A37"/>
-                </a:solidFill>
-              </a:rPr>
-              <a:t>• Watch where they hesitate</a:t>
-            </a:r>
-          </a:p>
-          <a:p>
-            <a:pPr>
-              <a:spcAft>
-                <a:spcPts val="1400"/>
-              </a:spcAft>
-            </a:pPr>
-            <a:r>
-              <a:rPr sz="2400">
-                <a:solidFill>
-                  <a:srgbClr val="1F2A37"/>
-                </a:solidFill>
-              </a:rPr>
-              <a:t>• Then swap</a:t>
+            <a:r>
+              <a:rPr sz="2000">
+                <a:solidFill>
+                  <a:srgbClr val="DCECEF"/>
+                </a:solidFill>
+              </a:rPr>
+              <a:t>Your credit line. &lt;strong&gt; makes your name bold - change 'your name here' to yours!</a:t>
             </a:r>
           </a:p>
         </p:txBody>
@@ -4466,6 +11410,14 @@
 <file path=ppt/slides/slide8.xml><?xml version="1.0" encoding="utf-8"?>
 <p:sld xmlns:a="http://schemas.openxmlformats.org/drawingml/2006/main" xmlns:p="http://schemas.openxmlformats.org/presentationml/2006/main" xmlns:r="http://schemas.openxmlformats.org/officeDocument/2006/relationships">
   <p:cSld>
+    <p:bg>
+      <p:bgPr>
+        <a:solidFill>
+          <a:srgbClr val="102127"/>
+        </a:solidFill>
+        <a:effectLst/>
+      </p:bgPr>
+    </p:bg>
     <p:spTree>
       <p:nvGrpSpPr>
         <p:cNvPr id="1" name=""/>
@@ -4475,40 +11427,14 @@
       <p:grpSpPr/>
       <p:sp>
         <p:nvSpPr>
-          <p:cNvPr id="2" name="Title 1"/>
-          <p:cNvSpPr>
-            <a:spLocks noGrp="1"/>
-          </p:cNvSpPr>
-          <p:nvPr>
-            <p:ph type="title"/>
-          </p:nvPr>
-        </p:nvSpPr>
-        <p:spPr/>
-        <p:txBody>
-          <a:bodyPr/>
-          <a:lstStyle/>
-          <a:p>
-            <a:r>
-              <a:rPr sz="3800" b="1">
-                <a:solidFill>
-                  <a:srgbClr val="1F2A37"/>
-                </a:solidFill>
-              </a:rPr>
-              <a:t>Demo format</a:t>
-            </a:r>
-          </a:p>
-        </p:txBody>
-      </p:sp>
-      <p:sp>
-        <p:nvSpPr>
-          <p:cNvPr id="3" name="TextBox 2"/>
+          <p:cNvPr id="2" name="TextBox 1"/>
           <p:cNvSpPr txBox="1"/>
           <p:nvPr/>
         </p:nvSpPr>
         <p:spPr>
           <a:xfrm>
-            <a:off x="822960" y="1828800"/>
-            <a:ext cx="10515600" cy="4206240"/>
+            <a:off x="502920" y="274320"/>
+            <a:ext cx="11155680" cy="548640"/>
           </a:xfrm>
           <a:prstGeom prst="rect">
             <a:avLst/>
@@ -4516,68 +11442,149 @@
           <a:noFill/>
         </p:spPr>
         <p:txBody>
+          <a:bodyPr wrap="none">
+            <a:spAutoFit/>
+          </a:bodyPr>
+          <a:lstStyle/>
+          <a:p>
+            <a:r>
+              <a:rPr sz="2200" b="1">
+                <a:solidFill>
+                  <a:srgbClr val="01AEFD"/>
+                </a:solidFill>
+              </a:rPr>
+              <a:t>Type this into index.html   -   line 39</a:t>
+            </a:r>
+          </a:p>
+        </p:txBody>
+      </p:sp>
+      <p:sp>
+        <p:nvSpPr>
+          <p:cNvPr id="3" name="TextBox 2"/>
+          <p:cNvSpPr txBox="1"/>
+          <p:nvPr/>
+        </p:nvSpPr>
+        <p:spPr>
+          <a:xfrm>
+            <a:off x="502920" y="960120"/>
+            <a:ext cx="11155680" cy="4297680"/>
+          </a:xfrm>
+          <a:prstGeom prst="rect">
+            <a:avLst/>
+          </a:prstGeom>
+          <a:noFill/>
+        </p:spPr>
+        <p:txBody>
+          <a:bodyPr wrap="none">
+            <a:spAutoFit/>
+          </a:bodyPr>
+          <a:lstStyle/>
+          <a:p>
+            <a:pPr>
+              <a:spcAft>
+                <a:spcPts val="0"/>
+              </a:spcAft>
+            </a:pPr>
+            <a:r>
+              <a:rPr sz="1800">
+                <a:solidFill>
+                  <a:srgbClr val="6D8C97"/>
+                </a:solidFill>
+                <a:latin typeface="Consolas"/>
+              </a:rPr>
+              <a:t>  37  </a:t>
+            </a:r>
+            <a:r>
+              <a:rPr sz="1800">
+                <a:solidFill>
+                  <a:srgbClr val="6D8C97"/>
+                </a:solidFill>
+                <a:latin typeface="Consolas"/>
+              </a:rPr>
+              <a:t>  &lt;footer class="credits"&gt;</a:t>
+            </a:r>
+          </a:p>
+          <a:p>
+            <a:pPr>
+              <a:spcAft>
+                <a:spcPts val="0"/>
+              </a:spcAft>
+            </a:pPr>
+            <a:r>
+              <a:rPr sz="1800">
+                <a:solidFill>
+                  <a:srgbClr val="6D8C97"/>
+                </a:solidFill>
+                <a:latin typeface="Consolas"/>
+              </a:rPr>
+              <a:t>  38  </a:t>
+            </a:r>
+            <a:r>
+              <a:rPr sz="1800">
+                <a:solidFill>
+                  <a:srgbClr val="6D8C97"/>
+                </a:solidFill>
+                <a:latin typeface="Consolas"/>
+              </a:rPr>
+              <a:t>    &lt;p&gt;Built by &lt;strong&gt;your name here&lt;/strong&gt; in AI101 &amp;middot; UTG Academy&lt;/p&gt;</a:t>
+            </a:r>
+          </a:p>
+          <a:p>
+            <a:pPr>
+              <a:spcAft>
+                <a:spcPts val="0"/>
+              </a:spcAft>
+            </a:pPr>
+            <a:r>
+              <a:rPr sz="1800">
+                <a:solidFill>
+                  <a:srgbClr val="6D8C97"/>
+                </a:solidFill>
+                <a:latin typeface="Consolas"/>
+              </a:rPr>
+              <a:t>  39  </a:t>
+            </a:r>
+            <a:r>
+              <a:rPr sz="1800">
+                <a:solidFill>
+                  <a:srgbClr val="7FE0A0"/>
+                </a:solidFill>
+                <a:latin typeface="Consolas"/>
+              </a:rPr>
+              <a:t>    &lt;p&gt;Runs on the school AI server. Written in plain HTML, CSS and JavaScript.&lt;/p&gt;</a:t>
+            </a:r>
+          </a:p>
+        </p:txBody>
+      </p:sp>
+      <p:sp>
+        <p:nvSpPr>
+          <p:cNvPr id="4" name="TextBox 3"/>
+          <p:cNvSpPr txBox="1"/>
+          <p:nvPr/>
+        </p:nvSpPr>
+        <p:spPr>
+          <a:xfrm>
+            <a:off x="548640" y="5623560"/>
+            <a:ext cx="11064240" cy="1051560"/>
+          </a:xfrm>
+          <a:prstGeom prst="rect">
+            <a:avLst/>
+          </a:prstGeom>
+          <a:noFill/>
+        </p:spPr>
+        <p:txBody>
           <a:bodyPr wrap="square">
             <a:spAutoFit/>
           </a:bodyPr>
           <a:lstStyle/>
           <a:p>
-            <a:pPr>
-              <a:spcAft>
-                <a:spcPts val="1400"/>
-              </a:spcAft>
-            </a:pPr>
-            <a:r>
-              <a:rPr sz="2800">
-                <a:solidFill>
-                  <a:srgbClr val="01AEFD"/>
-                </a:solidFill>
-              </a:rPr>
-              <a:t>90 seconds</a:t>
-            </a:r>
-          </a:p>
-          <a:p>
-            <a:pPr>
-              <a:spcAft>
-                <a:spcPts val="1400"/>
-              </a:spcAft>
-            </a:pPr>
-            <a:r>
-              <a:rPr sz="2400">
-                <a:solidFill>
-                  <a:srgbClr val="1F2A37"/>
-                </a:solidFill>
-              </a:rPr>
-              <a:t>• What it is</a:t>
-            </a:r>
-          </a:p>
-          <a:p>
-            <a:pPr>
-              <a:spcAft>
-                <a:spcPts val="1400"/>
-              </a:spcAft>
-            </a:pPr>
-            <a:r>
-              <a:rPr sz="2400">
-                <a:solidFill>
-                  <a:srgbClr val="1F2A37"/>
-                </a:solidFill>
-              </a:rPr>
-              <a:t>• One conversation</a:t>
-            </a:r>
-          </a:p>
-          <a:p>
-            <a:pPr>
-              <a:spcAft>
-                <a:spcPts val="1400"/>
-              </a:spcAft>
-            </a:pPr>
-            <a:r>
-              <a:rPr sz="2400">
-                <a:solidFill>
-                  <a:srgbClr val="1F2A37"/>
-                </a:solidFill>
-              </a:rPr>
-              <a:t>• One thing that was hard</a:t>
+            <a:r>
+              <a:rPr sz="2000">
+                <a:solidFill>
+                  <a:srgbClr val="DCECEF"/>
+                </a:solidFill>
+              </a:rPr>
+              <a:t>A line about what it runs on.</a:t>
             </a:r>
           </a:p>
         </p:txBody>
@@ -4593,6 +11600,14 @@
 <file path=ppt/slides/slide9.xml><?xml version="1.0" encoding="utf-8"?>
 <p:sld xmlns:a="http://schemas.openxmlformats.org/drawingml/2006/main" xmlns:p="http://schemas.openxmlformats.org/presentationml/2006/main" xmlns:r="http://schemas.openxmlformats.org/officeDocument/2006/relationships">
   <p:cSld>
+    <p:bg>
+      <p:bgPr>
+        <a:solidFill>
+          <a:srgbClr val="102127"/>
+        </a:solidFill>
+        <a:effectLst/>
+      </p:bgPr>
+    </p:bg>
     <p:spTree>
       <p:nvGrpSpPr>
         <p:cNvPr id="1" name=""/>
@@ -4602,40 +11617,14 @@
       <p:grpSpPr/>
       <p:sp>
         <p:nvSpPr>
-          <p:cNvPr id="2" name="Title 1"/>
-          <p:cNvSpPr>
-            <a:spLocks noGrp="1"/>
-          </p:cNvSpPr>
-          <p:nvPr>
-            <p:ph type="title"/>
-          </p:nvPr>
-        </p:nvSpPr>
-        <p:spPr/>
-        <p:txBody>
-          <a:bodyPr/>
-          <a:lstStyle/>
-          <a:p>
-            <a:r>
-              <a:rPr sz="3800" b="1">
-                <a:solidFill>
-                  <a:srgbClr val="1F2A37"/>
-                </a:solidFill>
-              </a:rPr>
-              <a:t>What did the machine never do?</a:t>
-            </a:r>
-          </a:p>
-        </p:txBody>
-      </p:sp>
-      <p:sp>
-        <p:nvSpPr>
-          <p:cNvPr id="3" name="TextBox 2"/>
+          <p:cNvPr id="2" name="TextBox 1"/>
           <p:cNvSpPr txBox="1"/>
           <p:nvPr/>
         </p:nvSpPr>
         <p:spPr>
           <a:xfrm>
-            <a:off x="822960" y="1828800"/>
-            <a:ext cx="10515600" cy="4206240"/>
+            <a:off x="502920" y="274320"/>
+            <a:ext cx="11155680" cy="548640"/>
           </a:xfrm>
           <a:prstGeom prst="rect">
             <a:avLst/>
@@ -4643,68 +11632,174 @@
           <a:noFill/>
         </p:spPr>
         <p:txBody>
+          <a:bodyPr wrap="none">
+            <a:spAutoFit/>
+          </a:bodyPr>
+          <a:lstStyle/>
+          <a:p>
+            <a:r>
+              <a:rPr sz="2200" b="1">
+                <a:solidFill>
+                  <a:srgbClr val="01AEFD"/>
+                </a:solidFill>
+              </a:rPr>
+              <a:t>Type this into index.html   -   line 40</a:t>
+            </a:r>
+          </a:p>
+        </p:txBody>
+      </p:sp>
+      <p:sp>
+        <p:nvSpPr>
+          <p:cNvPr id="3" name="TextBox 2"/>
+          <p:cNvSpPr txBox="1"/>
+          <p:nvPr/>
+        </p:nvSpPr>
+        <p:spPr>
+          <a:xfrm>
+            <a:off x="502920" y="960120"/>
+            <a:ext cx="11155680" cy="4297680"/>
+          </a:xfrm>
+          <a:prstGeom prst="rect">
+            <a:avLst/>
+          </a:prstGeom>
+          <a:noFill/>
+        </p:spPr>
+        <p:txBody>
+          <a:bodyPr wrap="none">
+            <a:spAutoFit/>
+          </a:bodyPr>
+          <a:lstStyle/>
+          <a:p>
+            <a:pPr>
+              <a:spcAft>
+                <a:spcPts val="0"/>
+              </a:spcAft>
+            </a:pPr>
+            <a:r>
+              <a:rPr sz="1800">
+                <a:solidFill>
+                  <a:srgbClr val="6D8C97"/>
+                </a:solidFill>
+                <a:latin typeface="Consolas"/>
+              </a:rPr>
+              <a:t>  37  </a:t>
+            </a:r>
+            <a:r>
+              <a:rPr sz="1800">
+                <a:solidFill>
+                  <a:srgbClr val="6D8C97"/>
+                </a:solidFill>
+                <a:latin typeface="Consolas"/>
+              </a:rPr>
+              <a:t>  &lt;footer class="credits"&gt;</a:t>
+            </a:r>
+          </a:p>
+          <a:p>
+            <a:pPr>
+              <a:spcAft>
+                <a:spcPts val="0"/>
+              </a:spcAft>
+            </a:pPr>
+            <a:r>
+              <a:rPr sz="1800">
+                <a:solidFill>
+                  <a:srgbClr val="6D8C97"/>
+                </a:solidFill>
+                <a:latin typeface="Consolas"/>
+              </a:rPr>
+              <a:t>  38  </a:t>
+            </a:r>
+            <a:r>
+              <a:rPr sz="1800">
+                <a:solidFill>
+                  <a:srgbClr val="6D8C97"/>
+                </a:solidFill>
+                <a:latin typeface="Consolas"/>
+              </a:rPr>
+              <a:t>    &lt;p&gt;Built by &lt;strong&gt;your name here&lt;/strong&gt; in AI101 &amp;middot; UTG Academy&lt;/p&gt;</a:t>
+            </a:r>
+          </a:p>
+          <a:p>
+            <a:pPr>
+              <a:spcAft>
+                <a:spcPts val="0"/>
+              </a:spcAft>
+            </a:pPr>
+            <a:r>
+              <a:rPr sz="1800">
+                <a:solidFill>
+                  <a:srgbClr val="6D8C97"/>
+                </a:solidFill>
+                <a:latin typeface="Consolas"/>
+              </a:rPr>
+              <a:t>  39  </a:t>
+            </a:r>
+            <a:r>
+              <a:rPr sz="1800">
+                <a:solidFill>
+                  <a:srgbClr val="6D8C97"/>
+                </a:solidFill>
+                <a:latin typeface="Consolas"/>
+              </a:rPr>
+              <a:t>    &lt;p&gt;Runs on the school AI server. Written in plain HTML, CSS and JavaScript.&lt;/p&gt;</a:t>
+            </a:r>
+          </a:p>
+          <a:p>
+            <a:pPr>
+              <a:spcAft>
+                <a:spcPts val="0"/>
+              </a:spcAft>
+            </a:pPr>
+            <a:r>
+              <a:rPr sz="1800">
+                <a:solidFill>
+                  <a:srgbClr val="6D8C97"/>
+                </a:solidFill>
+                <a:latin typeface="Consolas"/>
+              </a:rPr>
+              <a:t>  40  </a:t>
+            </a:r>
+            <a:r>
+              <a:rPr sz="1800">
+                <a:solidFill>
+                  <a:srgbClr val="7FE0A0"/>
+                </a:solidFill>
+                <a:latin typeface="Consolas"/>
+              </a:rPr>
+              <a:t>  &lt;/footer&gt;</a:t>
+            </a:r>
+          </a:p>
+        </p:txBody>
+      </p:sp>
+      <p:sp>
+        <p:nvSpPr>
+          <p:cNvPr id="4" name="TextBox 3"/>
+          <p:cNvSpPr txBox="1"/>
+          <p:nvPr/>
+        </p:nvSpPr>
+        <p:spPr>
+          <a:xfrm>
+            <a:off x="548640" y="5623560"/>
+            <a:ext cx="11064240" cy="1051560"/>
+          </a:xfrm>
+          <a:prstGeom prst="rect">
+            <a:avLst/>
+          </a:prstGeom>
+          <a:noFill/>
+        </p:spPr>
+        <p:txBody>
           <a:bodyPr wrap="square">
             <a:spAutoFit/>
           </a:bodyPr>
           <a:lstStyle/>
           <a:p>
-            <a:pPr>
-              <a:spcAft>
-                <a:spcPts val="1400"/>
-              </a:spcAft>
-            </a:pPr>
-            <a:r>
-              <a:rPr sz="2400">
-                <a:solidFill>
-                  <a:srgbClr val="1F2A37"/>
-                </a:solidFill>
-              </a:rPr>
-              <a:t>• It never knew anything was true</a:t>
-            </a:r>
-          </a:p>
-          <a:p>
-            <a:pPr>
-              <a:spcAft>
-                <a:spcPts val="1400"/>
-              </a:spcAft>
-            </a:pPr>
-            <a:r>
-              <a:rPr sz="2400">
-                <a:solidFill>
-                  <a:srgbClr val="1F2A37"/>
-                </a:solidFill>
-              </a:rPr>
-              <a:t>• It never remembered you</a:t>
-            </a:r>
-          </a:p>
-          <a:p>
-            <a:pPr>
-              <a:spcAft>
-                <a:spcPts val="1400"/>
-              </a:spcAft>
-            </a:pPr>
-            <a:r>
-              <a:rPr sz="2400">
-                <a:solidFill>
-                  <a:srgbClr val="1F2A37"/>
-                </a:solidFill>
-              </a:rPr>
-              <a:t>• It never decided anything</a:t>
-            </a:r>
-          </a:p>
-          <a:p>
-            <a:pPr>
-              <a:spcAft>
-                <a:spcPts val="1400"/>
-              </a:spcAft>
-            </a:pPr>
-            <a:r>
-              <a:rPr sz="2400">
-                <a:solidFill>
-                  <a:srgbClr val="1F2A37"/>
-                </a:solidFill>
-              </a:rPr>
-              <a:t>• You built all of that</a:t>
+            <a:r>
+              <a:rPr sz="2000">
+                <a:solidFill>
+                  <a:srgbClr val="DCECEF"/>
+                </a:solidFill>
+              </a:rPr>
+              <a:t>Close the footer.</a:t>
             </a:r>
           </a:p>
         </p:txBody>

--- a/ai101/slides/week-15.pptx
+++ b/ai101/slides/week-15.pptx
@@ -4387,12 +4387,57 @@
               </a:spcAft>
             </a:pPr>
             <a:r>
+              <a:rPr sz="2800">
+                <a:solidFill>
+                  <a:srgbClr val="01AEFD"/>
+                </a:solidFill>
+              </a:rPr>
+              <a:t>padding-top: 14px;</a:t>
+            </a:r>
+          </a:p>
+          <a:p>
+            <a:pPr>
+              <a:spcAft>
+                <a:spcPts val="1400"/>
+              </a:spcAft>
+            </a:pPr>
+            <a:r>
               <a:rPr sz="2400">
                 <a:solidFill>
                   <a:srgbClr val="1F2A37"/>
                 </a:solidFill>
               </a:rPr>
-              <a:t>• Space inside the box, at the top only.</a:t>
+              <a:t>• Space INSIDE the box, at the top only.</a:t>
+            </a:r>
+          </a:p>
+          <a:p>
+            <a:pPr>
+              <a:spcAft>
+                <a:spcPts val="1400"/>
+              </a:spcAft>
+            </a:pPr>
+            <a:r>
+              <a:rPr sz="2400">
+                <a:solidFill>
+                  <a:srgbClr val="1F2A37"/>
+                </a:solidFill>
+              </a:rPr>
+              <a:t>• One side of padding (week 1), which cushioned all four edges.</a:t>
+            </a:r>
+          </a:p>
+          <a:p>
+            <a:pPr>
+              <a:spcAft>
+                <a:spcPts val="1400"/>
+              </a:spcAft>
+            </a:pPr>
+            <a:r>
+              <a:rPr sz="2400">
+                <a:solidFill>
+                  <a:srgbClr val="1F2A37"/>
+                </a:solidFill>
+              </a:rPr>
+              <a:t>• It adds room above the credits, under the divider line.</a:t>
             </a:r>
           </a:p>
         </p:txBody>
@@ -4967,12 +5012,57 @@
               </a:spcAft>
             </a:pPr>
             <a:r>
+              <a:rPr sz="2800">
+                <a:solidFill>
+                  <a:srgbClr val="01AEFD"/>
+                </a:solidFill>
+              </a:rPr>
+              <a:t>border-top: 1px solid #dbe3ec;</a:t>
+            </a:r>
+          </a:p>
+          <a:p>
+            <a:pPr>
+              <a:spcAft>
+                <a:spcPts val="1400"/>
+              </a:spcAft>
+            </a:pPr>
+            <a:r>
               <a:rPr sz="2400">
                 <a:solidFill>
                   <a:srgbClr val="1F2A37"/>
                 </a:solidFill>
               </a:rPr>
-              <a:t>• A line along just the top edge - a divider above the footer.</a:t>
+              <a:t>• A line along just the TOP edge.</a:t>
+            </a:r>
+          </a:p>
+          <a:p>
+            <a:pPr>
+              <a:spcAft>
+                <a:spcPts val="1400"/>
+              </a:spcAft>
+            </a:pPr>
+            <a:r>
+              <a:rPr sz="2400">
+                <a:solidFill>
+                  <a:srgbClr val="1F2A37"/>
+                </a:solidFill>
+              </a:rPr>
+              <a:t>• The opposite side from border-left (week 14).</a:t>
+            </a:r>
+          </a:p>
+          <a:p>
+            <a:pPr>
+              <a:spcAft>
+                <a:spcPts val="1400"/>
+              </a:spcAft>
+            </a:pPr>
+            <a:r>
+              <a:rPr sz="2400">
+                <a:solidFill>
+                  <a:srgbClr val="1F2A37"/>
+                </a:solidFill>
+              </a:rPr>
+              <a:t>• A thin divider that separates the footer from the chat above it.</a:t>
             </a:r>
           </a:p>
         </p:txBody>
@@ -10969,12 +11059,57 @@
               </a:spcAft>
             </a:pPr>
             <a:r>
+              <a:rPr sz="2800">
+                <a:solidFill>
+                  <a:srgbClr val="01AEFD"/>
+                </a:solidFill>
+              </a:rPr>
+              <a:t>&lt;footer class="credits"&gt; ... &lt;/footer&gt;</a:t>
+            </a:r>
+          </a:p>
+          <a:p>
+            <a:pPr>
+              <a:spcAft>
+                <a:spcPts val="1400"/>
+              </a:spcAft>
+            </a:pPr>
+            <a:r>
               <a:rPr sz="2400">
                 <a:solidFill>
                   <a:srgbClr val="1F2A37"/>
                 </a:solidFill>
               </a:rPr>
-              <a:t>• A box for the strip at the BOTTOM of the page - credits and small print.</a:t>
+              <a:t>• A box for the strip at the BOTTOM of the page.</a:t>
+            </a:r>
+          </a:p>
+          <a:p>
+            <a:pPr>
+              <a:spcAft>
+                <a:spcPts val="1400"/>
+              </a:spcAft>
+            </a:pPr>
+            <a:r>
+              <a:rPr sz="2400">
+                <a:solidFill>
+                  <a:srgbClr val="1F2A37"/>
+                </a:solidFill>
+              </a:rPr>
+              <a:t>• The mirror of &lt;header&gt; (week 1), which was the top strip.</a:t>
+            </a:r>
+          </a:p>
+          <a:p>
+            <a:pPr>
+              <a:spcAft>
+                <a:spcPts val="1400"/>
+              </a:spcAft>
+            </a:pPr>
+            <a:r>
+              <a:rPr sz="2400">
+                <a:solidFill>
+                  <a:srgbClr val="1F2A37"/>
+                </a:solidFill>
+              </a:rPr>
+              <a:t>• Credits and small print live in here.</a:t>
             </a:r>
           </a:p>
         </p:txBody>
@@ -11224,12 +11359,57 @@
               </a:spcAft>
             </a:pPr>
             <a:r>
+              <a:rPr sz="2800">
+                <a:solidFill>
+                  <a:srgbClr val="01AEFD"/>
+                </a:solidFill>
+              </a:rPr>
+              <a:t>&lt;strong&gt;your name here&lt;/strong&gt;</a:t>
+            </a:r>
+          </a:p>
+          <a:p>
+            <a:pPr>
+              <a:spcAft>
+                <a:spcPts val="1400"/>
+              </a:spcAft>
+            </a:pPr>
+            <a:r>
               <a:rPr sz="2400">
                 <a:solidFill>
                   <a:srgbClr val="1F2A37"/>
                 </a:solidFill>
               </a:rPr>
               <a:t>• Makes the text inside it bold, so it stands out.</a:t>
+            </a:r>
+          </a:p>
+          <a:p>
+            <a:pPr>
+              <a:spcAft>
+                <a:spcPts val="1400"/>
+              </a:spcAft>
+            </a:pPr>
+            <a:r>
+              <a:rPr sz="2400">
+                <a:solidFill>
+                  <a:srgbClr val="1F2A37"/>
+                </a:solidFill>
+              </a:rPr>
+              <a:t>• It wraps a few words mid-sentence, the way &lt;p&gt; (week 1) wraps a paragraph.</a:t>
+            </a:r>
+          </a:p>
+          <a:p>
+            <a:pPr>
+              <a:spcAft>
+                <a:spcPts val="1400"/>
+              </a:spcAft>
+            </a:pPr>
+            <a:r>
+              <a:rPr sz="2400">
+                <a:solidFill>
+                  <a:srgbClr val="1F2A37"/>
+                </a:solidFill>
+              </a:rPr>
+              <a:t>• Use it for your name in the credits.</a:t>
             </a:r>
           </a:p>
         </p:txBody>

--- a/ai101/slides/week-15.pptx
+++ b/ai101/slides/week-15.pptx
@@ -10176,7 +10176,7 @@
                   <a:srgbClr val="1F2A37"/>
                 </a:solidFill>
               </a:rPr>
-              <a:t>• A. The bottom strip of the page - credits and small print</a:t>
+              <a:t>• A. The main chat</a:t>
             </a:r>
           </a:p>
           <a:p>
@@ -10191,7 +10191,7 @@
                   <a:srgbClr val="1F2A37"/>
                 </a:solidFill>
               </a:rPr>
-              <a:t>• B. The main chat</a:t>
+              <a:t>• B. The title</a:t>
             </a:r>
           </a:p>
           <a:p>
@@ -10206,7 +10206,7 @@
                   <a:srgbClr val="1F2A37"/>
                 </a:solidFill>
               </a:rPr>
-              <a:t>• C. The title</a:t>
+              <a:t>• C. The character buttons</a:t>
             </a:r>
           </a:p>
           <a:p>
@@ -10221,7 +10221,7 @@
                   <a:srgbClr val="1F2A37"/>
                 </a:solidFill>
               </a:rPr>
-              <a:t>• D. The character buttons</a:t>
+              <a:t>• D. The bottom strip of the page - credits and small print</a:t>
             </a:r>
           </a:p>
           <a:p>
@@ -10351,7 +10351,7 @@
                   <a:srgbClr val="1F2A37"/>
                 </a:solidFill>
               </a:rPr>
-              <a:t>• A. The bottom strip of the page - credits and small print (correct)</a:t>
+              <a:t>• A. The main chat</a:t>
             </a:r>
           </a:p>
           <a:p>
@@ -10366,7 +10366,7 @@
                   <a:srgbClr val="1F2A37"/>
                 </a:solidFill>
               </a:rPr>
-              <a:t>• B. The main chat</a:t>
+              <a:t>• B. The title</a:t>
             </a:r>
           </a:p>
           <a:p>
@@ -10381,7 +10381,7 @@
                   <a:srgbClr val="1F2A37"/>
                 </a:solidFill>
               </a:rPr>
-              <a:t>• C. The title</a:t>
+              <a:t>• C. The character buttons</a:t>
             </a:r>
           </a:p>
           <a:p>
@@ -10396,7 +10396,7 @@
                   <a:srgbClr val="1F2A37"/>
                 </a:solidFill>
               </a:rPr>
-              <a:t>• D. The character buttons</a:t>
+              <a:t>• D. The bottom strip of the page - credits and small print (correct)</a:t>
             </a:r>
           </a:p>
           <a:p>
@@ -10526,7 +10526,7 @@
                   <a:srgbClr val="1F2A37"/>
                 </a:solidFill>
               </a:rPr>
-              <a:t>• A. bold</a:t>
+              <a:t>• A. blue</a:t>
             </a:r>
           </a:p>
           <a:p>
@@ -10541,7 +10541,7 @@
                   <a:srgbClr val="1F2A37"/>
                 </a:solidFill>
               </a:rPr>
-              <a:t>• B. blue</a:t>
+              <a:t>• B. bigger</a:t>
             </a:r>
           </a:p>
           <a:p>
@@ -10556,7 +10556,7 @@
                   <a:srgbClr val="1F2A37"/>
                 </a:solidFill>
               </a:rPr>
-              <a:t>• C. bigger</a:t>
+              <a:t>• C. bold</a:t>
             </a:r>
           </a:p>
           <a:p>
@@ -10701,7 +10701,7 @@
                   <a:srgbClr val="1F2A37"/>
                 </a:solidFill>
               </a:rPr>
-              <a:t>• A. bold (correct)</a:t>
+              <a:t>• A. blue</a:t>
             </a:r>
           </a:p>
           <a:p>
@@ -10716,7 +10716,7 @@
                   <a:srgbClr val="1F2A37"/>
                 </a:solidFill>
               </a:rPr>
-              <a:t>• B. blue</a:t>
+              <a:t>• B. bigger</a:t>
             </a:r>
           </a:p>
           <a:p>
@@ -10731,7 +10731,7 @@
                   <a:srgbClr val="1F2A37"/>
                 </a:solidFill>
               </a:rPr>
-              <a:t>• C. bigger</a:t>
+              <a:t>• C. bold (correct)</a:t>
             </a:r>
           </a:p>
           <a:p>
@@ -11003,7 +11003,7 @@
                   <a:srgbClr val="1F2A37"/>
                 </a:solidFill>
               </a:rPr>
-              <a:t>• A. You keep a history array and resend all of it every time</a:t>
+              <a:t>• A. The server stores it</a:t>
             </a:r>
           </a:p>
           <a:p>
@@ -11018,7 +11018,7 @@
                   <a:srgbClr val="1F2A37"/>
                 </a:solidFill>
               </a:rPr>
-              <a:t>• B. The server stores it</a:t>
+              <a:t>• B. You keep a history array and resend all of it every time</a:t>
             </a:r>
           </a:p>
           <a:p>
@@ -11178,7 +11178,7 @@
                   <a:srgbClr val="1F2A37"/>
                 </a:solidFill>
               </a:rPr>
-              <a:t>• A. You keep a history array and resend all of it every time (correct)</a:t>
+              <a:t>• A. The server stores it</a:t>
             </a:r>
           </a:p>
           <a:p>
@@ -11193,7 +11193,7 @@
                   <a:srgbClr val="1F2A37"/>
                 </a:solidFill>
               </a:rPr>
-              <a:t>• B. The server stores it</a:t>
+              <a:t>• B. You keep a history array and resend all of it every time (correct)</a:t>
             </a:r>
           </a:p>
           <a:p>
@@ -11353,7 +11353,7 @@
                   <a:srgbClr val="1F2A37"/>
                 </a:solidFill>
               </a:rPr>
-              <a:t>• A. arrive in pieces as it is written</a:t>
+              <a:t>• A. shorter</a:t>
             </a:r>
           </a:p>
           <a:p>
@@ -11368,7 +11368,7 @@
                   <a:srgbClr val="1F2A37"/>
                 </a:solidFill>
               </a:rPr>
-              <a:t>• B. shorter</a:t>
+              <a:t>• B. faster overall</a:t>
             </a:r>
           </a:p>
           <a:p>
@@ -11383,7 +11383,7 @@
                   <a:srgbClr val="1F2A37"/>
                 </a:solidFill>
               </a:rPr>
-              <a:t>• C. faster overall</a:t>
+              <a:t>• C. arrive in pieces as it is written</a:t>
             </a:r>
           </a:p>
           <a:p>
@@ -11528,7 +11528,7 @@
                   <a:srgbClr val="1F2A37"/>
                 </a:solidFill>
               </a:rPr>
-              <a:t>• A. arrive in pieces as it is written (correct)</a:t>
+              <a:t>• A. shorter</a:t>
             </a:r>
           </a:p>
           <a:p>
@@ -11543,7 +11543,7 @@
                   <a:srgbClr val="1F2A37"/>
                 </a:solidFill>
               </a:rPr>
-              <a:t>• B. shorter</a:t>
+              <a:t>• B. faster overall</a:t>
             </a:r>
           </a:p>
           <a:p>
@@ -11558,7 +11558,7 @@
                   <a:srgbClr val="1F2A37"/>
                 </a:solidFill>
               </a:rPr>
-              <a:t>• C. faster overall</a:t>
+              <a:t>• C. arrive in pieces as it is written (correct)</a:t>
             </a:r>
           </a:p>
           <a:p>
@@ -11703,7 +11703,7 @@
                   <a:srgbClr val="1F2A37"/>
                 </a:solidFill>
               </a:rPr>
-              <a:t>• A. onPiece, the function passed into askAI</a:t>
+              <a:t>• A. the server</a:t>
             </a:r>
           </a:p>
           <a:p>
@@ -11718,7 +11718,7 @@
                   <a:srgbClr val="1F2A37"/>
                 </a:solidFill>
               </a:rPr>
-              <a:t>• B. the server</a:t>
+              <a:t>• B. a timer</a:t>
             </a:r>
           </a:p>
           <a:p>
@@ -11733,7 +11733,7 @@
                   <a:srgbClr val="1F2A37"/>
                 </a:solidFill>
               </a:rPr>
-              <a:t>• C. a timer</a:t>
+              <a:t>• C. onPiece, the function passed into askAI</a:t>
             </a:r>
           </a:p>
           <a:p>
@@ -11878,7 +11878,7 @@
                   <a:srgbClr val="1F2A37"/>
                 </a:solidFill>
               </a:rPr>
-              <a:t>• A. onPiece, the function passed into askAI (correct)</a:t>
+              <a:t>• A. the server</a:t>
             </a:r>
           </a:p>
           <a:p>
@@ -11893,7 +11893,7 @@
                   <a:srgbClr val="1F2A37"/>
                 </a:solidFill>
               </a:rPr>
-              <a:t>• B. the server</a:t>
+              <a:t>• B. a timer</a:t>
             </a:r>
           </a:p>
           <a:p>
@@ -11908,7 +11908,7 @@
                   <a:srgbClr val="1F2A37"/>
                 </a:solidFill>
               </a:rPr>
-              <a:t>• C. a timer</a:t>
+              <a:t>• C. onPiece, the function passed into askAI (correct)</a:t>
             </a:r>
           </a:p>
           <a:p>

--- a/ai101/slides/week-15.pptx
+++ b/ai101/slides/week-15.pptx
@@ -5084,7 +5084,7 @@
         <p:spPr>
           <a:xfrm>
             <a:off x="3606393" y="2554833"/>
-            <a:ext cx="4945075" cy="1806854"/>
+            <a:ext cx="4945075" cy="1730776"/>
           </a:xfrm>
           <a:prstGeom prst="roundRect">
             <a:avLst/>
@@ -5259,8 +5259,8 @@
         </p:nvSpPr>
         <p:spPr>
           <a:xfrm>
-            <a:off x="3701491" y="4856195"/>
-            <a:ext cx="3899001" cy="323331"/>
+            <a:off x="3701491" y="4409236"/>
+            <a:ext cx="1426463" cy="228234"/>
           </a:xfrm>
           <a:prstGeom prst="roundRect">
             <a:avLst/>
@@ -5303,6 +5303,94 @@
         </p:nvSpPr>
         <p:spPr>
           <a:xfrm>
+            <a:off x="5223052" y="4409236"/>
+            <a:ext cx="1426463" cy="228234"/>
+          </a:xfrm>
+          <a:prstGeom prst="roundRect">
+            <a:avLst/>
+          </a:prstGeom>
+          <a:solidFill>
+            <a:srgbClr val="16303A"/>
+          </a:solidFill>
+          <a:ln>
+            <a:noFill/>
+          </a:ln>
+          <a:effectLst/>
+        </p:spPr>
+        <p:style>
+          <a:lnRef idx="1">
+            <a:schemeClr val="accent1"/>
+          </a:lnRef>
+          <a:fillRef idx="3">
+            <a:schemeClr val="accent1"/>
+          </a:fillRef>
+          <a:effectRef idx="2">
+            <a:schemeClr val="accent1"/>
+          </a:effectRef>
+          <a:fontRef idx="minor">
+            <a:schemeClr val="lt1"/>
+          </a:fontRef>
+        </p:style>
+        <p:txBody>
+          <a:bodyPr rtlCol="0" anchor="ctr"/>
+          <a:lstStyle/>
+          <a:p>
+            <a:pPr algn="ctr"/>
+          </a:p>
+        </p:txBody>
+      </p:sp>
+      <p:sp>
+        <p:nvSpPr>
+          <p:cNvPr id="13" name="Rounded Rectangle 12"/>
+          <p:cNvSpPr/>
+          <p:nvPr/>
+        </p:nvSpPr>
+        <p:spPr>
+          <a:xfrm>
+            <a:off x="3701491" y="4856195"/>
+            <a:ext cx="3899001" cy="323331"/>
+          </a:xfrm>
+          <a:prstGeom prst="roundRect">
+            <a:avLst/>
+          </a:prstGeom>
+          <a:solidFill>
+            <a:srgbClr val="16303A"/>
+          </a:solidFill>
+          <a:ln>
+            <a:noFill/>
+          </a:ln>
+          <a:effectLst/>
+        </p:spPr>
+        <p:style>
+          <a:lnRef idx="1">
+            <a:schemeClr val="accent1"/>
+          </a:lnRef>
+          <a:fillRef idx="3">
+            <a:schemeClr val="accent1"/>
+          </a:fillRef>
+          <a:effectRef idx="2">
+            <a:schemeClr val="accent1"/>
+          </a:effectRef>
+          <a:fontRef idx="minor">
+            <a:schemeClr val="lt1"/>
+          </a:fontRef>
+        </p:style>
+        <p:txBody>
+          <a:bodyPr rtlCol="0" anchor="ctr"/>
+          <a:lstStyle/>
+          <a:p>
+            <a:pPr algn="ctr"/>
+          </a:p>
+        </p:txBody>
+      </p:sp>
+      <p:sp>
+        <p:nvSpPr>
+          <p:cNvPr id="14" name="Rounded Rectangle 13"/>
+          <p:cNvSpPr/>
+          <p:nvPr/>
+        </p:nvSpPr>
+        <p:spPr>
+          <a:xfrm>
             <a:off x="7695590" y="4856195"/>
             <a:ext cx="779800" cy="323331"/>
           </a:xfrm>
@@ -5341,7 +5429,7 @@
       </p:sp>
       <p:sp>
         <p:nvSpPr>
-          <p:cNvPr id="13" name="Rounded Rectangle 12"/>
+          <p:cNvPr id="15" name="Rounded Rectangle 14"/>
           <p:cNvSpPr/>
           <p:nvPr/>
         </p:nvSpPr>
@@ -5385,7 +5473,7 @@
       </p:sp>
       <p:sp>
         <p:nvSpPr>
-          <p:cNvPr id="14" name="Rounded Rectangle 13"/>
+          <p:cNvPr id="16" name="Rounded Rectangle 15"/>
           <p:cNvSpPr/>
           <p:nvPr/>
         </p:nvSpPr>
@@ -5429,7 +5517,7 @@
       </p:sp>
       <p:sp>
         <p:nvSpPr>
-          <p:cNvPr id="15" name="TextBox 14"/>
+          <p:cNvPr id="17" name="TextBox 16"/>
           <p:cNvSpPr txBox="1"/>
           <p:nvPr/>
         </p:nvSpPr>
@@ -6318,7 +6406,7 @@
         <p:spPr>
           <a:xfrm>
             <a:off x="3606393" y="2554833"/>
-            <a:ext cx="4945075" cy="1806854"/>
+            <a:ext cx="4945075" cy="1730776"/>
           </a:xfrm>
           <a:prstGeom prst="roundRect">
             <a:avLst/>
@@ -6493,8 +6581,8 @@
         </p:nvSpPr>
         <p:spPr>
           <a:xfrm>
-            <a:off x="3701491" y="4856195"/>
-            <a:ext cx="3899001" cy="323331"/>
+            <a:off x="3701491" y="4409236"/>
+            <a:ext cx="1426463" cy="228234"/>
           </a:xfrm>
           <a:prstGeom prst="roundRect">
             <a:avLst/>
@@ -6537,6 +6625,94 @@
         </p:nvSpPr>
         <p:spPr>
           <a:xfrm>
+            <a:off x="5223052" y="4409236"/>
+            <a:ext cx="1426463" cy="228234"/>
+          </a:xfrm>
+          <a:prstGeom prst="roundRect">
+            <a:avLst/>
+          </a:prstGeom>
+          <a:solidFill>
+            <a:srgbClr val="16303A"/>
+          </a:solidFill>
+          <a:ln>
+            <a:noFill/>
+          </a:ln>
+          <a:effectLst/>
+        </p:spPr>
+        <p:style>
+          <a:lnRef idx="1">
+            <a:schemeClr val="accent1"/>
+          </a:lnRef>
+          <a:fillRef idx="3">
+            <a:schemeClr val="accent1"/>
+          </a:fillRef>
+          <a:effectRef idx="2">
+            <a:schemeClr val="accent1"/>
+          </a:effectRef>
+          <a:fontRef idx="minor">
+            <a:schemeClr val="lt1"/>
+          </a:fontRef>
+        </p:style>
+        <p:txBody>
+          <a:bodyPr rtlCol="0" anchor="ctr"/>
+          <a:lstStyle/>
+          <a:p>
+            <a:pPr algn="ctr"/>
+          </a:p>
+        </p:txBody>
+      </p:sp>
+      <p:sp>
+        <p:nvSpPr>
+          <p:cNvPr id="13" name="Rounded Rectangle 12"/>
+          <p:cNvSpPr/>
+          <p:nvPr/>
+        </p:nvSpPr>
+        <p:spPr>
+          <a:xfrm>
+            <a:off x="3701491" y="4856195"/>
+            <a:ext cx="3899001" cy="323331"/>
+          </a:xfrm>
+          <a:prstGeom prst="roundRect">
+            <a:avLst/>
+          </a:prstGeom>
+          <a:solidFill>
+            <a:srgbClr val="16303A"/>
+          </a:solidFill>
+          <a:ln>
+            <a:noFill/>
+          </a:ln>
+          <a:effectLst/>
+        </p:spPr>
+        <p:style>
+          <a:lnRef idx="1">
+            <a:schemeClr val="accent1"/>
+          </a:lnRef>
+          <a:fillRef idx="3">
+            <a:schemeClr val="accent1"/>
+          </a:fillRef>
+          <a:effectRef idx="2">
+            <a:schemeClr val="accent1"/>
+          </a:effectRef>
+          <a:fontRef idx="minor">
+            <a:schemeClr val="lt1"/>
+          </a:fontRef>
+        </p:style>
+        <p:txBody>
+          <a:bodyPr rtlCol="0" anchor="ctr"/>
+          <a:lstStyle/>
+          <a:p>
+            <a:pPr algn="ctr"/>
+          </a:p>
+        </p:txBody>
+      </p:sp>
+      <p:sp>
+        <p:nvSpPr>
+          <p:cNvPr id="14" name="Rounded Rectangle 13"/>
+          <p:cNvSpPr/>
+          <p:nvPr/>
+        </p:nvSpPr>
+        <p:spPr>
+          <a:xfrm>
             <a:off x="7695590" y="4856195"/>
             <a:ext cx="779800" cy="323331"/>
           </a:xfrm>
@@ -6575,7 +6751,7 @@
       </p:sp>
       <p:sp>
         <p:nvSpPr>
-          <p:cNvPr id="13" name="Rounded Rectangle 12"/>
+          <p:cNvPr id="15" name="Rounded Rectangle 14"/>
           <p:cNvSpPr/>
           <p:nvPr/>
         </p:nvSpPr>
@@ -6619,7 +6795,7 @@
       </p:sp>
       <p:sp>
         <p:nvSpPr>
-          <p:cNvPr id="14" name="Rounded Rectangle 13"/>
+          <p:cNvPr id="16" name="Rounded Rectangle 15"/>
           <p:cNvSpPr/>
           <p:nvPr/>
         </p:nvSpPr>
@@ -6663,7 +6839,7 @@
       </p:sp>
       <p:sp>
         <p:nvSpPr>
-          <p:cNvPr id="15" name="TextBox 14"/>
+          <p:cNvPr id="17" name="TextBox 16"/>
           <p:cNvSpPr txBox="1"/>
           <p:nvPr/>
         </p:nvSpPr>
@@ -12974,7 +13150,7 @@
         <p:spPr>
           <a:xfrm>
             <a:off x="3606393" y="2554833"/>
-            <a:ext cx="4945075" cy="1806854"/>
+            <a:ext cx="4945075" cy="1730776"/>
           </a:xfrm>
           <a:prstGeom prst="roundRect">
             <a:avLst/>
@@ -13149,8 +13325,8 @@
         </p:nvSpPr>
         <p:spPr>
           <a:xfrm>
-            <a:off x="3701491" y="4856195"/>
-            <a:ext cx="3899001" cy="323331"/>
+            <a:off x="3701491" y="4409236"/>
+            <a:ext cx="1426463" cy="228234"/>
           </a:xfrm>
           <a:prstGeom prst="roundRect">
             <a:avLst/>
@@ -13193,6 +13369,94 @@
         </p:nvSpPr>
         <p:spPr>
           <a:xfrm>
+            <a:off x="5223052" y="4409236"/>
+            <a:ext cx="1426463" cy="228234"/>
+          </a:xfrm>
+          <a:prstGeom prst="roundRect">
+            <a:avLst/>
+          </a:prstGeom>
+          <a:solidFill>
+            <a:srgbClr val="16303A"/>
+          </a:solidFill>
+          <a:ln>
+            <a:noFill/>
+          </a:ln>
+          <a:effectLst/>
+        </p:spPr>
+        <p:style>
+          <a:lnRef idx="1">
+            <a:schemeClr val="accent1"/>
+          </a:lnRef>
+          <a:fillRef idx="3">
+            <a:schemeClr val="accent1"/>
+          </a:fillRef>
+          <a:effectRef idx="2">
+            <a:schemeClr val="accent1"/>
+          </a:effectRef>
+          <a:fontRef idx="minor">
+            <a:schemeClr val="lt1"/>
+          </a:fontRef>
+        </p:style>
+        <p:txBody>
+          <a:bodyPr rtlCol="0" anchor="ctr"/>
+          <a:lstStyle/>
+          <a:p>
+            <a:pPr algn="ctr"/>
+          </a:p>
+        </p:txBody>
+      </p:sp>
+      <p:sp>
+        <p:nvSpPr>
+          <p:cNvPr id="13" name="Rounded Rectangle 12"/>
+          <p:cNvSpPr/>
+          <p:nvPr/>
+        </p:nvSpPr>
+        <p:spPr>
+          <a:xfrm>
+            <a:off x="3701491" y="4856195"/>
+            <a:ext cx="3899001" cy="323331"/>
+          </a:xfrm>
+          <a:prstGeom prst="roundRect">
+            <a:avLst/>
+          </a:prstGeom>
+          <a:solidFill>
+            <a:srgbClr val="16303A"/>
+          </a:solidFill>
+          <a:ln>
+            <a:noFill/>
+          </a:ln>
+          <a:effectLst/>
+        </p:spPr>
+        <p:style>
+          <a:lnRef idx="1">
+            <a:schemeClr val="accent1"/>
+          </a:lnRef>
+          <a:fillRef idx="3">
+            <a:schemeClr val="accent1"/>
+          </a:fillRef>
+          <a:effectRef idx="2">
+            <a:schemeClr val="accent1"/>
+          </a:effectRef>
+          <a:fontRef idx="minor">
+            <a:schemeClr val="lt1"/>
+          </a:fontRef>
+        </p:style>
+        <p:txBody>
+          <a:bodyPr rtlCol="0" anchor="ctr"/>
+          <a:lstStyle/>
+          <a:p>
+            <a:pPr algn="ctr"/>
+          </a:p>
+        </p:txBody>
+      </p:sp>
+      <p:sp>
+        <p:nvSpPr>
+          <p:cNvPr id="14" name="Rounded Rectangle 13"/>
+          <p:cNvSpPr/>
+          <p:nvPr/>
+        </p:nvSpPr>
+        <p:spPr>
+          <a:xfrm>
             <a:off x="7695590" y="4856195"/>
             <a:ext cx="779800" cy="323331"/>
           </a:xfrm>
@@ -13231,7 +13495,7 @@
       </p:sp>
       <p:sp>
         <p:nvSpPr>
-          <p:cNvPr id="13" name="Rounded Rectangle 12"/>
+          <p:cNvPr id="15" name="Rounded Rectangle 14"/>
           <p:cNvSpPr/>
           <p:nvPr/>
         </p:nvSpPr>
@@ -13275,7 +13539,7 @@
       </p:sp>
       <p:sp>
         <p:nvSpPr>
-          <p:cNvPr id="14" name="Rounded Rectangle 13"/>
+          <p:cNvPr id="16" name="Rounded Rectangle 15"/>
           <p:cNvSpPr/>
           <p:nvPr/>
         </p:nvSpPr>
@@ -13319,7 +13583,7 @@
       </p:sp>
       <p:sp>
         <p:nvSpPr>
-          <p:cNvPr id="15" name="TextBox 14"/>
+          <p:cNvPr id="17" name="TextBox 16"/>
           <p:cNvSpPr txBox="1"/>
           <p:nvPr/>
         </p:nvSpPr>
@@ -13883,7 +14147,7 @@
         <p:spPr>
           <a:xfrm>
             <a:off x="3606393" y="2554833"/>
-            <a:ext cx="4945075" cy="1806854"/>
+            <a:ext cx="4945075" cy="1730776"/>
           </a:xfrm>
           <a:prstGeom prst="roundRect">
             <a:avLst/>
@@ -14058,8 +14322,8 @@
         </p:nvSpPr>
         <p:spPr>
           <a:xfrm>
-            <a:off x="3701491" y="4856195"/>
-            <a:ext cx="3899001" cy="323331"/>
+            <a:off x="3701491" y="4409236"/>
+            <a:ext cx="1426463" cy="228234"/>
           </a:xfrm>
           <a:prstGeom prst="roundRect">
             <a:avLst/>
@@ -14102,6 +14366,94 @@
         </p:nvSpPr>
         <p:spPr>
           <a:xfrm>
+            <a:off x="5223052" y="4409236"/>
+            <a:ext cx="1426463" cy="228234"/>
+          </a:xfrm>
+          <a:prstGeom prst="roundRect">
+            <a:avLst/>
+          </a:prstGeom>
+          <a:solidFill>
+            <a:srgbClr val="16303A"/>
+          </a:solidFill>
+          <a:ln>
+            <a:noFill/>
+          </a:ln>
+          <a:effectLst/>
+        </p:spPr>
+        <p:style>
+          <a:lnRef idx="1">
+            <a:schemeClr val="accent1"/>
+          </a:lnRef>
+          <a:fillRef idx="3">
+            <a:schemeClr val="accent1"/>
+          </a:fillRef>
+          <a:effectRef idx="2">
+            <a:schemeClr val="accent1"/>
+          </a:effectRef>
+          <a:fontRef idx="minor">
+            <a:schemeClr val="lt1"/>
+          </a:fontRef>
+        </p:style>
+        <p:txBody>
+          <a:bodyPr rtlCol="0" anchor="ctr"/>
+          <a:lstStyle/>
+          <a:p>
+            <a:pPr algn="ctr"/>
+          </a:p>
+        </p:txBody>
+      </p:sp>
+      <p:sp>
+        <p:nvSpPr>
+          <p:cNvPr id="13" name="Rounded Rectangle 12"/>
+          <p:cNvSpPr/>
+          <p:nvPr/>
+        </p:nvSpPr>
+        <p:spPr>
+          <a:xfrm>
+            <a:off x="3701491" y="4856195"/>
+            <a:ext cx="3899001" cy="323331"/>
+          </a:xfrm>
+          <a:prstGeom prst="roundRect">
+            <a:avLst/>
+          </a:prstGeom>
+          <a:solidFill>
+            <a:srgbClr val="16303A"/>
+          </a:solidFill>
+          <a:ln>
+            <a:noFill/>
+          </a:ln>
+          <a:effectLst/>
+        </p:spPr>
+        <p:style>
+          <a:lnRef idx="1">
+            <a:schemeClr val="accent1"/>
+          </a:lnRef>
+          <a:fillRef idx="3">
+            <a:schemeClr val="accent1"/>
+          </a:fillRef>
+          <a:effectRef idx="2">
+            <a:schemeClr val="accent1"/>
+          </a:effectRef>
+          <a:fontRef idx="minor">
+            <a:schemeClr val="lt1"/>
+          </a:fontRef>
+        </p:style>
+        <p:txBody>
+          <a:bodyPr rtlCol="0" anchor="ctr"/>
+          <a:lstStyle/>
+          <a:p>
+            <a:pPr algn="ctr"/>
+          </a:p>
+        </p:txBody>
+      </p:sp>
+      <p:sp>
+        <p:nvSpPr>
+          <p:cNvPr id="14" name="Rounded Rectangle 13"/>
+          <p:cNvSpPr/>
+          <p:nvPr/>
+        </p:nvSpPr>
+        <p:spPr>
+          <a:xfrm>
             <a:off x="7695590" y="4856195"/>
             <a:ext cx="779800" cy="323331"/>
           </a:xfrm>
@@ -14140,7 +14492,7 @@
       </p:sp>
       <p:sp>
         <p:nvSpPr>
-          <p:cNvPr id="13" name="Rounded Rectangle 12"/>
+          <p:cNvPr id="15" name="Rounded Rectangle 14"/>
           <p:cNvSpPr/>
           <p:nvPr/>
         </p:nvSpPr>
@@ -14184,7 +14536,7 @@
       </p:sp>
       <p:sp>
         <p:nvSpPr>
-          <p:cNvPr id="14" name="Rounded Rectangle 13"/>
+          <p:cNvPr id="16" name="Rounded Rectangle 15"/>
           <p:cNvSpPr/>
           <p:nvPr/>
         </p:nvSpPr>
@@ -14228,7 +14580,7 @@
       </p:sp>
       <p:sp>
         <p:nvSpPr>
-          <p:cNvPr id="15" name="TextBox 14"/>
+          <p:cNvPr id="17" name="TextBox 16"/>
           <p:cNvSpPr txBox="1"/>
           <p:nvPr/>
         </p:nvSpPr>
